--- a/docs/presentation/GMO_ONAiR_プレゼン.pptx
+++ b/docs/presentation/GMO_ONAiR_プレゼン.pptx
@@ -3340,8 +3340,8 @@
                 <a:solidFill>
                   <a:srgbClr val="005BAC"/>
                 </a:solidFill>
-                <a:latin typeface="Meiryo"/>
-                <a:ea typeface="Meiryo"/>
+                <a:latin typeface="Noto Sans JP"/>
+                <a:ea typeface="Noto Sans JP"/>
               </a:rPr>
               <a:t>GMO GLOBAL STUDIO</a:t>
             </a:r>
@@ -3386,8 +3386,8 @@
                 <a:solidFill>
                   <a:srgbClr val="FFFFFF"/>
                 </a:solidFill>
-                <a:latin typeface="Meiryo"/>
-                <a:ea typeface="Meiryo"/>
+                <a:latin typeface="Noto Sans JP"/>
+                <a:ea typeface="Noto Sans JP"/>
               </a:rPr>
               <a:t>GMO ONAiR</a:t>
             </a:r>
@@ -3432,8 +3432,8 @@
                 <a:solidFill>
                   <a:srgbClr val="FDECC8"/>
                 </a:solidFill>
-                <a:latin typeface="Meiryo"/>
-                <a:ea typeface="Meiryo"/>
+                <a:latin typeface="Noto Sans JP"/>
+                <a:ea typeface="Noto Sans JP"/>
               </a:rPr>
               <a:t>制作のすべてをつなぐ、</a:t>
             </a:r>
@@ -3455,8 +3455,8 @@
                 <a:solidFill>
                   <a:srgbClr val="FFFFFF"/>
                 </a:solidFill>
-                <a:latin typeface="Meiryo"/>
-                <a:ea typeface="Meiryo"/>
+                <a:latin typeface="Noto Sans JP"/>
+                <a:ea typeface="Noto Sans JP"/>
               </a:rPr>
               <a:t>私たちの“会社OS”</a:t>
             </a:r>
@@ -3537,8 +3537,8 @@
                 <a:solidFill>
                   <a:srgbClr val="FFFFFF"/>
                 </a:solidFill>
-                <a:latin typeface="Meiryo"/>
-                <a:ea typeface="Meiryo"/>
+                <a:latin typeface="Noto Sans JP"/>
+                <a:ea typeface="Noto Sans JP"/>
               </a:rPr>
               <a:t>社長プレゼン資料</a:t>
             </a:r>
@@ -3560,8 +3560,8 @@
                 <a:solidFill>
                   <a:srgbClr val="E3EFFA"/>
                 </a:solidFill>
-                <a:latin typeface="Meiryo"/>
-                <a:ea typeface="Meiryo"/>
+                <a:latin typeface="Noto Sans JP"/>
+                <a:ea typeface="Noto Sans JP"/>
               </a:rPr>
               <a:t>このアプリでできること ／ 対話（バイブコーディング）での作り方</a:t>
             </a:r>
@@ -3606,8 +3606,8 @@
                 <a:solidFill>
                   <a:srgbClr val="E3EFFA"/>
                 </a:solidFill>
-                <a:latin typeface="Meiryo"/>
-                <a:ea typeface="Meiryo"/>
+                <a:latin typeface="Noto Sans JP"/>
+                <a:ea typeface="Noto Sans JP"/>
               </a:rPr>
               <a:t>v2.9.26  |  6つのブロックアプリを単一プラットフォームに統合</a:t>
             </a:r>
@@ -3758,8 +3758,8 @@
                 <a:solidFill>
                   <a:srgbClr val="D94B4B"/>
                 </a:solidFill>
-                <a:latin typeface="Meiryo"/>
-                <a:ea typeface="Meiryo"/>
+                <a:latin typeface="Noto Sans JP"/>
+                <a:ea typeface="Noto Sans JP"/>
               </a:rPr>
               <a:t>APP 6 / 6</a:t>
             </a:r>
@@ -3804,8 +3804,8 @@
                 <a:solidFill>
                   <a:srgbClr val="1F2A37"/>
                 </a:solidFill>
-                <a:latin typeface="Meiryo"/>
-                <a:ea typeface="Meiryo"/>
+                <a:latin typeface="Noto Sans JP"/>
+                <a:ea typeface="Noto Sans JP"/>
               </a:rPr>
               <a:t>リアルタイムCG（Realtime CG）</a:t>
             </a:r>
@@ -4156,8 +4156,8 @@
                 <a:solidFill>
                   <a:srgbClr val="1F2A37"/>
                 </a:solidFill>
-                <a:latin typeface="Meiryo"/>
-                <a:ea typeface="Meiryo"/>
+                <a:latin typeface="Noto Sans JP"/>
+                <a:ea typeface="Noto Sans JP"/>
               </a:rPr>
               <a:t>放送用CG（テロップ・ランキング・投票）をライブ送出</a:t>
             </a:r>
@@ -4202,8 +4202,8 @@
                 <a:solidFill>
                   <a:srgbClr val="D94B4B"/>
                 </a:solidFill>
-                <a:latin typeface="Meiryo"/>
-                <a:ea typeface="Meiryo"/>
+                <a:latin typeface="Noto Sans JP"/>
+                <a:ea typeface="Noto Sans JP"/>
               </a:rPr>
               <a:t>できること</a:t>
             </a:r>
@@ -4292,8 +4292,8 @@
                 <a:solidFill>
                   <a:srgbClr val="FFFFFF"/>
                 </a:solidFill>
-                <a:latin typeface="Meiryo"/>
-                <a:ea typeface="Meiryo"/>
+                <a:latin typeface="Noto Sans JP"/>
+                <a:ea typeface="Noto Sans JP"/>
               </a:rPr>
               <a:t>✓</a:t>
             </a:r>
@@ -4338,8 +4338,8 @@
                 <a:solidFill>
                   <a:srgbClr val="1F2A37"/>
                 </a:solidFill>
-                <a:latin typeface="Meiryo"/>
-                <a:ea typeface="Meiryo"/>
+                <a:latin typeface="Noto Sans JP"/>
+                <a:ea typeface="Noto Sans JP"/>
               </a:rPr>
               <a:t>下位置CG / 表彰CG 演出</a:t>
             </a:r>
@@ -4428,8 +4428,8 @@
                 <a:solidFill>
                   <a:srgbClr val="FFFFFF"/>
                 </a:solidFill>
-                <a:latin typeface="Meiryo"/>
-                <a:ea typeface="Meiryo"/>
+                <a:latin typeface="Noto Sans JP"/>
+                <a:ea typeface="Noto Sans JP"/>
               </a:rPr>
               <a:t>✓</a:t>
             </a:r>
@@ -4474,8 +4474,8 @@
                 <a:solidFill>
                   <a:srgbClr val="1F2A37"/>
                 </a:solidFill>
-                <a:latin typeface="Meiryo"/>
-                <a:ea typeface="Meiryo"/>
+                <a:latin typeface="Noto Sans JP"/>
+                <a:ea typeface="Noto Sans JP"/>
               </a:rPr>
               <a:t>アンケート・クイズの即時集計</a:t>
             </a:r>
@@ -4564,8 +4564,8 @@
                 <a:solidFill>
                   <a:srgbClr val="FFFFFF"/>
                 </a:solidFill>
-                <a:latin typeface="Meiryo"/>
-                <a:ea typeface="Meiryo"/>
+                <a:latin typeface="Noto Sans JP"/>
+                <a:ea typeface="Noto Sans JP"/>
               </a:rPr>
               <a:t>✓</a:t>
             </a:r>
@@ -4610,8 +4610,8 @@
                 <a:solidFill>
                   <a:srgbClr val="1F2A37"/>
                 </a:solidFill>
-                <a:latin typeface="Meiryo"/>
-                <a:ea typeface="Meiryo"/>
+                <a:latin typeface="Noto Sans JP"/>
+                <a:ea typeface="Noto Sans JP"/>
               </a:rPr>
               <a:t>OBS向け透過HTML5出力</a:t>
             </a:r>
@@ -4702,8 +4702,8 @@
                 <a:solidFill>
                   <a:srgbClr val="D94B4B"/>
                 </a:solidFill>
-                <a:latin typeface="Meiryo"/>
-                <a:ea typeface="Meiryo"/>
+                <a:latin typeface="Noto Sans JP"/>
+                <a:ea typeface="Noto Sans JP"/>
               </a:rPr>
               <a:t>現場での効果</a:t>
             </a:r>
@@ -4725,8 +4725,8 @@
                 <a:solidFill>
                   <a:srgbClr val="1F2A37"/>
                 </a:solidFill>
-                <a:latin typeface="Meiryo"/>
-                <a:ea typeface="Meiryo"/>
+                <a:latin typeface="Noto Sans JP"/>
+                <a:ea typeface="Noto Sans JP"/>
               </a:rPr>
               <a:t>専門ソフト級のCG演出を、社内オペレーターだけで送出。</a:t>
             </a:r>
@@ -5391,8 +5391,8 @@
                 <a:solidFill>
                   <a:srgbClr val="FFFFFF"/>
                 </a:solidFill>
-                <a:latin typeface="Meiryo"/>
-                <a:ea typeface="Meiryo"/>
+                <a:latin typeface="Noto Sans JP"/>
+                <a:ea typeface="Noto Sans JP"/>
               </a:rPr>
               <a:t>グローバルスタジオ賞</a:t>
             </a:r>
@@ -5569,8 +5569,8 @@
                 <a:solidFill>
                   <a:srgbClr val="FFFFFF"/>
                 </a:solidFill>
-                <a:latin typeface="Meiryo"/>
-                <a:ea typeface="Meiryo"/>
+                <a:latin typeface="Noto Sans JP"/>
+                <a:ea typeface="Noto Sans JP"/>
               </a:rPr>
               <a:t>田中 太郎</a:t>
             </a:r>
@@ -5615,8 +5615,8 @@
                 <a:solidFill>
                   <a:srgbClr val="C9A961"/>
                 </a:solidFill>
-                <a:latin typeface="Meiryo"/>
-                <a:ea typeface="Meiryo"/>
+                <a:latin typeface="Noto Sans JP"/>
+                <a:ea typeface="Noto Sans JP"/>
               </a:rPr>
               <a:t>GMOグローバルスタジオ</a:t>
             </a:r>
@@ -5625,8 +5625,8 @@
                 <a:solidFill>
                   <a:srgbClr val="ADB7C4"/>
                 </a:solidFill>
-                <a:latin typeface="Meiryo"/>
-                <a:ea typeface="Meiryo"/>
+                <a:latin typeface="Noto Sans JP"/>
+                <a:ea typeface="Noto Sans JP"/>
               </a:rPr>
               <a:t>  ｜  制作部 部長</a:t>
             </a:r>
@@ -5803,8 +5803,8 @@
                 <a:solidFill>
                   <a:srgbClr val="8A939E"/>
                 </a:solidFill>
-                <a:latin typeface="Meiryo"/>
-                <a:ea typeface="Meiryo"/>
+                <a:latin typeface="Noto Sans JP"/>
+                <a:ea typeface="Noto Sans JP"/>
               </a:rPr>
               <a:t>▲ 実際の画面イメージ（リアルタイムCG）</a:t>
             </a:r>
@@ -5849,8 +5849,8 @@
                 <a:solidFill>
                   <a:srgbClr val="8A939E"/>
                 </a:solidFill>
-                <a:latin typeface="Meiryo"/>
-                <a:ea typeface="Meiryo"/>
+                <a:latin typeface="Noto Sans JP"/>
+                <a:ea typeface="Noto Sans JP"/>
               </a:rPr>
               <a:t>GMO ONAiR</a:t>
             </a:r>
@@ -6047,8 +6047,8 @@
                 <a:solidFill>
                   <a:srgbClr val="005BAC"/>
                 </a:solidFill>
-                <a:latin typeface="Meiryo"/>
-                <a:ea typeface="Meiryo"/>
+                <a:latin typeface="Noto Sans JP"/>
+                <a:ea typeface="Noto Sans JP"/>
               </a:rPr>
               <a:t>SCREEN GALLERY</a:t>
             </a:r>
@@ -6093,8 +6093,8 @@
                 <a:solidFill>
                   <a:srgbClr val="1F2A37"/>
                 </a:solidFill>
-                <a:latin typeface="Meiryo"/>
-                <a:ea typeface="Meiryo"/>
+                <a:latin typeface="Noto Sans JP"/>
+                <a:ea typeface="Noto Sans JP"/>
               </a:rPr>
               <a:t>実際の画面 — ひとつのデザインで6アプリ</a:t>
             </a:r>
@@ -6851,8 +6851,8 @@
                 <a:solidFill>
                   <a:srgbClr val="FFFFFF"/>
                 </a:solidFill>
-                <a:latin typeface="Meiryo"/>
-                <a:ea typeface="Meiryo"/>
+                <a:latin typeface="Noto Sans JP"/>
+                <a:ea typeface="Noto Sans JP"/>
               </a:rPr>
               <a:t>ダッシュボード</a:t>
             </a:r>
@@ -6941,8 +6941,8 @@
                 <a:solidFill>
                   <a:srgbClr val="5B6672"/>
                 </a:solidFill>
-                <a:latin typeface="Meiryo"/>
-                <a:ea typeface="Meiryo"/>
+                <a:latin typeface="Noto Sans JP"/>
+                <a:ea typeface="Noto Sans JP"/>
               </a:rPr>
               <a:t>案件一覧</a:t>
             </a:r>
@@ -7031,8 +7031,8 @@
                 <a:solidFill>
                   <a:srgbClr val="5B6672"/>
                 </a:solidFill>
-                <a:latin typeface="Meiryo"/>
-                <a:ea typeface="Meiryo"/>
+                <a:latin typeface="Noto Sans JP"/>
+                <a:ea typeface="Noto Sans JP"/>
               </a:rPr>
               <a:t>売上</a:t>
             </a:r>
@@ -7121,8 +7121,8 @@
                 <a:solidFill>
                   <a:srgbClr val="5B6672"/>
                 </a:solidFill>
-                <a:latin typeface="Meiryo"/>
-                <a:ea typeface="Meiryo"/>
+                <a:latin typeface="Noto Sans JP"/>
+                <a:ea typeface="Noto Sans JP"/>
               </a:rPr>
               <a:t>仕入</a:t>
             </a:r>
@@ -7211,8 +7211,8 @@
                 <a:solidFill>
                   <a:srgbClr val="5B6672"/>
                 </a:solidFill>
-                <a:latin typeface="Meiryo"/>
-                <a:ea typeface="Meiryo"/>
+                <a:latin typeface="Noto Sans JP"/>
+                <a:ea typeface="Noto Sans JP"/>
               </a:rPr>
               <a:t>損益</a:t>
             </a:r>
@@ -7301,8 +7301,8 @@
                 <a:solidFill>
                   <a:srgbClr val="5B6672"/>
                 </a:solidFill>
-                <a:latin typeface="Meiryo"/>
-                <a:ea typeface="Meiryo"/>
+                <a:latin typeface="Noto Sans JP"/>
+                <a:ea typeface="Noto Sans JP"/>
               </a:rPr>
               <a:t>請求書</a:t>
             </a:r>
@@ -7347,8 +7347,8 @@
                 <a:solidFill>
                   <a:srgbClr val="1F2A37"/>
                 </a:solidFill>
-                <a:latin typeface="Meiryo"/>
-                <a:ea typeface="Meiryo"/>
+                <a:latin typeface="Noto Sans JP"/>
+                <a:ea typeface="Noto Sans JP"/>
               </a:rPr>
               <a:t>案件ダッシュボード</a:t>
             </a:r>
@@ -7393,8 +7393,8 @@
                 <a:solidFill>
                   <a:srgbClr val="8A939E"/>
                 </a:solidFill>
-                <a:latin typeface="Meiryo"/>
-                <a:ea typeface="Meiryo"/>
+                <a:latin typeface="Noto Sans JP"/>
+                <a:ea typeface="Noto Sans JP"/>
               </a:rPr>
               <a:t>2026年5月 ・ 最終更新 5分前</a:t>
             </a:r>
@@ -7531,8 +7531,8 @@
                 <a:solidFill>
                   <a:srgbClr val="5B6672"/>
                 </a:solidFill>
-                <a:latin typeface="Meiryo"/>
-                <a:ea typeface="Meiryo"/>
+                <a:latin typeface="Noto Sans JP"/>
+                <a:ea typeface="Noto Sans JP"/>
               </a:rPr>
               <a:t>進行中案件</a:t>
             </a:r>
@@ -7587,8 +7587,8 @@
                 <a:solidFill>
                   <a:srgbClr val="1F2A37"/>
                 </a:solidFill>
-                <a:latin typeface="Meiryo"/>
-                <a:ea typeface="Meiryo"/>
+                <a:latin typeface="Noto Sans JP"/>
+                <a:ea typeface="Noto Sans JP"/>
               </a:rPr>
               <a:t>件</a:t>
             </a:r>
@@ -7633,8 +7633,8 @@
                 <a:solidFill>
                   <a:srgbClr val="2EA06B"/>
                 </a:solidFill>
-                <a:latin typeface="Meiryo"/>
-                <a:ea typeface="Meiryo"/>
+                <a:latin typeface="Noto Sans JP"/>
+                <a:ea typeface="Noto Sans JP"/>
               </a:rPr>
               <a:t>▲ 5</a:t>
             </a:r>
@@ -7771,8 +7771,8 @@
                 <a:solidFill>
                   <a:srgbClr val="5B6672"/>
                 </a:solidFill>
-                <a:latin typeface="Meiryo"/>
-                <a:ea typeface="Meiryo"/>
+                <a:latin typeface="Noto Sans JP"/>
+                <a:ea typeface="Noto Sans JP"/>
               </a:rPr>
               <a:t>今月売上</a:t>
             </a:r>
@@ -7827,8 +7827,8 @@
                 <a:solidFill>
                   <a:srgbClr val="1F2A37"/>
                 </a:solidFill>
-                <a:latin typeface="Meiryo"/>
-                <a:ea typeface="Meiryo"/>
+                <a:latin typeface="Noto Sans JP"/>
+                <a:ea typeface="Noto Sans JP"/>
               </a:rPr>
               <a:t>万</a:t>
             </a:r>
@@ -7873,8 +7873,8 @@
                 <a:solidFill>
                   <a:srgbClr val="2EA06B"/>
                 </a:solidFill>
-                <a:latin typeface="Meiryo"/>
-                <a:ea typeface="Meiryo"/>
+                <a:latin typeface="Noto Sans JP"/>
+                <a:ea typeface="Noto Sans JP"/>
               </a:rPr>
               <a:t>▲ 12%</a:t>
             </a:r>
@@ -8011,8 +8011,8 @@
                 <a:solidFill>
                   <a:srgbClr val="5B6672"/>
                 </a:solidFill>
-                <a:latin typeface="Meiryo"/>
-                <a:ea typeface="Meiryo"/>
+                <a:latin typeface="Noto Sans JP"/>
+                <a:ea typeface="Noto Sans JP"/>
               </a:rPr>
               <a:t>粗利率</a:t>
             </a:r>
@@ -8067,8 +8067,8 @@
                 <a:solidFill>
                   <a:srgbClr val="1F2A37"/>
                 </a:solidFill>
-                <a:latin typeface="Meiryo"/>
-                <a:ea typeface="Meiryo"/>
+                <a:latin typeface="Noto Sans JP"/>
+                <a:ea typeface="Noto Sans JP"/>
               </a:rPr>
               <a:t>%</a:t>
             </a:r>
@@ -8113,8 +8113,8 @@
                 <a:solidFill>
                   <a:srgbClr val="2EA06B"/>
                 </a:solidFill>
-                <a:latin typeface="Meiryo"/>
-                <a:ea typeface="Meiryo"/>
+                <a:latin typeface="Noto Sans JP"/>
+                <a:ea typeface="Noto Sans JP"/>
               </a:rPr>
               <a:t>▲ 2.1</a:t>
             </a:r>
@@ -8251,8 +8251,8 @@
                 <a:solidFill>
                   <a:srgbClr val="5B6672"/>
                 </a:solidFill>
-                <a:latin typeface="Meiryo"/>
-                <a:ea typeface="Meiryo"/>
+                <a:latin typeface="Noto Sans JP"/>
+                <a:ea typeface="Noto Sans JP"/>
               </a:rPr>
               <a:t>受注ヨミ</a:t>
             </a:r>
@@ -8307,8 +8307,8 @@
                 <a:solidFill>
                   <a:srgbClr val="1F2A37"/>
                 </a:solidFill>
-                <a:latin typeface="Meiryo"/>
-                <a:ea typeface="Meiryo"/>
+                <a:latin typeface="Noto Sans JP"/>
+                <a:ea typeface="Noto Sans JP"/>
               </a:rPr>
               <a:t>億</a:t>
             </a:r>
@@ -8353,8 +8353,8 @@
                 <a:solidFill>
                   <a:srgbClr val="2EA06B"/>
                 </a:solidFill>
-                <a:latin typeface="Meiryo"/>
-                <a:ea typeface="Meiryo"/>
+                <a:latin typeface="Noto Sans JP"/>
+                <a:ea typeface="Noto Sans JP"/>
               </a:rPr>
               <a:t>▲ 8件</a:t>
             </a:r>
@@ -8447,8 +8447,8 @@
                 <a:solidFill>
                   <a:srgbClr val="1F2A37"/>
                 </a:solidFill>
-                <a:latin typeface="Meiryo"/>
-                <a:ea typeface="Meiryo"/>
+                <a:latin typeface="Noto Sans JP"/>
+                <a:ea typeface="Noto Sans JP"/>
               </a:rPr>
               <a:t>月次売上推移</a:t>
             </a:r>
@@ -8805,8 +8805,8 @@
                 <a:solidFill>
                   <a:srgbClr val="1F2A37"/>
                 </a:solidFill>
-                <a:latin typeface="Meiryo"/>
-                <a:ea typeface="Meiryo"/>
+                <a:latin typeface="Noto Sans JP"/>
+                <a:ea typeface="Noto Sans JP"/>
               </a:rPr>
               <a:t>案件ステージ構成</a:t>
             </a:r>
@@ -9052,8 +9052,8 @@
                 <a:solidFill>
                   <a:srgbClr val="005BAC"/>
                 </a:solidFill>
-                <a:latin typeface="Meiryo"/>
-                <a:ea typeface="Meiryo"/>
+                <a:latin typeface="Noto Sans JP"/>
+                <a:ea typeface="Noto Sans JP"/>
               </a:rPr>
               <a:t>案件管理</a:t>
             </a:r>
@@ -9682,8 +9682,8 @@
                 <a:solidFill>
                   <a:srgbClr val="5B6672"/>
                 </a:solidFill>
-                <a:latin typeface="Meiryo"/>
-                <a:ea typeface="Meiryo"/>
+                <a:latin typeface="Noto Sans JP"/>
+                <a:ea typeface="Noto Sans JP"/>
               </a:rPr>
               <a:t>エディタ</a:t>
             </a:r>
@@ -9818,8 +9818,8 @@
                 <a:solidFill>
                   <a:srgbClr val="FFFFFF"/>
                 </a:solidFill>
-                <a:latin typeface="Meiryo"/>
-                <a:ea typeface="Meiryo"/>
+                <a:latin typeface="Noto Sans JP"/>
+                <a:ea typeface="Noto Sans JP"/>
               </a:rPr>
               <a:t>ランダウン</a:t>
             </a:r>
@@ -9908,8 +9908,8 @@
                 <a:solidFill>
                   <a:srgbClr val="5B6672"/>
                 </a:solidFill>
-                <a:latin typeface="Meiryo"/>
-                <a:ea typeface="Meiryo"/>
+                <a:latin typeface="Noto Sans JP"/>
+                <a:ea typeface="Noto Sans JP"/>
               </a:rPr>
               <a:t>OnAir</a:t>
             </a:r>
@@ -9998,8 +9998,8 @@
                 <a:solidFill>
                   <a:srgbClr val="5B6672"/>
                 </a:solidFill>
-                <a:latin typeface="Meiryo"/>
-                <a:ea typeface="Meiryo"/>
+                <a:latin typeface="Noto Sans JP"/>
+                <a:ea typeface="Noto Sans JP"/>
               </a:rPr>
               <a:t>プロンプター</a:t>
             </a:r>
@@ -10044,8 +10044,8 @@
                 <a:solidFill>
                   <a:srgbClr val="1F2A37"/>
                 </a:solidFill>
-                <a:latin typeface="Meiryo"/>
-                <a:ea typeface="Meiryo"/>
+                <a:latin typeface="Noto Sans JP"/>
+                <a:ea typeface="Noto Sans JP"/>
               </a:rPr>
               <a:t>ランダウン ｜ GLS-A012 収録台本</a:t>
             </a:r>
@@ -10100,8 +10100,8 @@
                 <a:solidFill>
                   <a:srgbClr val="FFFFFF"/>
                 </a:solidFill>
-                <a:latin typeface="Meiryo"/>
-                <a:ea typeface="Meiryo"/>
+                <a:latin typeface="Noto Sans JP"/>
+                <a:ea typeface="Noto Sans JP"/>
               </a:rPr>
               <a:t>● ON AIR</a:t>
             </a:r>
@@ -10190,8 +10190,8 @@
                 <a:solidFill>
                   <a:srgbClr val="169BA0"/>
                 </a:solidFill>
-                <a:latin typeface="Meiryo"/>
-                <a:ea typeface="Meiryo"/>
+                <a:latin typeface="Noto Sans JP"/>
+                <a:ea typeface="Noto Sans JP"/>
               </a:rPr>
               <a:t>No</a:t>
             </a:r>
@@ -10236,8 +10236,8 @@
                 <a:solidFill>
                   <a:srgbClr val="169BA0"/>
                 </a:solidFill>
-                <a:latin typeface="Meiryo"/>
-                <a:ea typeface="Meiryo"/>
+                <a:latin typeface="Noto Sans JP"/>
+                <a:ea typeface="Noto Sans JP"/>
               </a:rPr>
               <a:t>時間</a:t>
             </a:r>
@@ -10282,8 +10282,8 @@
                 <a:solidFill>
                   <a:srgbClr val="169BA0"/>
                 </a:solidFill>
-                <a:latin typeface="Meiryo"/>
-                <a:ea typeface="Meiryo"/>
+                <a:latin typeface="Noto Sans JP"/>
+                <a:ea typeface="Noto Sans JP"/>
               </a:rPr>
               <a:t>内容</a:t>
             </a:r>
@@ -10328,8 +10328,8 @@
                 <a:solidFill>
                   <a:srgbClr val="169BA0"/>
                 </a:solidFill>
-                <a:latin typeface="Meiryo"/>
-                <a:ea typeface="Meiryo"/>
+                <a:latin typeface="Noto Sans JP"/>
+                <a:ea typeface="Noto Sans JP"/>
               </a:rPr>
               <a:t>出演</a:t>
             </a:r>
@@ -10374,8 +10374,8 @@
                 <a:solidFill>
                   <a:srgbClr val="169BA0"/>
                 </a:solidFill>
-                <a:latin typeface="Meiryo"/>
-                <a:ea typeface="Meiryo"/>
+                <a:latin typeface="Noto Sans JP"/>
+                <a:ea typeface="Noto Sans JP"/>
               </a:rPr>
               <a:t>音声</a:t>
             </a:r>
@@ -10558,8 +10558,8 @@
                 <a:solidFill>
                   <a:srgbClr val="1F2A37"/>
                 </a:solidFill>
-                <a:latin typeface="Meiryo"/>
-                <a:ea typeface="Meiryo"/>
+                <a:latin typeface="Noto Sans JP"/>
+                <a:ea typeface="Noto Sans JP"/>
               </a:rPr>
               <a:t>オープニング映像</a:t>
             </a:r>
@@ -10604,8 +10604,8 @@
                 <a:solidFill>
                   <a:srgbClr val="1F2A37"/>
                 </a:solidFill>
-                <a:latin typeface="Meiryo"/>
-                <a:ea typeface="Meiryo"/>
+                <a:latin typeface="Noto Sans JP"/>
+                <a:ea typeface="Noto Sans JP"/>
               </a:rPr>
               <a:t>—</a:t>
             </a:r>
@@ -10650,8 +10650,8 @@
                 <a:solidFill>
                   <a:srgbClr val="1F2A37"/>
                 </a:solidFill>
-                <a:latin typeface="Meiryo"/>
-                <a:ea typeface="Meiryo"/>
+                <a:latin typeface="Noto Sans JP"/>
+                <a:ea typeface="Noto Sans JP"/>
               </a:rPr>
               <a:t>BGM A</a:t>
             </a:r>
@@ -10878,8 +10878,8 @@
                 <a:solidFill>
                   <a:srgbClr val="1F2A37"/>
                 </a:solidFill>
-                <a:latin typeface="Meiryo"/>
-                <a:ea typeface="Meiryo"/>
+                <a:latin typeface="Noto Sans JP"/>
+                <a:ea typeface="Noto Sans JP"/>
               </a:rPr>
               <a:t>MC あいさつ・導入トーク</a:t>
             </a:r>
@@ -10924,8 +10924,8 @@
                 <a:solidFill>
                   <a:srgbClr val="1F2A37"/>
                 </a:solidFill>
-                <a:latin typeface="Meiryo"/>
-                <a:ea typeface="Meiryo"/>
+                <a:latin typeface="Noto Sans JP"/>
+                <a:ea typeface="Noto Sans JP"/>
               </a:rPr>
               <a:t>田中 / 佐藤</a:t>
             </a:r>
@@ -10970,8 +10970,8 @@
                 <a:solidFill>
                   <a:srgbClr val="1F2A37"/>
                 </a:solidFill>
-                <a:latin typeface="Meiryo"/>
-                <a:ea typeface="Meiryo"/>
+                <a:latin typeface="Noto Sans JP"/>
+                <a:ea typeface="Noto Sans JP"/>
               </a:rPr>
               <a:t>Mic 1,2</a:t>
             </a:r>
@@ -11154,8 +11154,8 @@
                 <a:solidFill>
                   <a:srgbClr val="1F2A37"/>
                 </a:solidFill>
-                <a:latin typeface="Meiryo"/>
-                <a:ea typeface="Meiryo"/>
+                <a:latin typeface="Noto Sans JP"/>
+                <a:ea typeface="Noto Sans JP"/>
               </a:rPr>
               <a:t>VTR① 事例紹介</a:t>
             </a:r>
@@ -11200,8 +11200,8 @@
                 <a:solidFill>
                   <a:srgbClr val="1F2A37"/>
                 </a:solidFill>
-                <a:latin typeface="Meiryo"/>
-                <a:ea typeface="Meiryo"/>
+                <a:latin typeface="Noto Sans JP"/>
+                <a:ea typeface="Noto Sans JP"/>
               </a:rPr>
               <a:t>—</a:t>
             </a:r>
@@ -11246,8 +11246,8 @@
                 <a:solidFill>
                   <a:srgbClr val="1F2A37"/>
                 </a:solidFill>
-                <a:latin typeface="Meiryo"/>
-                <a:ea typeface="Meiryo"/>
+                <a:latin typeface="Noto Sans JP"/>
+                <a:ea typeface="Noto Sans JP"/>
               </a:rPr>
               <a:t>VTR</a:t>
             </a:r>
@@ -11430,8 +11430,8 @@
                 <a:solidFill>
                   <a:srgbClr val="1F2A37"/>
                 </a:solidFill>
-                <a:latin typeface="Meiryo"/>
-                <a:ea typeface="Meiryo"/>
+                <a:latin typeface="Noto Sans JP"/>
+                <a:ea typeface="Noto Sans JP"/>
               </a:rPr>
               <a:t>ゲストトーク</a:t>
             </a:r>
@@ -11476,8 +11476,8 @@
                 <a:solidFill>
                   <a:srgbClr val="1F2A37"/>
                 </a:solidFill>
-                <a:latin typeface="Meiryo"/>
-                <a:ea typeface="Meiryo"/>
+                <a:latin typeface="Noto Sans JP"/>
+                <a:ea typeface="Noto Sans JP"/>
               </a:rPr>
               <a:t>鈴木</a:t>
             </a:r>
@@ -11522,8 +11522,8 @@
                 <a:solidFill>
                   <a:srgbClr val="1F2A37"/>
                 </a:solidFill>
-                <a:latin typeface="Meiryo"/>
-                <a:ea typeface="Meiryo"/>
+                <a:latin typeface="Noto Sans JP"/>
+                <a:ea typeface="Noto Sans JP"/>
               </a:rPr>
               <a:t>Mic 1,3</a:t>
             </a:r>
@@ -11706,8 +11706,8 @@
                 <a:solidFill>
                   <a:srgbClr val="1F2A37"/>
                 </a:solidFill>
-                <a:latin typeface="Meiryo"/>
-                <a:ea typeface="Meiryo"/>
+                <a:latin typeface="Noto Sans JP"/>
+                <a:ea typeface="Noto Sans JP"/>
               </a:rPr>
               <a:t>エンディング</a:t>
             </a:r>
@@ -11752,8 +11752,8 @@
                 <a:solidFill>
                   <a:srgbClr val="1F2A37"/>
                 </a:solidFill>
-                <a:latin typeface="Meiryo"/>
-                <a:ea typeface="Meiryo"/>
+                <a:latin typeface="Noto Sans JP"/>
+                <a:ea typeface="Noto Sans JP"/>
               </a:rPr>
               <a:t>全員</a:t>
             </a:r>
@@ -11798,8 +11798,8 @@
                 <a:solidFill>
                   <a:srgbClr val="1F2A37"/>
                 </a:solidFill>
-                <a:latin typeface="Meiryo"/>
-                <a:ea typeface="Meiryo"/>
+                <a:latin typeface="Noto Sans JP"/>
+                <a:ea typeface="Noto Sans JP"/>
               </a:rPr>
               <a:t>BGM B</a:t>
             </a:r>
@@ -11854,8 +11854,8 @@
                 <a:solidFill>
                   <a:srgbClr val="169BA0"/>
                 </a:solidFill>
-                <a:latin typeface="Meiryo"/>
-                <a:ea typeface="Meiryo"/>
+                <a:latin typeface="Noto Sans JP"/>
+                <a:ea typeface="Noto Sans JP"/>
               </a:rPr>
               <a:t>Qシート</a:t>
             </a:r>
@@ -12484,8 +12484,8 @@
                 <a:solidFill>
                   <a:srgbClr val="5B6672"/>
                 </a:solidFill>
-                <a:latin typeface="Meiryo"/>
-                <a:ea typeface="Meiryo"/>
+                <a:latin typeface="Noto Sans JP"/>
+                <a:ea typeface="Noto Sans JP"/>
               </a:rPr>
               <a:t>ダッシュボード</a:t>
             </a:r>
@@ -12620,8 +12620,8 @@
                 <a:solidFill>
                   <a:srgbClr val="FFFFFF"/>
                 </a:solidFill>
-                <a:latin typeface="Meiryo"/>
-                <a:ea typeface="Meiryo"/>
+                <a:latin typeface="Noto Sans JP"/>
+                <a:ea typeface="Noto Sans JP"/>
               </a:rPr>
               <a:t>機材一覧</a:t>
             </a:r>
@@ -12710,8 +12710,8 @@
                 <a:solidFill>
                   <a:srgbClr val="5B6672"/>
                 </a:solidFill>
-                <a:latin typeface="Meiryo"/>
-                <a:ea typeface="Meiryo"/>
+                <a:latin typeface="Noto Sans JP"/>
+                <a:ea typeface="Noto Sans JP"/>
               </a:rPr>
               <a:t>ケーブル</a:t>
             </a:r>
@@ -12800,8 +12800,8 @@
                 <a:solidFill>
                   <a:srgbClr val="5B6672"/>
                 </a:solidFill>
-                <a:latin typeface="Meiryo"/>
-                <a:ea typeface="Meiryo"/>
+                <a:latin typeface="Noto Sans JP"/>
+                <a:ea typeface="Noto Sans JP"/>
               </a:rPr>
               <a:t>貸出</a:t>
             </a:r>
@@ -12890,8 +12890,8 @@
                 <a:solidFill>
                   <a:srgbClr val="5B6672"/>
                 </a:solidFill>
-                <a:latin typeface="Meiryo"/>
-                <a:ea typeface="Meiryo"/>
+                <a:latin typeface="Noto Sans JP"/>
+                <a:ea typeface="Noto Sans JP"/>
               </a:rPr>
               <a:t>ラック図</a:t>
             </a:r>
@@ -12936,8 +12936,8 @@
                 <a:solidFill>
                   <a:srgbClr val="1F2A37"/>
                 </a:solidFill>
-                <a:latin typeface="Meiryo"/>
-                <a:ea typeface="Meiryo"/>
+                <a:latin typeface="Noto Sans JP"/>
+                <a:ea typeface="Noto Sans JP"/>
               </a:rPr>
               <a:t>機材一覧</a:t>
             </a:r>
@@ -13030,8 +13030,8 @@
                 <a:solidFill>
                   <a:srgbClr val="8A939E"/>
                 </a:solidFill>
-                <a:latin typeface="Meiryo"/>
-                <a:ea typeface="Meiryo"/>
+                <a:latin typeface="Noto Sans JP"/>
+                <a:ea typeface="Noto Sans JP"/>
               </a:rPr>
               <a:t>🔍 機材名・型番で検索</a:t>
             </a:r>
@@ -13086,8 +13086,8 @@
                 <a:solidFill>
                   <a:srgbClr val="FFFFFF"/>
                 </a:solidFill>
-                <a:latin typeface="Meiryo"/>
-                <a:ea typeface="Meiryo"/>
+                <a:latin typeface="Noto Sans JP"/>
+                <a:ea typeface="Noto Sans JP"/>
               </a:rPr>
               <a:t>＋ 登録</a:t>
             </a:r>
@@ -13144,8 +13144,8 @@
                 <a:solidFill>
                   <a:srgbClr val="F59E0B"/>
                 </a:solidFill>
-                <a:latin typeface="Meiryo"/>
-                <a:ea typeface="Meiryo"/>
+                <a:latin typeface="Noto Sans JP"/>
+                <a:ea typeface="Noto Sans JP"/>
               </a:rPr>
               <a:t>Excel</a:t>
             </a:r>
@@ -13234,8 +13234,8 @@
                 <a:solidFill>
                   <a:srgbClr val="B06E00"/>
                 </a:solidFill>
-                <a:latin typeface="Meiryo"/>
-                <a:ea typeface="Meiryo"/>
+                <a:latin typeface="Noto Sans JP"/>
+                <a:ea typeface="Noto Sans JP"/>
               </a:rPr>
               <a:t>型番</a:t>
             </a:r>
@@ -13280,8 +13280,8 @@
                 <a:solidFill>
                   <a:srgbClr val="B06E00"/>
                 </a:solidFill>
-                <a:latin typeface="Meiryo"/>
-                <a:ea typeface="Meiryo"/>
+                <a:latin typeface="Noto Sans JP"/>
+                <a:ea typeface="Noto Sans JP"/>
               </a:rPr>
               <a:t>機材名</a:t>
             </a:r>
@@ -13326,8 +13326,8 @@
                 <a:solidFill>
                   <a:srgbClr val="B06E00"/>
                 </a:solidFill>
-                <a:latin typeface="Meiryo"/>
-                <a:ea typeface="Meiryo"/>
+                <a:latin typeface="Noto Sans JP"/>
+                <a:ea typeface="Noto Sans JP"/>
               </a:rPr>
               <a:t>数</a:t>
             </a:r>
@@ -13372,8 +13372,8 @@
                 <a:solidFill>
                   <a:srgbClr val="B06E00"/>
                 </a:solidFill>
-                <a:latin typeface="Meiryo"/>
-                <a:ea typeface="Meiryo"/>
+                <a:latin typeface="Noto Sans JP"/>
+                <a:ea typeface="Noto Sans JP"/>
               </a:rPr>
               <a:t>設置場所</a:t>
             </a:r>
@@ -13418,8 +13418,8 @@
                 <a:solidFill>
                   <a:srgbClr val="B06E00"/>
                 </a:solidFill>
-                <a:latin typeface="Meiryo"/>
-                <a:ea typeface="Meiryo"/>
+                <a:latin typeface="Noto Sans JP"/>
+                <a:ea typeface="Noto Sans JP"/>
               </a:rPr>
               <a:t>状態</a:t>
             </a:r>
@@ -13556,8 +13556,8 @@
                 <a:solidFill>
                   <a:srgbClr val="1F2A37"/>
                 </a:solidFill>
-                <a:latin typeface="Meiryo"/>
-                <a:ea typeface="Meiryo"/>
+                <a:latin typeface="Noto Sans JP"/>
+                <a:ea typeface="Noto Sans JP"/>
               </a:rPr>
               <a:t>業務用4Kカメラ</a:t>
             </a:r>
@@ -13648,8 +13648,8 @@
                 <a:solidFill>
                   <a:srgbClr val="1F2A37"/>
                 </a:solidFill>
-                <a:latin typeface="Meiryo"/>
-                <a:ea typeface="Meiryo"/>
+                <a:latin typeface="Noto Sans JP"/>
+                <a:ea typeface="Noto Sans JP"/>
               </a:rPr>
               <a:t>Aスタジオ</a:t>
             </a:r>
@@ -13704,8 +13704,8 @@
                 <a:solidFill>
                   <a:srgbClr val="FFFFFF"/>
                 </a:solidFill>
-                <a:latin typeface="Meiryo"/>
-                <a:ea typeface="Meiryo"/>
+                <a:latin typeface="Noto Sans JP"/>
+                <a:ea typeface="Noto Sans JP"/>
               </a:rPr>
               <a:t>稼働</a:t>
             </a:r>
@@ -13842,8 +13842,8 @@
                 <a:solidFill>
                   <a:srgbClr val="1F2A37"/>
                 </a:solidFill>
-                <a:latin typeface="Meiryo"/>
-                <a:ea typeface="Meiryo"/>
+                <a:latin typeface="Noto Sans JP"/>
+                <a:ea typeface="Noto Sans JP"/>
               </a:rPr>
               <a:t>光カメラケーブル 30m</a:t>
             </a:r>
@@ -13934,8 +13934,8 @@
                 <a:solidFill>
                   <a:srgbClr val="1F2A37"/>
                 </a:solidFill>
-                <a:latin typeface="Meiryo"/>
-                <a:ea typeface="Meiryo"/>
+                <a:latin typeface="Noto Sans JP"/>
+                <a:ea typeface="Noto Sans JP"/>
               </a:rPr>
               <a:t>倉庫B-2</a:t>
             </a:r>
@@ -13990,8 +13990,8 @@
                 <a:solidFill>
                   <a:srgbClr val="FFFFFF"/>
                 </a:solidFill>
-                <a:latin typeface="Meiryo"/>
-                <a:ea typeface="Meiryo"/>
+                <a:latin typeface="Noto Sans JP"/>
+                <a:ea typeface="Noto Sans JP"/>
               </a:rPr>
               <a:t>在庫</a:t>
             </a:r>
@@ -14128,8 +14128,8 @@
                 <a:solidFill>
                   <a:srgbClr val="1F2A37"/>
                 </a:solidFill>
-                <a:latin typeface="Meiryo"/>
-                <a:ea typeface="Meiryo"/>
+                <a:latin typeface="Noto Sans JP"/>
+                <a:ea typeface="Noto Sans JP"/>
               </a:rPr>
               <a:t>デジタル卓 32ch</a:t>
             </a:r>
@@ -14220,8 +14220,8 @@
                 <a:solidFill>
                   <a:srgbClr val="1F2A37"/>
                 </a:solidFill>
-                <a:latin typeface="Meiryo"/>
-                <a:ea typeface="Meiryo"/>
+                <a:latin typeface="Noto Sans JP"/>
+                <a:ea typeface="Noto Sans JP"/>
               </a:rPr>
               <a:t>副調整室</a:t>
             </a:r>
@@ -14276,8 +14276,8 @@
                 <a:solidFill>
                   <a:srgbClr val="FFFFFF"/>
                 </a:solidFill>
-                <a:latin typeface="Meiryo"/>
-                <a:ea typeface="Meiryo"/>
+                <a:latin typeface="Noto Sans JP"/>
+                <a:ea typeface="Noto Sans JP"/>
               </a:rPr>
               <a:t>稼働</a:t>
             </a:r>
@@ -14414,8 +14414,8 @@
                 <a:solidFill>
                   <a:srgbClr val="1F2A37"/>
                 </a:solidFill>
-                <a:latin typeface="Meiryo"/>
-                <a:ea typeface="Meiryo"/>
+                <a:latin typeface="Noto Sans JP"/>
+                <a:ea typeface="Noto Sans JP"/>
               </a:rPr>
               <a:t>シネマカメラ</a:t>
             </a:r>
@@ -14506,8 +14506,8 @@
                 <a:solidFill>
                   <a:srgbClr val="1F2A37"/>
                 </a:solidFill>
-                <a:latin typeface="Meiryo"/>
-                <a:ea typeface="Meiryo"/>
+                <a:latin typeface="Noto Sans JP"/>
+                <a:ea typeface="Noto Sans JP"/>
               </a:rPr>
               <a:t>貸出中</a:t>
             </a:r>
@@ -14562,8 +14562,8 @@
                 <a:solidFill>
                   <a:srgbClr val="FFFFFF"/>
                 </a:solidFill>
-                <a:latin typeface="Meiryo"/>
-                <a:ea typeface="Meiryo"/>
+                <a:latin typeface="Noto Sans JP"/>
+                <a:ea typeface="Noto Sans JP"/>
               </a:rPr>
               <a:t>貸出</a:t>
             </a:r>
@@ -14700,8 +14700,8 @@
                 <a:solidFill>
                   <a:srgbClr val="1F2A37"/>
                 </a:solidFill>
-                <a:latin typeface="Meiryo"/>
-                <a:ea typeface="Meiryo"/>
+                <a:latin typeface="Noto Sans JP"/>
+                <a:ea typeface="Noto Sans JP"/>
               </a:rPr>
               <a:t>システムカメラ</a:t>
             </a:r>
@@ -14792,8 +14792,8 @@
                 <a:solidFill>
                   <a:srgbClr val="1F2A37"/>
                 </a:solidFill>
-                <a:latin typeface="Meiryo"/>
-                <a:ea typeface="Meiryo"/>
+                <a:latin typeface="Noto Sans JP"/>
+                <a:ea typeface="Noto Sans JP"/>
               </a:rPr>
               <a:t>Aスタジオ</a:t>
             </a:r>
@@ -14848,8 +14848,8 @@
                 <a:solidFill>
                   <a:srgbClr val="FFFFFF"/>
                 </a:solidFill>
-                <a:latin typeface="Meiryo"/>
-                <a:ea typeface="Meiryo"/>
+                <a:latin typeface="Noto Sans JP"/>
+                <a:ea typeface="Noto Sans JP"/>
               </a:rPr>
               <a:t>稼働</a:t>
             </a:r>
@@ -14904,8 +14904,8 @@
                 <a:solidFill>
                   <a:srgbClr val="F59E0B"/>
                 </a:solidFill>
-                <a:latin typeface="Meiryo"/>
-                <a:ea typeface="Meiryo"/>
+                <a:latin typeface="Noto Sans JP"/>
+                <a:ea typeface="Noto Sans JP"/>
               </a:rPr>
               <a:t>機材管理</a:t>
             </a:r>
@@ -15534,8 +15534,8 @@
                 <a:solidFill>
                   <a:srgbClr val="5B6672"/>
                 </a:solidFill>
-                <a:latin typeface="Meiryo"/>
-                <a:ea typeface="Meiryo"/>
+                <a:latin typeface="Noto Sans JP"/>
+                <a:ea typeface="Noto Sans JP"/>
               </a:rPr>
               <a:t>資料一覧</a:t>
             </a:r>
@@ -15670,8 +15670,8 @@
                 <a:solidFill>
                   <a:srgbClr val="FFFFFF"/>
                 </a:solidFill>
-                <a:latin typeface="Meiryo"/>
-                <a:ea typeface="Meiryo"/>
+                <a:latin typeface="Noto Sans JP"/>
+                <a:ea typeface="Noto Sans JP"/>
               </a:rPr>
               <a:t>編集</a:t>
             </a:r>
@@ -15760,8 +15760,8 @@
                 <a:solidFill>
                   <a:srgbClr val="5B6672"/>
                 </a:solidFill>
-                <a:latin typeface="Meiryo"/>
-                <a:ea typeface="Meiryo"/>
+                <a:latin typeface="Noto Sans JP"/>
+                <a:ea typeface="Noto Sans JP"/>
               </a:rPr>
               <a:t>印刷プレビュー</a:t>
             </a:r>
@@ -15806,8 +15806,8 @@
                 <a:solidFill>
                   <a:srgbClr val="1F2A37"/>
                 </a:solidFill>
-                <a:latin typeface="Meiryo"/>
-                <a:ea typeface="Meiryo"/>
+                <a:latin typeface="Noto Sans JP"/>
+                <a:ea typeface="Noto Sans JP"/>
               </a:rPr>
               <a:t>技術仕様書 ｜ GLS-A012</a:t>
             </a:r>
@@ -15864,8 +15864,8 @@
                 <a:solidFill>
                   <a:srgbClr val="7C5CD6"/>
                 </a:solidFill>
-                <a:latin typeface="Meiryo"/>
-                <a:ea typeface="Meiryo"/>
+                <a:latin typeface="Noto Sans JP"/>
+                <a:ea typeface="Noto Sans JP"/>
               </a:rPr>
               <a:t>ヘッダー</a:t>
             </a:r>
@@ -15920,8 +15920,8 @@
                 <a:solidFill>
                   <a:srgbClr val="FFFFFF"/>
                 </a:solidFill>
-                <a:latin typeface="Meiryo"/>
-                <a:ea typeface="Meiryo"/>
+                <a:latin typeface="Noto Sans JP"/>
+                <a:ea typeface="Noto Sans JP"/>
               </a:rPr>
               <a:t>カメラ</a:t>
             </a:r>
@@ -15978,8 +15978,8 @@
                 <a:solidFill>
                   <a:srgbClr val="7C5CD6"/>
                 </a:solidFill>
-                <a:latin typeface="Meiryo"/>
-                <a:ea typeface="Meiryo"/>
+                <a:latin typeface="Noto Sans JP"/>
+                <a:ea typeface="Noto Sans JP"/>
               </a:rPr>
               <a:t>映像</a:t>
             </a:r>
@@ -16036,8 +16036,8 @@
                 <a:solidFill>
                   <a:srgbClr val="7C5CD6"/>
                 </a:solidFill>
-                <a:latin typeface="Meiryo"/>
-                <a:ea typeface="Meiryo"/>
+                <a:latin typeface="Noto Sans JP"/>
+                <a:ea typeface="Noto Sans JP"/>
               </a:rPr>
               <a:t>音声</a:t>
             </a:r>
@@ -16094,8 +16094,8 @@
                 <a:solidFill>
                   <a:srgbClr val="7C5CD6"/>
                 </a:solidFill>
-                <a:latin typeface="Meiryo"/>
-                <a:ea typeface="Meiryo"/>
+                <a:latin typeface="Noto Sans JP"/>
+                <a:ea typeface="Noto Sans JP"/>
               </a:rPr>
               <a:t>通信</a:t>
             </a:r>
@@ -16140,8 +16140,8 @@
                 <a:solidFill>
                   <a:srgbClr val="7C5CD6"/>
                 </a:solidFill>
-                <a:latin typeface="Meiryo"/>
-                <a:ea typeface="Meiryo"/>
+                <a:latin typeface="Noto Sans JP"/>
+                <a:ea typeface="Noto Sans JP"/>
               </a:rPr>
               <a:t>カメラ台数</a:t>
             </a:r>
@@ -16234,8 +16234,8 @@
                 <a:solidFill>
                   <a:srgbClr val="1F2A37"/>
                 </a:solidFill>
-                <a:latin typeface="Meiryo"/>
-                <a:ea typeface="Meiryo"/>
+                <a:latin typeface="Noto Sans JP"/>
+                <a:ea typeface="Noto Sans JP"/>
               </a:rPr>
               <a:t>8 台</a:t>
             </a:r>
@@ -16280,8 +16280,8 @@
                 <a:solidFill>
                   <a:srgbClr val="7C5CD6"/>
                 </a:solidFill>
-                <a:latin typeface="Meiryo"/>
-                <a:ea typeface="Meiryo"/>
+                <a:latin typeface="Noto Sans JP"/>
+                <a:ea typeface="Noto Sans JP"/>
               </a:rPr>
               <a:t>カメラ機種</a:t>
             </a:r>
@@ -16374,8 +16374,8 @@
                 <a:solidFill>
                   <a:srgbClr val="1F2A37"/>
                 </a:solidFill>
-                <a:latin typeface="Meiryo"/>
-                <a:ea typeface="Meiryo"/>
+                <a:latin typeface="Noto Sans JP"/>
+                <a:ea typeface="Noto Sans JP"/>
               </a:rPr>
               <a:t>HDC-3500 / PXW-FX9</a:t>
             </a:r>
@@ -16420,8 +16420,8 @@
                 <a:solidFill>
                   <a:srgbClr val="7C5CD6"/>
                 </a:solidFill>
-                <a:latin typeface="Meiryo"/>
-                <a:ea typeface="Meiryo"/>
+                <a:latin typeface="Noto Sans JP"/>
+                <a:ea typeface="Noto Sans JP"/>
               </a:rPr>
               <a:t>レンズ構成</a:t>
             </a:r>
@@ -16514,8 +16514,8 @@
                 <a:solidFill>
                   <a:srgbClr val="1F2A37"/>
                 </a:solidFill>
-                <a:latin typeface="Meiryo"/>
-                <a:ea typeface="Meiryo"/>
+                <a:latin typeface="Noto Sans JP"/>
+                <a:ea typeface="Noto Sans JP"/>
               </a:rPr>
               <a:t>ズーム ×4, 単焦点 ×2</a:t>
             </a:r>
@@ -16560,8 +16560,8 @@
                 <a:solidFill>
                   <a:srgbClr val="7C5CD6"/>
                 </a:solidFill>
-                <a:latin typeface="Meiryo"/>
-                <a:ea typeface="Meiryo"/>
+                <a:latin typeface="Noto Sans JP"/>
+                <a:ea typeface="Noto Sans JP"/>
               </a:rPr>
               <a:t>出力フォーマット</a:t>
             </a:r>
@@ -16654,8 +16654,8 @@
                 <a:solidFill>
                   <a:srgbClr val="1F2A37"/>
                 </a:solidFill>
-                <a:latin typeface="Meiryo"/>
-                <a:ea typeface="Meiryo"/>
+                <a:latin typeface="Noto Sans JP"/>
+                <a:ea typeface="Noto Sans JP"/>
               </a:rPr>
               <a:t>1080/59.94p</a:t>
             </a:r>
@@ -16700,8 +16700,8 @@
                 <a:solidFill>
                   <a:srgbClr val="7C5CD6"/>
                 </a:solidFill>
-                <a:latin typeface="Meiryo"/>
-                <a:ea typeface="Meiryo"/>
+                <a:latin typeface="Noto Sans JP"/>
+                <a:ea typeface="Noto Sans JP"/>
               </a:rPr>
               <a:t>ケーブル長</a:t>
             </a:r>
@@ -16794,8 +16794,8 @@
                 <a:solidFill>
                   <a:srgbClr val="1F2A37"/>
                 </a:solidFill>
-                <a:latin typeface="Meiryo"/>
-                <a:ea typeface="Meiryo"/>
+                <a:latin typeface="Noto Sans JP"/>
+                <a:ea typeface="Noto Sans JP"/>
               </a:rPr>
               <a:t>30m / 50m 光</a:t>
             </a:r>
@@ -16840,8 +16840,8 @@
                 <a:solidFill>
                   <a:srgbClr val="7C5CD6"/>
                 </a:solidFill>
-                <a:latin typeface="Meiryo"/>
-                <a:ea typeface="Meiryo"/>
+                <a:latin typeface="Noto Sans JP"/>
+                <a:ea typeface="Noto Sans JP"/>
               </a:rPr>
               <a:t>特記事項</a:t>
             </a:r>
@@ -16934,8 +16934,8 @@
                 <a:solidFill>
                   <a:srgbClr val="1F2A37"/>
                 </a:solidFill>
-                <a:latin typeface="Meiryo"/>
-                <a:ea typeface="Meiryo"/>
+                <a:latin typeface="Noto Sans JP"/>
+                <a:ea typeface="Noto Sans JP"/>
               </a:rPr>
               <a:t>中継車との連携あり</a:t>
             </a:r>
@@ -16990,8 +16990,8 @@
                 <a:solidFill>
                   <a:srgbClr val="7C5CD6"/>
                 </a:solidFill>
-                <a:latin typeface="Meiryo"/>
-                <a:ea typeface="Meiryo"/>
+                <a:latin typeface="Noto Sans JP"/>
+                <a:ea typeface="Noto Sans JP"/>
               </a:rPr>
               <a:t>技術資料</a:t>
             </a:r>
@@ -17450,8 +17450,8 @@
                 <a:solidFill>
                   <a:srgbClr val="CED7E2"/>
                 </a:solidFill>
-                <a:latin typeface="Meiryo"/>
-                <a:ea typeface="Meiryo"/>
+                <a:latin typeface="Noto Sans JP"/>
+                <a:ea typeface="Noto Sans JP"/>
               </a:rPr>
               <a:t>本番進行 ｜ 年間表彰式 2026</a:t>
             </a:r>
@@ -17506,8 +17506,8 @@
                 <a:solidFill>
                   <a:srgbClr val="FFFFFF"/>
                 </a:solidFill>
-                <a:latin typeface="Meiryo"/>
-                <a:ea typeface="Meiryo"/>
+                <a:latin typeface="Noto Sans JP"/>
+                <a:ea typeface="Noto Sans JP"/>
               </a:rPr>
               <a:t>● LIVE</a:t>
             </a:r>
@@ -17598,8 +17598,8 @@
                 <a:solidFill>
                   <a:srgbClr val="9FADBD"/>
                 </a:solidFill>
-                <a:latin typeface="Meiryo"/>
-                <a:ea typeface="Meiryo"/>
+                <a:latin typeface="Noto Sans JP"/>
+                <a:ea typeface="Noto Sans JP"/>
               </a:rPr>
               <a:t>経過時間 ・ 次の転換まで 03:12</a:t>
             </a:r>
@@ -17692,8 +17692,8 @@
                 <a:solidFill>
                   <a:srgbClr val="9FADBD"/>
                 </a:solidFill>
-                <a:latin typeface="Meiryo"/>
-                <a:ea typeface="Meiryo"/>
+                <a:latin typeface="Noto Sans JP"/>
+                <a:ea typeface="Noto Sans JP"/>
               </a:rPr>
               <a:t>視聴者数</a:t>
             </a:r>
@@ -17832,8 +17832,8 @@
                 <a:solidFill>
                   <a:srgbClr val="9FADBD"/>
                 </a:solidFill>
-                <a:latin typeface="Meiryo"/>
-                <a:ea typeface="Meiryo"/>
+                <a:latin typeface="Noto Sans JP"/>
+                <a:ea typeface="Noto Sans JP"/>
               </a:rPr>
               <a:t>Zoom</a:t>
             </a:r>
@@ -17972,8 +17972,8 @@
                 <a:solidFill>
                   <a:srgbClr val="9FADBD"/>
                 </a:solidFill>
-                <a:latin typeface="Meiryo"/>
-                <a:ea typeface="Meiryo"/>
+                <a:latin typeface="Noto Sans JP"/>
+                <a:ea typeface="Noto Sans JP"/>
               </a:rPr>
               <a:t>YouTube</a:t>
             </a:r>
@@ -18112,8 +18112,8 @@
                 <a:solidFill>
                   <a:srgbClr val="9FADBD"/>
                 </a:solidFill>
-                <a:latin typeface="Meiryo"/>
-                <a:ea typeface="Meiryo"/>
+                <a:latin typeface="Noto Sans JP"/>
+                <a:ea typeface="Noto Sans JP"/>
               </a:rPr>
               <a:t>Teams</a:t>
             </a:r>
@@ -18214,8 +18214,8 @@
                 <a:solidFill>
                   <a:srgbClr val="2EA06B"/>
                 </a:solidFill>
-                <a:latin typeface="Meiryo"/>
-                <a:ea typeface="Meiryo"/>
+                <a:latin typeface="Noto Sans JP"/>
+                <a:ea typeface="Noto Sans JP"/>
               </a:rPr>
               <a:t>ライブ運用</a:t>
             </a:r>
@@ -18856,8 +18856,8 @@
                 <a:solidFill>
                   <a:srgbClr val="FFFFFF"/>
                 </a:solidFill>
-                <a:latin typeface="Meiryo"/>
-                <a:ea typeface="Meiryo"/>
+                <a:latin typeface="Noto Sans JP"/>
+                <a:ea typeface="Noto Sans JP"/>
               </a:rPr>
               <a:t>グローバルスタジオ賞</a:t>
             </a:r>
@@ -19034,8 +19034,8 @@
                 <a:solidFill>
                   <a:srgbClr val="FFFFFF"/>
                 </a:solidFill>
-                <a:latin typeface="Meiryo"/>
-                <a:ea typeface="Meiryo"/>
+                <a:latin typeface="Noto Sans JP"/>
+                <a:ea typeface="Noto Sans JP"/>
               </a:rPr>
               <a:t>田中 太郎</a:t>
             </a:r>
@@ -19080,8 +19080,8 @@
                 <a:solidFill>
                   <a:srgbClr val="C9A961"/>
                 </a:solidFill>
-                <a:latin typeface="Meiryo"/>
-                <a:ea typeface="Meiryo"/>
+                <a:latin typeface="Noto Sans JP"/>
+                <a:ea typeface="Noto Sans JP"/>
               </a:rPr>
               <a:t>GMOグローバルスタジオ</a:t>
             </a:r>
@@ -19090,8 +19090,8 @@
                 <a:solidFill>
                   <a:srgbClr val="ADB7C4"/>
                 </a:solidFill>
-                <a:latin typeface="Meiryo"/>
-                <a:ea typeface="Meiryo"/>
+                <a:latin typeface="Noto Sans JP"/>
+                <a:ea typeface="Noto Sans JP"/>
               </a:rPr>
               <a:t>  ｜  制作部 部長</a:t>
             </a:r>
@@ -19278,8 +19278,8 @@
                 <a:solidFill>
                   <a:srgbClr val="D94B4B"/>
                 </a:solidFill>
-                <a:latin typeface="Meiryo"/>
-                <a:ea typeface="Meiryo"/>
+                <a:latin typeface="Noto Sans JP"/>
+                <a:ea typeface="Noto Sans JP"/>
               </a:rPr>
               <a:t>リアルタイムCG</a:t>
             </a:r>
@@ -19324,8 +19324,8 @@
                 <a:solidFill>
                   <a:srgbClr val="8A939E"/>
                 </a:solidFill>
-                <a:latin typeface="Meiryo"/>
-                <a:ea typeface="Meiryo"/>
+                <a:latin typeface="Noto Sans JP"/>
+                <a:ea typeface="Noto Sans JP"/>
               </a:rPr>
               <a:t>GMO ONAiR</a:t>
             </a:r>
@@ -19522,8 +19522,8 @@
                 <a:solidFill>
                   <a:srgbClr val="005BAC"/>
                 </a:solidFill>
-                <a:latin typeface="Meiryo"/>
-                <a:ea typeface="Meiryo"/>
+                <a:latin typeface="Noto Sans JP"/>
+                <a:ea typeface="Noto Sans JP"/>
               </a:rPr>
               <a:t>HOW IT CONNECTS</a:t>
             </a:r>
@@ -19568,8 +19568,8 @@
                 <a:solidFill>
                   <a:srgbClr val="1F2A37"/>
                 </a:solidFill>
-                <a:latin typeface="Meiryo"/>
-                <a:ea typeface="Meiryo"/>
+                <a:latin typeface="Noto Sans JP"/>
+                <a:ea typeface="Noto Sans JP"/>
               </a:rPr>
               <a:t>GLS番号 — すべてのデータを束ねる“背番号”</a:t>
             </a:r>
@@ -19754,8 +19754,8 @@
                 <a:solidFill>
                   <a:srgbClr val="FFFFFF"/>
                 </a:solidFill>
-                <a:latin typeface="Meiryo"/>
-                <a:ea typeface="Meiryo"/>
+                <a:latin typeface="Noto Sans JP"/>
+                <a:ea typeface="Noto Sans JP"/>
               </a:rPr>
               <a:t>GLS-A001
 案件の背番号</a:t>
@@ -20035,8 +20035,8 @@
                 <a:solidFill>
                   <a:srgbClr val="005BAC"/>
                 </a:solidFill>
-                <a:latin typeface="Meiryo"/>
-                <a:ea typeface="Meiryo"/>
+                <a:latin typeface="Noto Sans JP"/>
+                <a:ea typeface="Noto Sans JP"/>
               </a:rPr>
               <a:t>案件管理</a:t>
             </a:r>
@@ -20099,8 +20099,8 @@
                 <a:solidFill>
                   <a:srgbClr val="169BA0"/>
                 </a:solidFill>
-                <a:latin typeface="Meiryo"/>
-                <a:ea typeface="Meiryo"/>
+                <a:latin typeface="Noto Sans JP"/>
+                <a:ea typeface="Noto Sans JP"/>
               </a:rPr>
               <a:t>Qシート</a:t>
             </a:r>
@@ -20163,8 +20163,8 @@
                 <a:solidFill>
                   <a:srgbClr val="F59E0B"/>
                 </a:solidFill>
-                <a:latin typeface="Meiryo"/>
-                <a:ea typeface="Meiryo"/>
+                <a:latin typeface="Noto Sans JP"/>
+                <a:ea typeface="Noto Sans JP"/>
               </a:rPr>
               <a:t>機材管理</a:t>
             </a:r>
@@ -20227,8 +20227,8 @@
                 <a:solidFill>
                   <a:srgbClr val="7C5CD6"/>
                 </a:solidFill>
-                <a:latin typeface="Meiryo"/>
-                <a:ea typeface="Meiryo"/>
+                <a:latin typeface="Noto Sans JP"/>
+                <a:ea typeface="Noto Sans JP"/>
               </a:rPr>
               <a:t>技術資料</a:t>
             </a:r>
@@ -20291,8 +20291,8 @@
                 <a:solidFill>
                   <a:srgbClr val="2EA06B"/>
                 </a:solidFill>
-                <a:latin typeface="Meiryo"/>
-                <a:ea typeface="Meiryo"/>
+                <a:latin typeface="Noto Sans JP"/>
+                <a:ea typeface="Noto Sans JP"/>
               </a:rPr>
               <a:t>ライブ運用</a:t>
             </a:r>
@@ -20355,8 +20355,8 @@
                 <a:solidFill>
                   <a:srgbClr val="D94B4B"/>
                 </a:solidFill>
-                <a:latin typeface="Meiryo"/>
-                <a:ea typeface="Meiryo"/>
+                <a:latin typeface="Noto Sans JP"/>
+                <a:ea typeface="Noto Sans JP"/>
               </a:rPr>
               <a:t>リアルタイムCG</a:t>
             </a:r>
@@ -20401,8 +20401,8 @@
                 <a:solidFill>
                   <a:srgbClr val="1F2A37"/>
                 </a:solidFill>
-                <a:latin typeface="Meiryo"/>
-                <a:ea typeface="Meiryo"/>
+                <a:latin typeface="Noto Sans JP"/>
+                <a:ea typeface="Noto Sans JP"/>
               </a:rPr>
               <a:t>受注時に1つの </a:t>
             </a:r>
@@ -20411,8 +20411,8 @@
                 <a:solidFill>
                   <a:srgbClr val="005BAC"/>
                 </a:solidFill>
-                <a:latin typeface="Meiryo"/>
-                <a:ea typeface="Meiryo"/>
+                <a:latin typeface="Noto Sans JP"/>
+                <a:ea typeface="Noto Sans JP"/>
               </a:rPr>
               <a:t>GLS番号</a:t>
             </a:r>
@@ -20421,8 +20421,8 @@
                 <a:solidFill>
                   <a:srgbClr val="1F2A37"/>
                 </a:solidFill>
-                <a:latin typeface="Meiryo"/>
-                <a:ea typeface="Meiryo"/>
+                <a:latin typeface="Noto Sans JP"/>
+                <a:ea typeface="Noto Sans JP"/>
               </a:rPr>
               <a:t> を発番すると、見積・Qシート・機材・技術資料・本番・CGがすべて同じ案件として自動的に紐づきます。</a:t>
             </a:r>
@@ -20467,8 +20467,8 @@
                 <a:solidFill>
                   <a:srgbClr val="8A939E"/>
                 </a:solidFill>
-                <a:latin typeface="Meiryo"/>
-                <a:ea typeface="Meiryo"/>
+                <a:latin typeface="Noto Sans JP"/>
+                <a:ea typeface="Noto Sans JP"/>
               </a:rPr>
               <a:t>GMO ONAiR</a:t>
             </a:r>
@@ -20665,8 +20665,8 @@
                 <a:solidFill>
                   <a:srgbClr val="005BAC"/>
                 </a:solidFill>
-                <a:latin typeface="Meiryo"/>
-                <a:ea typeface="Meiryo"/>
+                <a:latin typeface="Noto Sans JP"/>
+                <a:ea typeface="Noto Sans JP"/>
               </a:rPr>
               <a:t>FLOW</a:t>
             </a:r>
@@ -20711,8 +20711,8 @@
                 <a:solidFill>
                   <a:srgbClr val="1F2A37"/>
                 </a:solidFill>
-                <a:latin typeface="Meiryo"/>
-                <a:ea typeface="Meiryo"/>
+                <a:latin typeface="Noto Sans JP"/>
+                <a:ea typeface="Noto Sans JP"/>
               </a:rPr>
               <a:t>案件のライフサイクルを1本の線でカバー</a:t>
             </a:r>
@@ -20891,8 +20891,8 @@
                 <a:solidFill>
                   <a:srgbClr val="FFFFFF"/>
                 </a:solidFill>
-                <a:latin typeface="Meiryo"/>
-                <a:ea typeface="Meiryo"/>
+                <a:latin typeface="Noto Sans JP"/>
+                <a:ea typeface="Noto Sans JP"/>
               </a:rPr>
               <a:t>①提案</a:t>
             </a:r>
@@ -20937,8 +20937,8 @@
                 <a:solidFill>
                   <a:srgbClr val="FFFFFF"/>
                 </a:solidFill>
-                <a:latin typeface="Meiryo"/>
-                <a:ea typeface="Meiryo"/>
+                <a:latin typeface="Noto Sans JP"/>
+                <a:ea typeface="Noto Sans JP"/>
               </a:rPr>
               <a:t>ヨミ・見積</a:t>
             </a:r>
@@ -20983,8 +20983,8 @@
                 <a:solidFill>
                   <a:srgbClr val="005BAC"/>
                 </a:solidFill>
-                <a:latin typeface="Meiryo"/>
-                <a:ea typeface="Meiryo"/>
+                <a:latin typeface="Noto Sans JP"/>
+                <a:ea typeface="Noto Sans JP"/>
               </a:rPr>
               <a:t>案件管理</a:t>
             </a:r>
@@ -21081,8 +21081,8 @@
                 <a:solidFill>
                   <a:srgbClr val="FFFFFF"/>
                 </a:solidFill>
-                <a:latin typeface="Meiryo"/>
-                <a:ea typeface="Meiryo"/>
+                <a:latin typeface="Noto Sans JP"/>
+                <a:ea typeface="Noto Sans JP"/>
               </a:rPr>
               <a:t>②受注</a:t>
             </a:r>
@@ -21127,8 +21127,8 @@
                 <a:solidFill>
                   <a:srgbClr val="FFFFFF"/>
                 </a:solidFill>
-                <a:latin typeface="Meiryo"/>
-                <a:ea typeface="Meiryo"/>
+                <a:latin typeface="Noto Sans JP"/>
+                <a:ea typeface="Noto Sans JP"/>
               </a:rPr>
               <a:t>GLS発番</a:t>
             </a:r>
@@ -21173,8 +21173,8 @@
                 <a:solidFill>
                   <a:srgbClr val="4A9DE0"/>
                 </a:solidFill>
-                <a:latin typeface="Meiryo"/>
-                <a:ea typeface="Meiryo"/>
+                <a:latin typeface="Noto Sans JP"/>
+                <a:ea typeface="Noto Sans JP"/>
               </a:rPr>
               <a:t>案件管理</a:t>
             </a:r>
@@ -21271,8 +21271,8 @@
                 <a:solidFill>
                   <a:srgbClr val="FFFFFF"/>
                 </a:solidFill>
-                <a:latin typeface="Meiryo"/>
-                <a:ea typeface="Meiryo"/>
+                <a:latin typeface="Noto Sans JP"/>
+                <a:ea typeface="Noto Sans JP"/>
               </a:rPr>
               <a:t>③制作</a:t>
             </a:r>
@@ -21317,8 +21317,8 @@
                 <a:solidFill>
                   <a:srgbClr val="FFFFFF"/>
                 </a:solidFill>
-                <a:latin typeface="Meiryo"/>
-                <a:ea typeface="Meiryo"/>
+                <a:latin typeface="Noto Sans JP"/>
+                <a:ea typeface="Noto Sans JP"/>
               </a:rPr>
               <a:t>台本・機材・技術</a:t>
             </a:r>
@@ -21363,8 +21363,8 @@
                 <a:solidFill>
                   <a:srgbClr val="169BA0"/>
                 </a:solidFill>
-                <a:latin typeface="Meiryo"/>
-                <a:ea typeface="Meiryo"/>
+                <a:latin typeface="Noto Sans JP"/>
+                <a:ea typeface="Noto Sans JP"/>
               </a:rPr>
               <a:t>Qシート / 機材 / 技術</a:t>
             </a:r>
@@ -21461,8 +21461,8 @@
                 <a:solidFill>
                   <a:srgbClr val="FFFFFF"/>
                 </a:solidFill>
-                <a:latin typeface="Meiryo"/>
-                <a:ea typeface="Meiryo"/>
+                <a:latin typeface="Noto Sans JP"/>
+                <a:ea typeface="Noto Sans JP"/>
               </a:rPr>
               <a:t>④本番</a:t>
             </a:r>
@@ -21507,8 +21507,8 @@
                 <a:solidFill>
                   <a:srgbClr val="FFFFFF"/>
                 </a:solidFill>
-                <a:latin typeface="Meiryo"/>
-                <a:ea typeface="Meiryo"/>
+                <a:latin typeface="Noto Sans JP"/>
+                <a:ea typeface="Noto Sans JP"/>
               </a:rPr>
               <a:t>進行・CG送出</a:t>
             </a:r>
@@ -21553,8 +21553,8 @@
                 <a:solidFill>
                   <a:srgbClr val="2EA06B"/>
                 </a:solidFill>
-                <a:latin typeface="Meiryo"/>
-                <a:ea typeface="Meiryo"/>
+                <a:latin typeface="Noto Sans JP"/>
+                <a:ea typeface="Noto Sans JP"/>
               </a:rPr>
               <a:t>ライブ / CG</a:t>
             </a:r>
@@ -21651,8 +21651,8 @@
                 <a:solidFill>
                   <a:srgbClr val="FFFFFF"/>
                 </a:solidFill>
-                <a:latin typeface="Meiryo"/>
-                <a:ea typeface="Meiryo"/>
+                <a:latin typeface="Noto Sans JP"/>
+                <a:ea typeface="Noto Sans JP"/>
               </a:rPr>
               <a:t>⑤請求</a:t>
             </a:r>
@@ -21697,8 +21697,8 @@
                 <a:solidFill>
                   <a:srgbClr val="FFFFFF"/>
                 </a:solidFill>
-                <a:latin typeface="Meiryo"/>
-                <a:ea typeface="Meiryo"/>
+                <a:latin typeface="Noto Sans JP"/>
+                <a:ea typeface="Noto Sans JP"/>
               </a:rPr>
               <a:t>売上・損益</a:t>
             </a:r>
@@ -21743,8 +21743,8 @@
                 <a:solidFill>
                   <a:srgbClr val="F59E0B"/>
                 </a:solidFill>
-                <a:latin typeface="Meiryo"/>
-                <a:ea typeface="Meiryo"/>
+                <a:latin typeface="Noto Sans JP"/>
+                <a:ea typeface="Noto Sans JP"/>
               </a:rPr>
               <a:t>案件管理</a:t>
             </a:r>
@@ -21835,8 +21835,8 @@
                 <a:solidFill>
                   <a:srgbClr val="005BAC"/>
                 </a:solidFill>
-                <a:latin typeface="Meiryo"/>
-                <a:ea typeface="Meiryo"/>
+                <a:latin typeface="Noto Sans JP"/>
+                <a:ea typeface="Noto Sans JP"/>
               </a:rPr>
               <a:t>ひとつのGLS番号でデータが流れ続ける — 転記ゼロ・抜け漏れゼロ</a:t>
             </a:r>
@@ -21881,8 +21881,8 @@
                 <a:solidFill>
                   <a:srgbClr val="8A939E"/>
                 </a:solidFill>
-                <a:latin typeface="Meiryo"/>
-                <a:ea typeface="Meiryo"/>
+                <a:latin typeface="Noto Sans JP"/>
+                <a:ea typeface="Noto Sans JP"/>
               </a:rPr>
               <a:t>GMO ONAiR</a:t>
             </a:r>
@@ -22079,8 +22079,8 @@
                 <a:solidFill>
                   <a:srgbClr val="005BAC"/>
                 </a:solidFill>
-                <a:latin typeface="Meiryo"/>
-                <a:ea typeface="Meiryo"/>
+                <a:latin typeface="Noto Sans JP"/>
+                <a:ea typeface="Noto Sans JP"/>
               </a:rPr>
               <a:t>ARCHITECTURE</a:t>
             </a:r>
@@ -22125,8 +22125,8 @@
                 <a:solidFill>
                   <a:srgbClr val="1F2A37"/>
                 </a:solidFill>
-                <a:latin typeface="Meiryo"/>
-                <a:ea typeface="Meiryo"/>
+                <a:latin typeface="Noto Sans JP"/>
+                <a:ea typeface="Noto Sans JP"/>
               </a:rPr>
               <a:t>技術構成 — モダンで堅牢、運用は軽量</a:t>
             </a:r>
@@ -22539,8 +22539,8 @@
                 <a:solidFill>
                   <a:srgbClr val="1F2A37"/>
                 </a:solidFill>
-                <a:latin typeface="Meiryo"/>
-                <a:ea typeface="Meiryo"/>
+                <a:latin typeface="Noto Sans JP"/>
+                <a:ea typeface="Noto Sans JP"/>
               </a:rPr>
               <a:t>画面（フロント）</a:t>
             </a:r>
@@ -22667,8 +22667,8 @@
                 <a:solidFill>
                   <a:srgbClr val="5B6672"/>
                 </a:solidFill>
-                <a:latin typeface="Meiryo"/>
-                <a:ea typeface="Meiryo"/>
+                <a:latin typeface="Noto Sans JP"/>
+                <a:ea typeface="Noto Sans JP"/>
               </a:rPr>
               <a:t>スマホ対応・高速・統一デザイン</a:t>
             </a:r>
@@ -22943,8 +22943,8 @@
                 <a:solidFill>
                   <a:srgbClr val="1F2A37"/>
                 </a:solidFill>
-                <a:latin typeface="Meiryo"/>
-                <a:ea typeface="Meiryo"/>
+                <a:latin typeface="Noto Sans JP"/>
+                <a:ea typeface="Noto Sans JP"/>
               </a:rPr>
               <a:t>サーバー（API）</a:t>
             </a:r>
@@ -23071,8 +23071,8 @@
                 <a:solidFill>
                   <a:srgbClr val="5B6672"/>
                 </a:solidFill>
-                <a:latin typeface="Meiryo"/>
-                <a:ea typeface="Meiryo"/>
+                <a:latin typeface="Noto Sans JP"/>
+                <a:ea typeface="Noto Sans JP"/>
               </a:rPr>
               <a:t>リアルタイム同期・共通API</a:t>
             </a:r>
@@ -23347,8 +23347,8 @@
                 <a:solidFill>
                   <a:srgbClr val="1F2A37"/>
                 </a:solidFill>
-                <a:latin typeface="Meiryo"/>
-                <a:ea typeface="Meiryo"/>
+                <a:latin typeface="Noto Sans JP"/>
+                <a:ea typeface="Noto Sans JP"/>
               </a:rPr>
               <a:t>データベース</a:t>
             </a:r>
@@ -23475,8 +23475,8 @@
                 <a:solidFill>
                   <a:srgbClr val="5B6672"/>
                 </a:solidFill>
-                <a:latin typeface="Meiryo"/>
-                <a:ea typeface="Meiryo"/>
+                <a:latin typeface="Noto Sans JP"/>
+                <a:ea typeface="Noto Sans JP"/>
               </a:rPr>
               <a:t>本番/検証をDB名で安全に分離</a:t>
             </a:r>
@@ -23795,8 +23795,8 @@
                 <a:solidFill>
                   <a:srgbClr val="1F2A37"/>
                 </a:solidFill>
-                <a:latin typeface="Meiryo"/>
-                <a:ea typeface="Meiryo"/>
+                <a:latin typeface="Noto Sans JP"/>
+                <a:ea typeface="Noto Sans JP"/>
               </a:rPr>
               <a:t>インフラ</a:t>
             </a:r>
@@ -23923,8 +23923,8 @@
                 <a:solidFill>
                   <a:srgbClr val="5B6672"/>
                 </a:solidFill>
-                <a:latin typeface="Meiryo"/>
-                <a:ea typeface="Meiryo"/>
+                <a:latin typeface="Noto Sans JP"/>
+                <a:ea typeface="Noto Sans JP"/>
               </a:rPr>
               <a:t>自動デプロイ・3時間ごと自動バックアップ</a:t>
             </a:r>
@@ -23969,8 +23969,8 @@
                 <a:solidFill>
                   <a:srgbClr val="8A939E"/>
                 </a:solidFill>
-                <a:latin typeface="Meiryo"/>
-                <a:ea typeface="Meiryo"/>
+                <a:latin typeface="Noto Sans JP"/>
+                <a:ea typeface="Noto Sans JP"/>
               </a:rPr>
               <a:t>GMO ONAiR</a:t>
             </a:r>
@@ -24167,8 +24167,8 @@
                 <a:solidFill>
                   <a:srgbClr val="005BAC"/>
                 </a:solidFill>
-                <a:latin typeface="Meiryo"/>
-                <a:ea typeface="Meiryo"/>
+                <a:latin typeface="Noto Sans JP"/>
+                <a:ea typeface="Noto Sans JP"/>
               </a:rPr>
               <a:t>CONCLUSION FIRST</a:t>
             </a:r>
@@ -24213,8 +24213,8 @@
                 <a:solidFill>
                   <a:srgbClr val="1F2A37"/>
                 </a:solidFill>
-                <a:latin typeface="Meiryo"/>
-                <a:ea typeface="Meiryo"/>
+                <a:latin typeface="Noto Sans JP"/>
+                <a:ea typeface="Noto Sans JP"/>
               </a:rPr>
               <a:t>もし Claude を使わなかったら？</a:t>
             </a:r>
@@ -24431,8 +24431,8 @@
                 <a:solidFill>
                   <a:srgbClr val="D94B4B"/>
                 </a:solidFill>
-                <a:latin typeface="Meiryo"/>
-                <a:ea typeface="Meiryo"/>
+                <a:latin typeface="Noto Sans JP"/>
+                <a:ea typeface="Noto Sans JP"/>
               </a:rPr>
               <a:t>従来型開発なら　</a:t>
             </a:r>
@@ -24441,8 +24441,8 @@
                 <a:solidFill>
                   <a:srgbClr val="1F2A37"/>
                 </a:solidFill>
-                <a:latin typeface="Meiryo"/>
-                <a:ea typeface="Meiryo"/>
+                <a:latin typeface="Noto Sans JP"/>
+                <a:ea typeface="Noto Sans JP"/>
               </a:rPr>
               <a:t>エンジニア 5〜7名 × 約12か月 ／ 費用 およそ 6,000万〜1億円</a:t>
             </a:r>
@@ -24577,8 +24577,8 @@
                 <a:solidFill>
                   <a:srgbClr val="2EA06B"/>
                 </a:solidFill>
-                <a:latin typeface="Meiryo"/>
-                <a:ea typeface="Meiryo"/>
+                <a:latin typeface="Noto Sans JP"/>
+                <a:ea typeface="Noto Sans JP"/>
               </a:rPr>
               <a:t>実際（Claude活用）　</a:t>
             </a:r>
@@ -24587,8 +24587,8 @@
                 <a:solidFill>
                   <a:srgbClr val="1F2A37"/>
                 </a:solidFill>
-                <a:latin typeface="Meiryo"/>
-                <a:ea typeface="Meiryo"/>
+                <a:latin typeface="Noto Sans JP"/>
+                <a:ea typeface="Noto Sans JP"/>
               </a:rPr>
               <a:t>ほぼ 1名 の指揮 × 対話 ／ 外注費 ほぼ0円・数週間で土台→以後も毎日進化</a:t>
             </a:r>
@@ -24697,8 +24697,8 @@
                 <a:solidFill>
                   <a:srgbClr val="FFFFFF"/>
                 </a:solidFill>
-                <a:latin typeface="Meiryo"/>
-                <a:ea typeface="Meiryo"/>
+                <a:latin typeface="Noto Sans JP"/>
+                <a:ea typeface="Noto Sans JP"/>
               </a:rPr>
               <a:t>期間</a:t>
             </a:r>
@@ -24787,8 +24787,8 @@
                 <a:solidFill>
                   <a:srgbClr val="D94B4B"/>
                 </a:solidFill>
-                <a:latin typeface="Meiryo"/>
-                <a:ea typeface="Meiryo"/>
+                <a:latin typeface="Noto Sans JP"/>
+                <a:ea typeface="Noto Sans JP"/>
               </a:rPr>
               <a:t>従来 </a:t>
             </a:r>
@@ -24797,8 +24797,8 @@
                 <a:solidFill>
                   <a:srgbClr val="1F2A37"/>
                 </a:solidFill>
-                <a:latin typeface="Meiryo"/>
-                <a:ea typeface="Meiryo"/>
+                <a:latin typeface="Noto Sans JP"/>
+                <a:ea typeface="Noto Sans JP"/>
               </a:rPr>
               <a:t>約 12 か月</a:t>
             </a:r>
@@ -24879,8 +24879,8 @@
                 <a:solidFill>
                   <a:srgbClr val="2EA06B"/>
                 </a:solidFill>
-                <a:latin typeface="Meiryo"/>
-                <a:ea typeface="Meiryo"/>
+                <a:latin typeface="Noto Sans JP"/>
+                <a:ea typeface="Noto Sans JP"/>
               </a:rPr>
               <a:t>Claude</a:t>
             </a:r>
@@ -24902,8 +24902,8 @@
                 <a:solidFill>
                   <a:srgbClr val="2EA06B"/>
                 </a:solidFill>
-                <a:latin typeface="Meiryo"/>
-                <a:ea typeface="Meiryo"/>
+                <a:latin typeface="Noto Sans JP"/>
+                <a:ea typeface="Noto Sans JP"/>
               </a:rPr>
               <a:t>数週間で土台
 以後も毎日改善</a:t>
@@ -25013,8 +25013,8 @@
                 <a:solidFill>
                   <a:srgbClr val="FFFFFF"/>
                 </a:solidFill>
-                <a:latin typeface="Meiryo"/>
-                <a:ea typeface="Meiryo"/>
+                <a:latin typeface="Noto Sans JP"/>
+                <a:ea typeface="Noto Sans JP"/>
               </a:rPr>
               <a:t>人数</a:t>
             </a:r>
@@ -25103,8 +25103,8 @@
                 <a:solidFill>
                   <a:srgbClr val="D94B4B"/>
                 </a:solidFill>
-                <a:latin typeface="Meiryo"/>
-                <a:ea typeface="Meiryo"/>
+                <a:latin typeface="Noto Sans JP"/>
+                <a:ea typeface="Noto Sans JP"/>
               </a:rPr>
               <a:t>従来 </a:t>
             </a:r>
@@ -25113,8 +25113,8 @@
                 <a:solidFill>
                   <a:srgbClr val="1F2A37"/>
                 </a:solidFill>
-                <a:latin typeface="Meiryo"/>
-                <a:ea typeface="Meiryo"/>
+                <a:latin typeface="Noto Sans JP"/>
+                <a:ea typeface="Noto Sans JP"/>
               </a:rPr>
               <a:t>5〜7 名</a:t>
             </a:r>
@@ -25195,8 +25195,8 @@
                 <a:solidFill>
                   <a:srgbClr val="2EA06B"/>
                 </a:solidFill>
-                <a:latin typeface="Meiryo"/>
-                <a:ea typeface="Meiryo"/>
+                <a:latin typeface="Noto Sans JP"/>
+                <a:ea typeface="Noto Sans JP"/>
               </a:rPr>
               <a:t>Claude</a:t>
             </a:r>
@@ -25218,8 +25218,8 @@
                 <a:solidFill>
                   <a:srgbClr val="2EA06B"/>
                 </a:solidFill>
-                <a:latin typeface="Meiryo"/>
-                <a:ea typeface="Meiryo"/>
+                <a:latin typeface="Noto Sans JP"/>
+                <a:ea typeface="Noto Sans JP"/>
               </a:rPr>
               <a:t>1 名（社内）
 ＋ Claude</a:t>
@@ -25329,8 +25329,8 @@
                 <a:solidFill>
                   <a:srgbClr val="FFFFFF"/>
                 </a:solidFill>
-                <a:latin typeface="Meiryo"/>
-                <a:ea typeface="Meiryo"/>
+                <a:latin typeface="Noto Sans JP"/>
+                <a:ea typeface="Noto Sans JP"/>
               </a:rPr>
               <a:t>費用</a:t>
             </a:r>
@@ -25419,8 +25419,8 @@
                 <a:solidFill>
                   <a:srgbClr val="D94B4B"/>
                 </a:solidFill>
-                <a:latin typeface="Meiryo"/>
-                <a:ea typeface="Meiryo"/>
+                <a:latin typeface="Noto Sans JP"/>
+                <a:ea typeface="Noto Sans JP"/>
               </a:rPr>
               <a:t>従来 </a:t>
             </a:r>
@@ -25429,8 +25429,8 @@
                 <a:solidFill>
                   <a:srgbClr val="1F2A37"/>
                 </a:solidFill>
-                <a:latin typeface="Meiryo"/>
-                <a:ea typeface="Meiryo"/>
+                <a:latin typeface="Noto Sans JP"/>
+                <a:ea typeface="Noto Sans JP"/>
               </a:rPr>
               <a:t>6,000万〜1億円</a:t>
             </a:r>
@@ -25511,8 +25511,8 @@
                 <a:solidFill>
                   <a:srgbClr val="2EA06B"/>
                 </a:solidFill>
-                <a:latin typeface="Meiryo"/>
-                <a:ea typeface="Meiryo"/>
+                <a:latin typeface="Noto Sans JP"/>
+                <a:ea typeface="Noto Sans JP"/>
               </a:rPr>
               <a:t>Claude</a:t>
             </a:r>
@@ -25534,8 +25534,8 @@
                 <a:solidFill>
                   <a:srgbClr val="2EA06B"/>
                 </a:solidFill>
-                <a:latin typeface="Meiryo"/>
-                <a:ea typeface="Meiryo"/>
+                <a:latin typeface="Noto Sans JP"/>
+                <a:ea typeface="Noto Sans JP"/>
               </a:rPr>
               <a:t>ほぼ 0 円
 (AI+VPS 月数万円)</a:t>
@@ -25645,8 +25645,8 @@
                 <a:solidFill>
                   <a:srgbClr val="FFFFFF"/>
                 </a:solidFill>
-                <a:latin typeface="Meiryo"/>
-                <a:ea typeface="Meiryo"/>
+                <a:latin typeface="Noto Sans JP"/>
+                <a:ea typeface="Noto Sans JP"/>
               </a:rPr>
               <a:t>速さ</a:t>
             </a:r>
@@ -25735,8 +25735,8 @@
                 <a:solidFill>
                   <a:srgbClr val="D94B4B"/>
                 </a:solidFill>
-                <a:latin typeface="Meiryo"/>
-                <a:ea typeface="Meiryo"/>
+                <a:latin typeface="Noto Sans JP"/>
+                <a:ea typeface="Noto Sans JP"/>
               </a:rPr>
               <a:t>従来 </a:t>
             </a:r>
@@ -25745,8 +25745,8 @@
                 <a:solidFill>
                   <a:srgbClr val="1F2A37"/>
                 </a:solidFill>
-                <a:latin typeface="Meiryo"/>
-                <a:ea typeface="Meiryo"/>
+                <a:latin typeface="Noto Sans JP"/>
+                <a:ea typeface="Noto Sans JP"/>
               </a:rPr>
               <a:t>仕様確定に数週間</a:t>
             </a:r>
@@ -25827,8 +25827,8 @@
                 <a:solidFill>
                   <a:srgbClr val="2EA06B"/>
                 </a:solidFill>
-                <a:latin typeface="Meiryo"/>
-                <a:ea typeface="Meiryo"/>
+                <a:latin typeface="Noto Sans JP"/>
+                <a:ea typeface="Noto Sans JP"/>
               </a:rPr>
               <a:t>Claude</a:t>
             </a:r>
@@ -25850,8 +25850,8 @@
                 <a:solidFill>
                   <a:srgbClr val="2EA06B"/>
                 </a:solidFill>
-                <a:latin typeface="Meiryo"/>
-                <a:ea typeface="Meiryo"/>
+                <a:latin typeface="Noto Sans JP"/>
+                <a:ea typeface="Noto Sans JP"/>
               </a:rPr>
               <a:t>言ったその日に
 動くものが出る</a:t>
@@ -25897,8 +25897,8 @@
                 <a:solidFill>
                   <a:srgbClr val="8A939E"/>
                 </a:solidFill>
-                <a:latin typeface="Meiryo"/>
-                <a:ea typeface="Meiryo"/>
+                <a:latin typeface="Noto Sans JP"/>
+                <a:ea typeface="Noto Sans JP"/>
               </a:rPr>
               <a:t>※ 推計の前提：本体規模 約97,000行・6アプリ＋サーバー・DB世代99・リアルタイム/放送CG/財務/PDF/Excel/BOX連携/2FA/自動デプロイを含む。人月単価100万円・受託相場で試算。</a:t>
             </a:r>
@@ -25943,8 +25943,8 @@
                 <a:solidFill>
                   <a:srgbClr val="8A939E"/>
                 </a:solidFill>
-                <a:latin typeface="Meiryo"/>
-                <a:ea typeface="Meiryo"/>
+                <a:latin typeface="Noto Sans JP"/>
+                <a:ea typeface="Noto Sans JP"/>
               </a:rPr>
               <a:t>GMO ONAiR</a:t>
             </a:r>
@@ -26141,8 +26141,8 @@
                 <a:solidFill>
                   <a:srgbClr val="005BAC"/>
                 </a:solidFill>
-                <a:latin typeface="Meiryo"/>
-                <a:ea typeface="Meiryo"/>
+                <a:latin typeface="Noto Sans JP"/>
+                <a:ea typeface="Noto Sans JP"/>
               </a:rPr>
               <a:t>THE PROCESS</a:t>
             </a:r>
@@ -26187,8 +26187,8 @@
                 <a:solidFill>
                   <a:srgbClr val="1F2A37"/>
                 </a:solidFill>
-                <a:latin typeface="Meiryo"/>
-                <a:ea typeface="Meiryo"/>
+                <a:latin typeface="Noto Sans JP"/>
+                <a:ea typeface="Noto Sans JP"/>
               </a:rPr>
               <a:t>開発プロセスの実際 — 積み上げの記録</a:t>
             </a:r>
@@ -26421,8 +26421,8 @@
                 <a:solidFill>
                   <a:srgbClr val="FFFFFF"/>
                 </a:solidFill>
-                <a:latin typeface="Meiryo"/>
-                <a:ea typeface="Meiryo"/>
+                <a:latin typeface="Noto Sans JP"/>
+                <a:ea typeface="Noto Sans JP"/>
               </a:rPr>
               <a:t>1</a:t>
             </a:r>
@@ -26467,8 +26467,8 @@
                 <a:solidFill>
                   <a:srgbClr val="1F2A37"/>
                 </a:solidFill>
-                <a:latin typeface="Meiryo"/>
-                <a:ea typeface="Meiryo"/>
+                <a:latin typeface="Noto Sans JP"/>
+                <a:ea typeface="Noto Sans JP"/>
               </a:rPr>
               <a:t>基盤づくり</a:t>
             </a:r>
@@ -26513,8 +26513,8 @@
                 <a:solidFill>
                   <a:srgbClr val="5B6672"/>
                 </a:solidFill>
-                <a:latin typeface="Meiryo"/>
-                <a:ea typeface="Meiryo"/>
+                <a:latin typeface="Noto Sans JP"/>
+                <a:ea typeface="Noto Sans JP"/>
               </a:rPr>
               <a:t>PostgreSQL化・Docker/Nginx・VPSデプロイ</a:t>
             </a:r>
@@ -26665,8 +26665,8 @@
                 <a:solidFill>
                   <a:srgbClr val="FFFFFF"/>
                 </a:solidFill>
-                <a:latin typeface="Meiryo"/>
-                <a:ea typeface="Meiryo"/>
+                <a:latin typeface="Noto Sans JP"/>
+                <a:ea typeface="Noto Sans JP"/>
               </a:rPr>
               <a:t>2</a:t>
             </a:r>
@@ -26711,8 +26711,8 @@
                 <a:solidFill>
                   <a:srgbClr val="1F2A37"/>
                 </a:solidFill>
-                <a:latin typeface="Meiryo"/>
-                <a:ea typeface="Meiryo"/>
+                <a:latin typeface="Noto Sans JP"/>
+                <a:ea typeface="Noto Sans JP"/>
               </a:rPr>
               <a:t>3アプリ並走</a:t>
             </a:r>
@@ -26757,8 +26757,8 @@
                 <a:solidFill>
                   <a:srgbClr val="5B6672"/>
                 </a:solidFill>
-                <a:latin typeface="Meiryo"/>
-                <a:ea typeface="Meiryo"/>
+                <a:latin typeface="Noto Sans JP"/>
+                <a:ea typeface="Noto Sans JP"/>
               </a:rPr>
               <a:t>案件管理＋Qシート＋演出を同居</a:t>
             </a:r>
@@ -26909,8 +26909,8 @@
                 <a:solidFill>
                   <a:srgbClr val="FFFFFF"/>
                 </a:solidFill>
-                <a:latin typeface="Meiryo"/>
-                <a:ea typeface="Meiryo"/>
+                <a:latin typeface="Noto Sans JP"/>
+                <a:ea typeface="Noto Sans JP"/>
               </a:rPr>
               <a:t>3</a:t>
             </a:r>
@@ -26955,8 +26955,8 @@
                 <a:solidFill>
                   <a:srgbClr val="1F2A37"/>
                 </a:solidFill>
-                <a:latin typeface="Meiryo"/>
-                <a:ea typeface="Meiryo"/>
+                <a:latin typeface="Noto Sans JP"/>
+                <a:ea typeface="Noto Sans JP"/>
               </a:rPr>
               <a:t>サブアプリ統合</a:t>
             </a:r>
@@ -27001,8 +27001,8 @@
                 <a:solidFill>
                   <a:srgbClr val="5B6672"/>
                 </a:solidFill>
-                <a:latin typeface="Meiryo"/>
-                <a:ea typeface="Meiryo"/>
+                <a:latin typeface="Noto Sans JP"/>
+                <a:ea typeface="Noto Sans JP"/>
               </a:rPr>
               <a:t>機材・技術資料・ライブ運用を統合</a:t>
             </a:r>
@@ -27153,8 +27153,8 @@
                 <a:solidFill>
                   <a:srgbClr val="FFFFFF"/>
                 </a:solidFill>
-                <a:latin typeface="Meiryo"/>
-                <a:ea typeface="Meiryo"/>
+                <a:latin typeface="Noto Sans JP"/>
+                <a:ea typeface="Noto Sans JP"/>
               </a:rPr>
               <a:t>4</a:t>
             </a:r>
@@ -27199,8 +27199,8 @@
                 <a:solidFill>
                   <a:srgbClr val="1F2A37"/>
                 </a:solidFill>
-                <a:latin typeface="Meiryo"/>
-                <a:ea typeface="Meiryo"/>
+                <a:latin typeface="Noto Sans JP"/>
+                <a:ea typeface="Noto Sans JP"/>
               </a:rPr>
               <a:t>デザイン全面刷新</a:t>
             </a:r>
@@ -27245,8 +27245,8 @@
                 <a:solidFill>
                   <a:srgbClr val="5B6672"/>
                 </a:solidFill>
-                <a:latin typeface="Meiryo"/>
-                <a:ea typeface="Meiryo"/>
+                <a:latin typeface="Noto Sans JP"/>
+                <a:ea typeface="Noto Sans JP"/>
               </a:rPr>
               <a:t>デジタル庁準拠(DADS)で全アプリ統一</a:t>
             </a:r>
@@ -27397,8 +27397,8 @@
                 <a:solidFill>
                   <a:srgbClr val="FFFFFF"/>
                 </a:solidFill>
-                <a:latin typeface="Meiryo"/>
-                <a:ea typeface="Meiryo"/>
+                <a:latin typeface="Noto Sans JP"/>
+                <a:ea typeface="Noto Sans JP"/>
               </a:rPr>
               <a:t>5</a:t>
             </a:r>
@@ -27443,8 +27443,8 @@
                 <a:solidFill>
                   <a:srgbClr val="1F2A37"/>
                 </a:solidFill>
-                <a:latin typeface="Meiryo"/>
-                <a:ea typeface="Meiryo"/>
+                <a:latin typeface="Noto Sans JP"/>
+                <a:ea typeface="Noto Sans JP"/>
               </a:rPr>
               <a:t>放送CGの作り込み</a:t>
             </a:r>
@@ -27489,8 +27489,8 @@
                 <a:solidFill>
                   <a:srgbClr val="5B6672"/>
                 </a:solidFill>
-                <a:latin typeface="Meiryo"/>
-                <a:ea typeface="Meiryo"/>
+                <a:latin typeface="Noto Sans JP"/>
+                <a:ea typeface="Noto Sans JP"/>
               </a:rPr>
               <a:t>下位置CG・表彰CG・投票演出を実装</a:t>
             </a:r>
@@ -27641,8 +27641,8 @@
                 <a:solidFill>
                   <a:srgbClr val="FFFFFF"/>
                 </a:solidFill>
-                <a:latin typeface="Meiryo"/>
-                <a:ea typeface="Meiryo"/>
+                <a:latin typeface="Noto Sans JP"/>
+                <a:ea typeface="Noto Sans JP"/>
               </a:rPr>
               <a:t>6</a:t>
             </a:r>
@@ -27687,8 +27687,8 @@
                 <a:solidFill>
                   <a:srgbClr val="1F2A37"/>
                 </a:solidFill>
-                <a:latin typeface="Meiryo"/>
-                <a:ea typeface="Meiryo"/>
+                <a:latin typeface="Noto Sans JP"/>
+                <a:ea typeface="Noto Sans JP"/>
               </a:rPr>
               <a:t>外部連携</a:t>
             </a:r>
@@ -27733,8 +27733,8 @@
                 <a:solidFill>
                   <a:srgbClr val="5B6672"/>
                 </a:solidFill>
-                <a:latin typeface="Meiryo"/>
-                <a:ea typeface="Meiryo"/>
+                <a:latin typeface="Noto Sans JP"/>
+                <a:ea typeface="Noto Sans JP"/>
               </a:rPr>
               <a:t>インタラクティブ⇄CGをリアルタイム連携</a:t>
             </a:r>
@@ -27835,8 +27835,8 @@
                 <a:solidFill>
                   <a:srgbClr val="1F2A37"/>
                 </a:solidFill>
-                <a:latin typeface="Meiryo"/>
-                <a:ea typeface="Meiryo"/>
+                <a:latin typeface="Noto Sans JP"/>
+                <a:ea typeface="Noto Sans JP"/>
               </a:rPr>
               <a:t>  回のバージョンアップ</a:t>
             </a:r>
@@ -27858,8 +27858,8 @@
                 <a:solidFill>
                   <a:srgbClr val="5B6672"/>
                 </a:solidFill>
-                <a:latin typeface="Meiryo"/>
-                <a:ea typeface="Meiryo"/>
+                <a:latin typeface="Noto Sans JP"/>
+                <a:ea typeface="Noto Sans JP"/>
               </a:rPr>
               <a:t>(v0.2 → v2.9.26)</a:t>
             </a:r>
@@ -27950,8 +27950,8 @@
                 <a:solidFill>
                   <a:srgbClr val="1F2A37"/>
                 </a:solidFill>
-                <a:latin typeface="Meiryo"/>
-                <a:ea typeface="Meiryo"/>
+                <a:latin typeface="Noto Sans JP"/>
+                <a:ea typeface="Noto Sans JP"/>
               </a:rPr>
               <a:t>  世代のDB設計変更</a:t>
             </a:r>
@@ -27973,8 +27973,8 @@
                 <a:solidFill>
                   <a:srgbClr val="5B6672"/>
                 </a:solidFill>
-                <a:latin typeface="Meiryo"/>
-                <a:ea typeface="Meiryo"/>
+                <a:latin typeface="Noto Sans JP"/>
+                <a:ea typeface="Noto Sans JP"/>
               </a:rPr>
               <a:t>(機能追加の積み重ね)</a:t>
             </a:r>
@@ -28065,8 +28065,8 @@
                 <a:solidFill>
                   <a:srgbClr val="1F2A37"/>
                 </a:solidFill>
-                <a:latin typeface="Meiryo"/>
-                <a:ea typeface="Meiryo"/>
+                <a:latin typeface="Noto Sans JP"/>
+                <a:ea typeface="Noto Sans JP"/>
               </a:rPr>
               <a:t>  直近1か月の改善デプロイ</a:t>
             </a:r>
@@ -28088,8 +28088,8 @@
                 <a:solidFill>
                   <a:srgbClr val="5B6672"/>
                 </a:solidFill>
-                <a:latin typeface="Meiryo"/>
-                <a:ea typeface="Meiryo"/>
+                <a:latin typeface="Noto Sans JP"/>
+                <a:ea typeface="Noto Sans JP"/>
               </a:rPr>
               <a:t>(1日 約4〜5回)</a:t>
             </a:r>
@@ -28134,8 +28134,8 @@
                 <a:solidFill>
                   <a:srgbClr val="8A939E"/>
                 </a:solidFill>
-                <a:latin typeface="Meiryo"/>
-                <a:ea typeface="Meiryo"/>
+                <a:latin typeface="Noto Sans JP"/>
+                <a:ea typeface="Noto Sans JP"/>
               </a:rPr>
               <a:t>GMO ONAiR</a:t>
             </a:r>
@@ -28332,8 +28332,8 @@
                 <a:solidFill>
                   <a:srgbClr val="005BAC"/>
                 </a:solidFill>
-                <a:latin typeface="Meiryo"/>
-                <a:ea typeface="Meiryo"/>
+                <a:latin typeface="Noto Sans JP"/>
+                <a:ea typeface="Noto Sans JP"/>
               </a:rPr>
               <a:t>DIALOGUE-DRIVEN</a:t>
             </a:r>
@@ -28378,8 +28378,8 @@
                 <a:solidFill>
                   <a:srgbClr val="1F2A37"/>
                 </a:solidFill>
-                <a:latin typeface="Meiryo"/>
-                <a:ea typeface="Meiryo"/>
+                <a:latin typeface="Noto Sans JP"/>
+                <a:ea typeface="Noto Sans JP"/>
               </a:rPr>
               <a:t>対話で作る — チャットがそのまま設計図に</a:t>
             </a:r>
@@ -28506,8 +28506,8 @@
                 <a:solidFill>
                   <a:srgbClr val="005BAC"/>
                 </a:solidFill>
-                <a:latin typeface="Meiryo"/>
-                <a:ea typeface="Meiryo"/>
+                <a:latin typeface="Noto Sans JP"/>
+                <a:ea typeface="Noto Sans JP"/>
               </a:rPr>
               <a:t>実際のやり取り（イメージ）</a:t>
             </a:r>
@@ -28640,8 +28640,8 @@
                 <a:solidFill>
                   <a:srgbClr val="F59E0B"/>
                 </a:solidFill>
-                <a:latin typeface="Meiryo"/>
-                <a:ea typeface="Meiryo"/>
+                <a:latin typeface="Noto Sans JP"/>
+                <a:ea typeface="Noto Sans JP"/>
               </a:rPr>
               <a:t>社長 / 現場</a:t>
             </a:r>
@@ -28663,8 +28663,8 @@
                 <a:solidFill>
                   <a:srgbClr val="1F2A37"/>
                 </a:solidFill>
-                <a:latin typeface="Meiryo"/>
-                <a:ea typeface="Meiryo"/>
+                <a:latin typeface="Noto Sans JP"/>
+                <a:ea typeface="Noto Sans JP"/>
               </a:rPr>
               <a:t>表彰式のランキングCGを作りたい。1位を最後にドンと出したい</a:t>
             </a:r>
@@ -28753,8 +28753,8 @@
                 <a:solidFill>
                   <a:srgbClr val="005BAC"/>
                 </a:solidFill>
-                <a:latin typeface="Meiryo"/>
-                <a:ea typeface="Meiryo"/>
+                <a:latin typeface="Noto Sans JP"/>
+                <a:ea typeface="Noto Sans JP"/>
               </a:rPr>
               <a:t>AI（Claude）</a:t>
             </a:r>
@@ -28776,8 +28776,8 @@
                 <a:solidFill>
                   <a:srgbClr val="1F2A37"/>
                 </a:solidFill>
-                <a:latin typeface="Meiryo"/>
-                <a:ea typeface="Meiryo"/>
+                <a:latin typeface="Noto Sans JP"/>
+                <a:ea typeface="Noto Sans JP"/>
               </a:rPr>
               <a:t>演出ステップと送出UIを実装しました。検証環境でご確認ください</a:t>
             </a:r>
@@ -28910,8 +28910,8 @@
                 <a:solidFill>
                   <a:srgbClr val="F59E0B"/>
                 </a:solidFill>
-                <a:latin typeface="Meiryo"/>
-                <a:ea typeface="Meiryo"/>
+                <a:latin typeface="Noto Sans JP"/>
+                <a:ea typeface="Noto Sans JP"/>
               </a:rPr>
               <a:t>社長 / 現場</a:t>
             </a:r>
@@ -28933,8 +28933,8 @@
                 <a:solidFill>
                   <a:srgbClr val="1F2A37"/>
                 </a:solidFill>
-                <a:latin typeface="Meiryo"/>
-                <a:ea typeface="Meiryo"/>
+                <a:latin typeface="Noto Sans JP"/>
+                <a:ea typeface="Noto Sans JP"/>
               </a:rPr>
               <a:t>数字が動いてTAKEで確定する“あの演出”にして</a:t>
             </a:r>
@@ -29023,8 +29023,8 @@
                 <a:solidFill>
                   <a:srgbClr val="005BAC"/>
                 </a:solidFill>
-                <a:latin typeface="Meiryo"/>
-                <a:ea typeface="Meiryo"/>
+                <a:latin typeface="Noto Sans JP"/>
+                <a:ea typeface="Noto Sans JP"/>
               </a:rPr>
               <a:t>AI（Claude）</a:t>
             </a:r>
@@ -29046,8 +29046,8 @@
                 <a:solidFill>
                   <a:srgbClr val="1F2A37"/>
                 </a:solidFill>
-                <a:latin typeface="Meiryo"/>
-                <a:ea typeface="Meiryo"/>
+                <a:latin typeface="Noto Sans JP"/>
+                <a:ea typeface="Noto Sans JP"/>
               </a:rPr>
               <a:t>カウントアップ→確定アニメに変更。複数正解の同期も対応しました</a:t>
             </a:r>
@@ -29092,8 +29092,8 @@
                 <a:solidFill>
                   <a:srgbClr val="169BA0"/>
                 </a:solidFill>
-                <a:latin typeface="Meiryo"/>
-                <a:ea typeface="Meiryo"/>
+                <a:latin typeface="Noto Sans JP"/>
+                <a:ea typeface="Noto Sans JP"/>
               </a:rPr>
               <a:t>生まれるもの</a:t>
             </a:r>
@@ -29236,8 +29236,8 @@
                 <a:solidFill>
                   <a:srgbClr val="1F2A37"/>
                 </a:solidFill>
-                <a:latin typeface="Meiryo"/>
-                <a:ea typeface="Meiryo"/>
+                <a:latin typeface="Noto Sans JP"/>
+                <a:ea typeface="Noto Sans JP"/>
               </a:rPr>
               <a:t>動くアプリ機能</a:t>
             </a:r>
@@ -29282,8 +29282,8 @@
                 <a:solidFill>
                   <a:srgbClr val="5B6672"/>
                 </a:solidFill>
-                <a:latin typeface="Meiryo"/>
-                <a:ea typeface="Meiryo"/>
+                <a:latin typeface="Noto Sans JP"/>
+                <a:ea typeface="Noto Sans JP"/>
               </a:rPr>
               <a:t>言葉で頼んだ演出が実際に放送で使える形に</a:t>
             </a:r>
@@ -29426,8 +29426,8 @@
                 <a:solidFill>
                   <a:srgbClr val="1F2A37"/>
                 </a:solidFill>
-                <a:latin typeface="Meiryo"/>
-                <a:ea typeface="Meiryo"/>
+                <a:latin typeface="Noto Sans JP"/>
+                <a:ea typeface="Noto Sans JP"/>
               </a:rPr>
               <a:t>バージョン履歴</a:t>
             </a:r>
@@ -29472,8 +29472,8 @@
                 <a:solidFill>
                   <a:srgbClr val="5B6672"/>
                 </a:solidFill>
-                <a:latin typeface="Meiryo"/>
-                <a:ea typeface="Meiryo"/>
+                <a:latin typeface="Noto Sans JP"/>
+                <a:ea typeface="Noto Sans JP"/>
               </a:rPr>
               <a:t>v2.8 → v2.9 と小刻みに改善が積み上がる</a:t>
             </a:r>
@@ -29616,8 +29616,8 @@
                 <a:solidFill>
                   <a:srgbClr val="1F2A37"/>
                 </a:solidFill>
-                <a:latin typeface="Meiryo"/>
-                <a:ea typeface="Meiryo"/>
+                <a:latin typeface="Noto Sans JP"/>
+                <a:ea typeface="Noto Sans JP"/>
               </a:rPr>
               <a:t>ドキュメント</a:t>
             </a:r>
@@ -29662,8 +29662,8 @@
                 <a:solidFill>
                   <a:srgbClr val="5B6672"/>
                 </a:solidFill>
-                <a:latin typeface="Meiryo"/>
-                <a:ea typeface="Meiryo"/>
+                <a:latin typeface="Noto Sans JP"/>
+                <a:ea typeface="Noto Sans JP"/>
               </a:rPr>
               <a:t>やり取りが仕様書・記録として自動で残る</a:t>
             </a:r>
@@ -29708,8 +29708,8 @@
                 <a:solidFill>
                   <a:srgbClr val="8A939E"/>
                 </a:solidFill>
-                <a:latin typeface="Meiryo"/>
-                <a:ea typeface="Meiryo"/>
+                <a:latin typeface="Noto Sans JP"/>
+                <a:ea typeface="Noto Sans JP"/>
               </a:rPr>
               <a:t>GMO ONAiR</a:t>
             </a:r>
@@ -29906,8 +29906,8 @@
                 <a:solidFill>
                   <a:srgbClr val="005BAC"/>
                 </a:solidFill>
-                <a:latin typeface="Meiryo"/>
-                <a:ea typeface="Meiryo"/>
+                <a:latin typeface="Noto Sans JP"/>
+                <a:ea typeface="Noto Sans JP"/>
               </a:rPr>
               <a:t>THE HARD PARTS</a:t>
             </a:r>
@@ -29952,8 +29952,8 @@
                 <a:solidFill>
                   <a:srgbClr val="1F2A37"/>
                 </a:solidFill>
-                <a:latin typeface="Meiryo"/>
-                <a:ea typeface="Meiryo"/>
+                <a:latin typeface="Noto Sans JP"/>
+                <a:ea typeface="Noto Sans JP"/>
               </a:rPr>
               <a:t>正直、ここは大変だった</a:t>
             </a:r>
@@ -30222,8 +30222,8 @@
                 <a:solidFill>
                   <a:srgbClr val="FFFFFF"/>
                 </a:solidFill>
-                <a:latin typeface="Meiryo"/>
-                <a:ea typeface="Meiryo"/>
+                <a:latin typeface="Noto Sans JP"/>
+                <a:ea typeface="Noto Sans JP"/>
               </a:rPr>
               <a:t>!</a:t>
             </a:r>
@@ -30268,8 +30268,8 @@
                 <a:solidFill>
                   <a:srgbClr val="1F2A37"/>
                 </a:solidFill>
-                <a:latin typeface="Meiryo"/>
-                <a:ea typeface="Meiryo"/>
+                <a:latin typeface="Noto Sans JP"/>
+                <a:ea typeface="Noto Sans JP"/>
               </a:rPr>
               <a:t>放送CGの“なめらかさ”</a:t>
             </a:r>
@@ -30314,8 +30314,8 @@
                 <a:solidFill>
                   <a:srgbClr val="5B6672"/>
                 </a:solidFill>
-                <a:latin typeface="Meiryo"/>
-                <a:ea typeface="Meiryo"/>
+                <a:latin typeface="Noto Sans JP"/>
+                <a:ea typeface="Noto Sans JP"/>
               </a:rPr>
               <a:t>アニメのカクつきを何度も作り直し。「After Effectsのような滑らかさを」の一言から数十回の調整 → 最終的に GPU で動く方式(FLIP)に到達。</a:t>
             </a:r>
@@ -30502,8 +30502,8 @@
                 <a:solidFill>
                   <a:srgbClr val="FFFFFF"/>
                 </a:solidFill>
-                <a:latin typeface="Meiryo"/>
-                <a:ea typeface="Meiryo"/>
+                <a:latin typeface="Noto Sans JP"/>
+                <a:ea typeface="Noto Sans JP"/>
               </a:rPr>
               <a:t>!</a:t>
             </a:r>
@@ -30548,8 +30548,8 @@
                 <a:solidFill>
                   <a:srgbClr val="1F2A37"/>
                 </a:solidFill>
-                <a:latin typeface="Meiryo"/>
-                <a:ea typeface="Meiryo"/>
+                <a:latin typeface="Noto Sans JP"/>
+                <a:ea typeface="Noto Sans JP"/>
               </a:rPr>
               <a:t>画面クラッシュとの戦い</a:t>
             </a:r>
@@ -30594,8 +30594,8 @@
                 <a:solidFill>
                   <a:srgbClr val="5B6672"/>
                 </a:solidFill>
-                <a:latin typeface="Meiryo"/>
-                <a:ea typeface="Meiryo"/>
+                <a:latin typeface="Noto Sans JP"/>
+                <a:ea typeface="Noto Sans JP"/>
               </a:rPr>
               <a:t>React の落とし穴や iPhone Safari のメモリ落ちで真っ赤なエラー画面。原因特定→修正のループで一つずつ潰した。</a:t>
             </a:r>
@@ -30782,8 +30782,8 @@
                 <a:solidFill>
                   <a:srgbClr val="FFFFFF"/>
                 </a:solidFill>
-                <a:latin typeface="Meiryo"/>
-                <a:ea typeface="Meiryo"/>
+                <a:latin typeface="Noto Sans JP"/>
+                <a:ea typeface="Noto Sans JP"/>
               </a:rPr>
               <a:t>!</a:t>
             </a:r>
@@ -30828,8 +30828,8 @@
                 <a:solidFill>
                   <a:srgbClr val="1F2A37"/>
                 </a:solidFill>
-                <a:latin typeface="Meiryo"/>
-                <a:ea typeface="Meiryo"/>
+                <a:latin typeface="Noto Sans JP"/>
+                <a:ea typeface="Noto Sans JP"/>
               </a:rPr>
               <a:t>入力のもたつき</a:t>
             </a:r>
@@ -30874,8 +30874,8 @@
                 <a:solidFill>
                   <a:srgbClr val="5B6672"/>
                 </a:solidFill>
-                <a:latin typeface="Meiryo"/>
-                <a:ea typeface="Meiryo"/>
+                <a:latin typeface="Noto Sans JP"/>
+                <a:ea typeface="Noto Sans JP"/>
               </a:rPr>
               <a:t>Qシートで1打鍵ごとに数百セルが再描画され“3テンポ遅れ”。描画の最適化で体感ゼロまで改善。</a:t>
             </a:r>
@@ -31062,8 +31062,8 @@
                 <a:solidFill>
                   <a:srgbClr val="FFFFFF"/>
                 </a:solidFill>
-                <a:latin typeface="Meiryo"/>
-                <a:ea typeface="Meiryo"/>
+                <a:latin typeface="Noto Sans JP"/>
+                <a:ea typeface="Noto Sans JP"/>
               </a:rPr>
               <a:t>!</a:t>
             </a:r>
@@ -31108,8 +31108,8 @@
                 <a:solidFill>
                   <a:srgbClr val="1F2A37"/>
                 </a:solidFill>
-                <a:latin typeface="Meiryo"/>
-                <a:ea typeface="Meiryo"/>
+                <a:latin typeface="Noto Sans JP"/>
+                <a:ea typeface="Noto Sans JP"/>
               </a:rPr>
               <a:t>“前に作ったやつで”問題</a:t>
             </a:r>
@@ -31154,8 +31154,8 @@
                 <a:solidFill>
                   <a:srgbClr val="5B6672"/>
                 </a:solidFill>
-                <a:latin typeface="Meiryo"/>
-                <a:ea typeface="Meiryo"/>
+                <a:latin typeface="Noto Sans JP"/>
+                <a:ea typeface="Noto Sans JP"/>
               </a:rPr>
               <a:t>言葉のニュアンスのズレ。過去バージョンの実装を特定し、当時の演出を完全に復元して解決。</a:t>
             </a:r>
@@ -31342,8 +31342,8 @@
                 <a:solidFill>
                   <a:srgbClr val="FFFFFF"/>
                 </a:solidFill>
-                <a:latin typeface="Meiryo"/>
-                <a:ea typeface="Meiryo"/>
+                <a:latin typeface="Noto Sans JP"/>
+                <a:ea typeface="Noto Sans JP"/>
               </a:rPr>
               <a:t>!</a:t>
             </a:r>
@@ -31388,8 +31388,8 @@
                 <a:solidFill>
                   <a:srgbClr val="1F2A37"/>
                 </a:solidFill>
-                <a:latin typeface="Meiryo"/>
-                <a:ea typeface="Meiryo"/>
+                <a:latin typeface="Noto Sans JP"/>
+                <a:ea typeface="Noto Sans JP"/>
               </a:rPr>
               <a:t>放送事故を絶対に出さない</a:t>
             </a:r>
@@ -31434,8 +31434,8 @@
                 <a:solidFill>
                   <a:srgbClr val="5B6672"/>
                 </a:solidFill>
-                <a:latin typeface="Meiryo"/>
-                <a:ea typeface="Meiryo"/>
+                <a:latin typeface="Noto Sans JP"/>
+                <a:ea typeface="Noto Sans JP"/>
               </a:rPr>
               <a:t>本番と検証DBを完全分離。「本番に入れて」と明示するまで反映しないルール＋3時間ごと自動バックアップ。</a:t>
             </a:r>
@@ -31622,8 +31622,8 @@
                 <a:solidFill>
                   <a:srgbClr val="FFFFFF"/>
                 </a:solidFill>
-                <a:latin typeface="Meiryo"/>
-                <a:ea typeface="Meiryo"/>
+                <a:latin typeface="Noto Sans JP"/>
+                <a:ea typeface="Noto Sans JP"/>
               </a:rPr>
               <a:t>!</a:t>
             </a:r>
@@ -31668,8 +31668,8 @@
                 <a:solidFill>
                   <a:srgbClr val="1F2A37"/>
                 </a:solidFill>
-                <a:latin typeface="Meiryo"/>
-                <a:ea typeface="Meiryo"/>
+                <a:latin typeface="Noto Sans JP"/>
+                <a:ea typeface="Noto Sans JP"/>
               </a:rPr>
               <a:t>“現場で本当に使えるか”</a:t>
             </a:r>
@@ -31714,8 +31714,8 @@
                 <a:solidFill>
                   <a:srgbClr val="5B6672"/>
                 </a:solidFill>
-                <a:latin typeface="Meiryo"/>
-                <a:ea typeface="Meiryo"/>
+                <a:latin typeface="Noto Sans JP"/>
+                <a:ea typeface="Noto Sans JP"/>
               </a:rPr>
               <a:t>機能が動くだけでは不十分。現場の指摘を即反映する往復で、実運用に耐える形に磨き込んだ。</a:t>
             </a:r>
@@ -31760,8 +31760,8 @@
                 <a:solidFill>
                   <a:srgbClr val="8A939E"/>
                 </a:solidFill>
-                <a:latin typeface="Meiryo"/>
-                <a:ea typeface="Meiryo"/>
+                <a:latin typeface="Noto Sans JP"/>
+                <a:ea typeface="Noto Sans JP"/>
               </a:rPr>
               <a:t>GMO ONAiR</a:t>
             </a:r>
@@ -31958,8 +31958,8 @@
                 <a:solidFill>
                   <a:srgbClr val="005BAC"/>
                 </a:solidFill>
-                <a:latin typeface="Meiryo"/>
-                <a:ea typeface="Meiryo"/>
+                <a:latin typeface="Noto Sans JP"/>
+                <a:ea typeface="Noto Sans JP"/>
               </a:rPr>
               <a:t>SAFE BY DESIGN</a:t>
             </a:r>
@@ -32004,8 +32004,8 @@
                 <a:solidFill>
                   <a:srgbClr val="1F2A37"/>
                 </a:solidFill>
-                <a:latin typeface="Meiryo"/>
-                <a:ea typeface="Meiryo"/>
+                <a:latin typeface="Noto Sans JP"/>
+                <a:ea typeface="Noto Sans JP"/>
               </a:rPr>
               <a:t>安全な進め方 — 検証してから本番へ</a:t>
             </a:r>
@@ -32450,8 +32450,8 @@
                 <a:solidFill>
                   <a:srgbClr val="1F2A37"/>
                 </a:solidFill>
-                <a:latin typeface="Meiryo"/>
-                <a:ea typeface="Meiryo"/>
+                <a:latin typeface="Noto Sans JP"/>
+                <a:ea typeface="Noto Sans JP"/>
               </a:rPr>
               <a:t>対話で実装</a:t>
             </a:r>
@@ -32496,8 +32496,8 @@
                 <a:solidFill>
                   <a:srgbClr val="5B6672"/>
                 </a:solidFill>
-                <a:latin typeface="Meiryo"/>
-                <a:ea typeface="Meiryo"/>
+                <a:latin typeface="Noto Sans JP"/>
+                <a:ea typeface="Noto Sans JP"/>
               </a:rPr>
               <a:t>AIがコードを生成</a:t>
             </a:r>
@@ -32872,8 +32872,8 @@
                 <a:solidFill>
                   <a:srgbClr val="1F2A37"/>
                 </a:solidFill>
-                <a:latin typeface="Meiryo"/>
-                <a:ea typeface="Meiryo"/>
+                <a:latin typeface="Noto Sans JP"/>
+                <a:ea typeface="Noto Sans JP"/>
               </a:rPr>
               <a:t>検証環境</a:t>
             </a:r>
@@ -32918,8 +32918,8 @@
                 <a:solidFill>
                   <a:srgbClr val="5B6672"/>
                 </a:solidFill>
-                <a:latin typeface="Meiryo"/>
-                <a:ea typeface="Meiryo"/>
+                <a:latin typeface="Noto Sans JP"/>
+                <a:ea typeface="Noto Sans JP"/>
               </a:rPr>
               <a:t>dev.gmo-onair.jp で自動デプロイ</a:t>
             </a:r>
@@ -33282,8 +33282,8 @@
                 <a:solidFill>
                   <a:srgbClr val="1F2A37"/>
                 </a:solidFill>
-                <a:latin typeface="Meiryo"/>
-                <a:ea typeface="Meiryo"/>
+                <a:latin typeface="Noto Sans JP"/>
+                <a:ea typeface="Noto Sans JP"/>
               </a:rPr>
               <a:t>動作確認</a:t>
             </a:r>
@@ -33328,8 +33328,8 @@
                 <a:solidFill>
                   <a:srgbClr val="5B6672"/>
                 </a:solidFill>
-                <a:latin typeface="Meiryo"/>
-                <a:ea typeface="Meiryo"/>
+                <a:latin typeface="Noto Sans JP"/>
+                <a:ea typeface="Noto Sans JP"/>
               </a:rPr>
               <a:t>現場でテスト・修正</a:t>
             </a:r>
@@ -33780,8 +33780,8 @@
                 <a:solidFill>
                   <a:srgbClr val="1F2A37"/>
                 </a:solidFill>
-                <a:latin typeface="Meiryo"/>
-                <a:ea typeface="Meiryo"/>
+                <a:latin typeface="Noto Sans JP"/>
+                <a:ea typeface="Noto Sans JP"/>
               </a:rPr>
               <a:t>本番公開</a:t>
             </a:r>
@@ -33826,8 +33826,8 @@
                 <a:solidFill>
                   <a:srgbClr val="5B6672"/>
                 </a:solidFill>
-                <a:latin typeface="Meiryo"/>
-                <a:ea typeface="Meiryo"/>
+                <a:latin typeface="Noto Sans JP"/>
+                <a:ea typeface="Noto Sans JP"/>
               </a:rPr>
               <a:t>承認後に gmo-onair.jp へ</a:t>
             </a:r>
@@ -33918,8 +33918,8 @@
                 <a:solidFill>
                   <a:srgbClr val="2EA06B"/>
                 </a:solidFill>
-                <a:latin typeface="Meiryo"/>
-                <a:ea typeface="Meiryo"/>
+                <a:latin typeface="Noto Sans JP"/>
+                <a:ea typeface="Noto Sans JP"/>
               </a:rPr>
               <a:t>ルールで守る本番環境</a:t>
             </a:r>
@@ -33964,8 +33964,8 @@
                 <a:solidFill>
                   <a:srgbClr val="1F2A37"/>
                 </a:solidFill>
-                <a:latin typeface="Meiryo"/>
-                <a:ea typeface="Meiryo"/>
+                <a:latin typeface="Noto Sans JP"/>
+                <a:ea typeface="Noto Sans JP"/>
               </a:rPr>
               <a:t>● 本番と検証のデータベースは完全分離   ● 「本番に入れて」の明示指示があるまで本番反映しない</a:t>
             </a:r>
@@ -33987,8 +33987,8 @@
                 <a:solidFill>
                   <a:srgbClr val="1F2A37"/>
                 </a:solidFill>
-                <a:latin typeface="Meiryo"/>
-                <a:ea typeface="Meiryo"/>
+                <a:latin typeface="Noto Sans JP"/>
+                <a:ea typeface="Noto Sans JP"/>
               </a:rPr>
               <a:t>● 3時間ごとに自動バックアップ   ● いつでも以前のバージョンに戻せる</a:t>
             </a:r>
@@ -34033,8 +34033,8 @@
                 <a:solidFill>
                   <a:srgbClr val="8A939E"/>
                 </a:solidFill>
-                <a:latin typeface="Meiryo"/>
-                <a:ea typeface="Meiryo"/>
+                <a:latin typeface="Noto Sans JP"/>
+                <a:ea typeface="Noto Sans JP"/>
               </a:rPr>
               <a:t>GMO ONAiR</a:t>
             </a:r>
@@ -34231,8 +34231,8 @@
                 <a:solidFill>
                   <a:srgbClr val="005BAC"/>
                 </a:solidFill>
-                <a:latin typeface="Meiryo"/>
-                <a:ea typeface="Meiryo"/>
+                <a:latin typeface="Noto Sans JP"/>
+                <a:ea typeface="Noto Sans JP"/>
               </a:rPr>
               <a:t>EXECUTIVE SUMMARY</a:t>
             </a:r>
@@ -34277,8 +34277,8 @@
                 <a:solidFill>
                   <a:srgbClr val="1F2A37"/>
                 </a:solidFill>
-                <a:latin typeface="Meiryo"/>
-                <a:ea typeface="Meiryo"/>
+                <a:latin typeface="Noto Sans JP"/>
+                <a:ea typeface="Noto Sans JP"/>
               </a:rPr>
               <a:t>一言でいうと — 制作会社のための“会社OS”</a:t>
             </a:r>
@@ -34451,8 +34451,8 @@
                 <a:solidFill>
                   <a:srgbClr val="1F2A37"/>
                 </a:solidFill>
-                <a:latin typeface="Meiryo"/>
-                <a:ea typeface="Meiryo"/>
+                <a:latin typeface="Noto Sans JP"/>
+                <a:ea typeface="Noto Sans JP"/>
               </a:rPr>
               <a:t>バラバラだった </a:t>
             </a:r>
@@ -34461,8 +34461,8 @@
                 <a:solidFill>
                   <a:srgbClr val="005BAC"/>
                 </a:solidFill>
-                <a:latin typeface="Meiryo"/>
-                <a:ea typeface="Meiryo"/>
+                <a:latin typeface="Noto Sans JP"/>
+                <a:ea typeface="Noto Sans JP"/>
               </a:rPr>
               <a:t>見積・台本・機材・本番・CG </a:t>
             </a:r>
@@ -34471,8 +34471,8 @@
                 <a:solidFill>
                   <a:srgbClr val="1F2A37"/>
                 </a:solidFill>
-                <a:latin typeface="Meiryo"/>
-                <a:ea typeface="Meiryo"/>
+                <a:latin typeface="Noto Sans JP"/>
+                <a:ea typeface="Noto Sans JP"/>
               </a:rPr>
               <a:t>を</a:t>
             </a:r>
@@ -34494,8 +34494,8 @@
                 <a:solidFill>
                   <a:srgbClr val="005BAC"/>
                 </a:solidFill>
-                <a:latin typeface="Meiryo"/>
-                <a:ea typeface="Meiryo"/>
+                <a:latin typeface="Noto Sans JP"/>
+                <a:ea typeface="Noto Sans JP"/>
               </a:rPr>
               <a:t>1つの画面・1つの番号でつなぐ</a:t>
             </a:r>
@@ -34504,8 +34504,8 @@
                 <a:solidFill>
                   <a:srgbClr val="1F2A37"/>
                 </a:solidFill>
-                <a:latin typeface="Meiryo"/>
-                <a:ea typeface="Meiryo"/>
+                <a:latin typeface="Noto Sans JP"/>
+                <a:ea typeface="Noto Sans JP"/>
               </a:rPr>
               <a:t> 統合プラットフォーム</a:t>
             </a:r>
@@ -34780,8 +34780,8 @@
                 <a:solidFill>
                   <a:srgbClr val="1F2A37"/>
                 </a:solidFill>
-                <a:latin typeface="Meiryo"/>
-                <a:ea typeface="Meiryo"/>
+                <a:latin typeface="Noto Sans JP"/>
+                <a:ea typeface="Noto Sans JP"/>
               </a:rPr>
               <a:t>ひとつにつながる</a:t>
             </a:r>
@@ -34826,8 +34826,8 @@
                 <a:solidFill>
                   <a:srgbClr val="5B6672"/>
                 </a:solidFill>
-                <a:latin typeface="Meiryo"/>
-                <a:ea typeface="Meiryo"/>
+                <a:latin typeface="Noto Sans JP"/>
+                <a:ea typeface="Noto Sans JP"/>
               </a:rPr>
               <a:t>GLS番号で全アプリのデータが自動連携</a:t>
             </a:r>
@@ -35158,8 +35158,8 @@
                 <a:solidFill>
                   <a:srgbClr val="1F2A37"/>
                 </a:solidFill>
-                <a:latin typeface="Meiryo"/>
-                <a:ea typeface="Meiryo"/>
+                <a:latin typeface="Noto Sans JP"/>
+                <a:ea typeface="Noto Sans JP"/>
               </a:rPr>
               <a:t>6つの専用アプリ</a:t>
             </a:r>
@@ -35204,8 +35204,8 @@
                 <a:solidFill>
                   <a:srgbClr val="5B6672"/>
                 </a:solidFill>
-                <a:latin typeface="Meiryo"/>
-                <a:ea typeface="Meiryo"/>
+                <a:latin typeface="Noto Sans JP"/>
+                <a:ea typeface="Noto Sans JP"/>
               </a:rPr>
               <a:t>案件・台本・機材・技術・本番・CGを網羅</a:t>
             </a:r>
@@ -35568,8 +35568,8 @@
                 <a:solidFill>
                   <a:srgbClr val="1F2A37"/>
                 </a:solidFill>
-                <a:latin typeface="Meiryo"/>
-                <a:ea typeface="Meiryo"/>
+                <a:latin typeface="Noto Sans JP"/>
+                <a:ea typeface="Noto Sans JP"/>
               </a:rPr>
               <a:t>対話で内製</a:t>
             </a:r>
@@ -35614,8 +35614,8 @@
                 <a:solidFill>
                   <a:srgbClr val="5B6672"/>
                 </a:solidFill>
-                <a:latin typeface="Meiryo"/>
-                <a:ea typeface="Meiryo"/>
+                <a:latin typeface="Noto Sans JP"/>
+                <a:ea typeface="Noto Sans JP"/>
               </a:rPr>
               <a:t>外注ゼロ・チャット指示でアプリを進化</a:t>
             </a:r>
@@ -35660,8 +35660,8 @@
                 <a:solidFill>
                   <a:srgbClr val="8A939E"/>
                 </a:solidFill>
-                <a:latin typeface="Meiryo"/>
-                <a:ea typeface="Meiryo"/>
+                <a:latin typeface="Noto Sans JP"/>
+                <a:ea typeface="Noto Sans JP"/>
               </a:rPr>
               <a:t>GMO ONAiR</a:t>
             </a:r>
@@ -35858,8 +35858,8 @@
                 <a:solidFill>
                   <a:srgbClr val="005BAC"/>
                 </a:solidFill>
-                <a:latin typeface="Meiryo"/>
-                <a:ea typeface="Meiryo"/>
+                <a:latin typeface="Noto Sans JP"/>
+                <a:ea typeface="Noto Sans JP"/>
               </a:rPr>
               <a:t>DEVELOPMENT CADENCE</a:t>
             </a:r>
@@ -35904,8 +35904,8 @@
                 <a:solidFill>
                   <a:srgbClr val="1F2A37"/>
                 </a:solidFill>
-                <a:latin typeface="Meiryo"/>
-                <a:ea typeface="Meiryo"/>
+                <a:latin typeface="Noto Sans JP"/>
+                <a:ea typeface="Noto Sans JP"/>
               </a:rPr>
               <a:t>改善の密度 — 止まらないアップデート</a:t>
             </a:r>
@@ -36032,8 +36032,8 @@
                 <a:solidFill>
                   <a:srgbClr val="1F2A37"/>
                 </a:solidFill>
-                <a:latin typeface="Meiryo"/>
-                <a:ea typeface="Meiryo"/>
+                <a:latin typeface="Noto Sans JP"/>
+                <a:ea typeface="Noto Sans JP"/>
               </a:rPr>
               <a:t>v0.2 → v2.9.26 まで </a:t>
             </a:r>
@@ -36042,8 +36042,8 @@
                 <a:solidFill>
                   <a:srgbClr val="005BAC"/>
                 </a:solidFill>
-                <a:latin typeface="Meiryo"/>
-                <a:ea typeface="Meiryo"/>
+                <a:latin typeface="Noto Sans JP"/>
+                <a:ea typeface="Noto Sans JP"/>
               </a:rPr>
               <a:t>337 回のバージョンアップ</a:t>
             </a:r>
@@ -36052,8 +36052,8 @@
                 <a:solidFill>
                   <a:srgbClr val="1F2A37"/>
                 </a:solidFill>
-                <a:latin typeface="Meiryo"/>
-                <a:ea typeface="Meiryo"/>
+                <a:latin typeface="Noto Sans JP"/>
+                <a:ea typeface="Noto Sans JP"/>
               </a:rPr>
               <a:t>。直近の1か月だけで </a:t>
             </a:r>
@@ -36062,8 +36062,8 @@
                 <a:solidFill>
                   <a:srgbClr val="F59E0B"/>
                 </a:solidFill>
-                <a:latin typeface="Meiryo"/>
-                <a:ea typeface="Meiryo"/>
+                <a:latin typeface="Noto Sans JP"/>
+                <a:ea typeface="Noto Sans JP"/>
               </a:rPr>
               <a:t>150 回以上（1日あたり約4〜5回）</a:t>
             </a:r>
@@ -36072,8 +36072,8 @@
                 <a:solidFill>
                   <a:srgbClr val="1F2A37"/>
                 </a:solidFill>
-                <a:latin typeface="Meiryo"/>
-                <a:ea typeface="Meiryo"/>
+                <a:latin typeface="Noto Sans JP"/>
+                <a:ea typeface="Noto Sans JP"/>
               </a:rPr>
               <a:t> を改善デプロイ。</a:t>
             </a:r>
@@ -36336,8 +36336,8 @@
                 <a:solidFill>
                   <a:srgbClr val="5B6672"/>
                 </a:solidFill>
-                <a:latin typeface="Meiryo"/>
-                <a:ea typeface="Meiryo"/>
+                <a:latin typeface="Noto Sans JP"/>
+                <a:ea typeface="Noto Sans JP"/>
               </a:rPr>
               <a:t>デザイン刷新</a:t>
             </a:r>
@@ -36564,8 +36564,8 @@
                 <a:solidFill>
                   <a:srgbClr val="5B6672"/>
                 </a:solidFill>
-                <a:latin typeface="Meiryo"/>
-                <a:ea typeface="Meiryo"/>
+                <a:latin typeface="Noto Sans JP"/>
+                <a:ea typeface="Noto Sans JP"/>
               </a:rPr>
               <a:t>ブランチ運用整備</a:t>
             </a:r>
@@ -36792,8 +36792,8 @@
                 <a:solidFill>
                   <a:srgbClr val="5B6672"/>
                 </a:solidFill>
-                <a:latin typeface="Meiryo"/>
-                <a:ea typeface="Meiryo"/>
+                <a:latin typeface="Noto Sans JP"/>
+                <a:ea typeface="Noto Sans JP"/>
               </a:rPr>
               <a:t>リアルタイムCG
 演出強化</a:t>
@@ -37021,8 +37021,8 @@
                 <a:solidFill>
                   <a:srgbClr val="5B6672"/>
                 </a:solidFill>
-                <a:latin typeface="Meiryo"/>
-                <a:ea typeface="Meiryo"/>
+                <a:latin typeface="Noto Sans JP"/>
+                <a:ea typeface="Noto Sans JP"/>
               </a:rPr>
               <a:t>CG⇄インタラクティブ
 連携</a:t>
@@ -37250,8 +37250,8 @@
                 <a:solidFill>
                   <a:srgbClr val="5B6672"/>
                 </a:solidFill>
-                <a:latin typeface="Meiryo"/>
-                <a:ea typeface="Meiryo"/>
+                <a:latin typeface="Noto Sans JP"/>
+                <a:ea typeface="Noto Sans JP"/>
               </a:rPr>
               <a:t>出題システム
 共通化（最新）</a:t>
@@ -37297,8 +37297,8 @@
                 <a:solidFill>
                   <a:srgbClr val="8A939E"/>
                 </a:solidFill>
-                <a:latin typeface="Meiryo"/>
-                <a:ea typeface="Meiryo"/>
+                <a:latin typeface="Noto Sans JP"/>
+                <a:ea typeface="Noto Sans JP"/>
               </a:rPr>
               <a:t>※ バージョンは v1 → v2.9.26 まで小刻みに前進。大きな作り直しではなく、現場の声で日々アップデート。</a:t>
             </a:r>
@@ -37343,8 +37343,8 @@
                 <a:solidFill>
                   <a:srgbClr val="8A939E"/>
                 </a:solidFill>
-                <a:latin typeface="Meiryo"/>
-                <a:ea typeface="Meiryo"/>
+                <a:latin typeface="Noto Sans JP"/>
+                <a:ea typeface="Noto Sans JP"/>
               </a:rPr>
               <a:t>GMO ONAiR</a:t>
             </a:r>
@@ -37541,8 +37541,8 @@
                 <a:solidFill>
                   <a:srgbClr val="005BAC"/>
                 </a:solidFill>
-                <a:latin typeface="Meiryo"/>
-                <a:ea typeface="Meiryo"/>
+                <a:latin typeface="Noto Sans JP"/>
+                <a:ea typeface="Noto Sans JP"/>
               </a:rPr>
               <a:t>BY THE NUMBERS</a:t>
             </a:r>
@@ -37587,8 +37587,8 @@
                 <a:solidFill>
                   <a:srgbClr val="1F2A37"/>
                 </a:solidFill>
-                <a:latin typeface="Meiryo"/>
-                <a:ea typeface="Meiryo"/>
+                <a:latin typeface="Noto Sans JP"/>
+                <a:ea typeface="Noto Sans JP"/>
               </a:rPr>
               <a:t>数字で見る成果</a:t>
             </a:r>
@@ -37823,8 +37823,8 @@
                 <a:solidFill>
                   <a:srgbClr val="1F2A37"/>
                 </a:solidFill>
-                <a:latin typeface="Meiryo"/>
-                <a:ea typeface="Meiryo"/>
+                <a:latin typeface="Noto Sans JP"/>
+                <a:ea typeface="Noto Sans JP"/>
               </a:rPr>
               <a:t>  ブロックアプリ</a:t>
             </a:r>
@@ -37905,8 +37905,8 @@
                 <a:solidFill>
                   <a:srgbClr val="5B6672"/>
                 </a:solidFill>
-                <a:latin typeface="Meiryo"/>
-                <a:ea typeface="Meiryo"/>
+                <a:latin typeface="Noto Sans JP"/>
+                <a:ea typeface="Noto Sans JP"/>
               </a:rPr>
               <a:t>1プラットフォームに統合</a:t>
             </a:r>
@@ -38059,8 +38059,8 @@
                 <a:solidFill>
                   <a:srgbClr val="1F2A37"/>
                 </a:solidFill>
-                <a:latin typeface="Meiryo"/>
-                <a:ea typeface="Meiryo"/>
+                <a:latin typeface="Noto Sans JP"/>
+                <a:ea typeface="Noto Sans JP"/>
               </a:rPr>
               <a:t>  つの背番号</a:t>
             </a:r>
@@ -38141,8 +38141,8 @@
                 <a:solidFill>
                   <a:srgbClr val="5B6672"/>
                 </a:solidFill>
-                <a:latin typeface="Meiryo"/>
-                <a:ea typeface="Meiryo"/>
+                <a:latin typeface="Noto Sans JP"/>
+                <a:ea typeface="Noto Sans JP"/>
               </a:rPr>
               <a:t>GLS番号で全データ連携</a:t>
             </a:r>
@@ -38295,8 +38295,8 @@
                 <a:solidFill>
                   <a:srgbClr val="1F2A37"/>
                 </a:solidFill>
-                <a:latin typeface="Meiryo"/>
-                <a:ea typeface="Meiryo"/>
+                <a:latin typeface="Noto Sans JP"/>
+                <a:ea typeface="Noto Sans JP"/>
               </a:rPr>
               <a:t>  外注</a:t>
             </a:r>
@@ -38377,8 +38377,8 @@
                 <a:solidFill>
                   <a:srgbClr val="5B6672"/>
                 </a:solidFill>
-                <a:latin typeface="Meiryo"/>
-                <a:ea typeface="Meiryo"/>
+                <a:latin typeface="Noto Sans JP"/>
+                <a:ea typeface="Noto Sans JP"/>
               </a:rPr>
               <a:t>社内＋AI対話で内製</a:t>
             </a:r>
@@ -38531,8 +38531,8 @@
                 <a:solidFill>
                   <a:srgbClr val="1F2A37"/>
                 </a:solidFill>
-                <a:latin typeface="Meiryo"/>
-                <a:ea typeface="Meiryo"/>
+                <a:latin typeface="Noto Sans JP"/>
+                <a:ea typeface="Noto Sans JP"/>
               </a:rPr>
               <a:t>  ごと自動</a:t>
             </a:r>
@@ -38613,8 +38613,8 @@
                 <a:solidFill>
                   <a:srgbClr val="5B6672"/>
                 </a:solidFill>
-                <a:latin typeface="Meiryo"/>
-                <a:ea typeface="Meiryo"/>
+                <a:latin typeface="Noto Sans JP"/>
+                <a:ea typeface="Noto Sans JP"/>
               </a:rPr>
               <a:t>DBバックアップで安心</a:t>
             </a:r>
@@ -38705,8 +38705,8 @@
                 <a:solidFill>
                   <a:srgbClr val="1F2A37"/>
                 </a:solidFill>
-                <a:latin typeface="Meiryo"/>
-                <a:ea typeface="Meiryo"/>
+                <a:latin typeface="Noto Sans JP"/>
+                <a:ea typeface="Noto Sans JP"/>
               </a:rPr>
               <a:t>見積から本番・請求まで、</a:t>
             </a:r>
@@ -38715,8 +38715,8 @@
                 <a:solidFill>
                   <a:srgbClr val="005BAC"/>
                 </a:solidFill>
-                <a:latin typeface="Meiryo"/>
-                <a:ea typeface="Meiryo"/>
+                <a:latin typeface="Noto Sans JP"/>
+                <a:ea typeface="Noto Sans JP"/>
               </a:rPr>
               <a:t>バラバラだった制作業務を“1つのOS”に。</a:t>
             </a:r>
@@ -38738,8 +38738,8 @@
                 <a:solidFill>
                   <a:srgbClr val="1F2A37"/>
                 </a:solidFill>
-                <a:latin typeface="Meiryo"/>
-                <a:ea typeface="Meiryo"/>
+                <a:latin typeface="Noto Sans JP"/>
+                <a:ea typeface="Noto Sans JP"/>
               </a:rPr>
               <a:t>しかも、その進化は社長や現場との対話そのものから生まれ続けています。</a:t>
             </a:r>
@@ -38784,8 +38784,8 @@
                 <a:solidFill>
                   <a:srgbClr val="8A939E"/>
                 </a:solidFill>
-                <a:latin typeface="Meiryo"/>
-                <a:ea typeface="Meiryo"/>
+                <a:latin typeface="Noto Sans JP"/>
+                <a:ea typeface="Noto Sans JP"/>
               </a:rPr>
               <a:t>GMO ONAiR</a:t>
             </a:r>
@@ -38982,8 +38982,8 @@
                 <a:solidFill>
                   <a:srgbClr val="005BAC"/>
                 </a:solidFill>
-                <a:latin typeface="Meiryo"/>
-                <a:ea typeface="Meiryo"/>
+                <a:latin typeface="Noto Sans JP"/>
+                <a:ea typeface="Noto Sans JP"/>
               </a:rPr>
               <a:t>ROADMAP</a:t>
             </a:r>
@@ -39028,8 +39028,8 @@
                 <a:solidFill>
                   <a:srgbClr val="1F2A37"/>
                 </a:solidFill>
-                <a:latin typeface="Meiryo"/>
-                <a:ea typeface="Meiryo"/>
+                <a:latin typeface="Noto Sans JP"/>
+                <a:ea typeface="Noto Sans JP"/>
               </a:rPr>
               <a:t>これから — さらに“つながる”へ</a:t>
             </a:r>
@@ -39220,8 +39220,8 @@
                 <a:solidFill>
                   <a:srgbClr val="FFFFFF"/>
                 </a:solidFill>
-                <a:latin typeface="Meiryo"/>
-                <a:ea typeface="Meiryo"/>
+                <a:latin typeface="Noto Sans JP"/>
+                <a:ea typeface="Noto Sans JP"/>
               </a:rPr>
               <a:t>DONE</a:t>
             </a:r>
@@ -39266,8 +39266,8 @@
                 <a:solidFill>
                   <a:srgbClr val="1F2A37"/>
                 </a:solidFill>
-                <a:latin typeface="Meiryo"/>
-                <a:ea typeface="Meiryo"/>
+                <a:latin typeface="Noto Sans JP"/>
+                <a:ea typeface="Noto Sans JP"/>
               </a:rPr>
               <a:t>6アプリ統合・DADSデザイン・自動デプロイ</a:t>
             </a:r>
@@ -39312,8 +39312,8 @@
                 <a:solidFill>
                   <a:srgbClr val="2EA06B"/>
                 </a:solidFill>
-                <a:latin typeface="Meiryo"/>
-                <a:ea typeface="Meiryo"/>
+                <a:latin typeface="Noto Sans JP"/>
+                <a:ea typeface="Noto Sans JP"/>
               </a:rPr>
               <a:t>✓ 完了</a:t>
             </a:r>
@@ -39422,8 +39422,8 @@
                 <a:solidFill>
                   <a:srgbClr val="FFFFFF"/>
                 </a:solidFill>
-                <a:latin typeface="Meiryo"/>
-                <a:ea typeface="Meiryo"/>
+                <a:latin typeface="Noto Sans JP"/>
+                <a:ea typeface="Noto Sans JP"/>
               </a:rPr>
               <a:t>NOW</a:t>
             </a:r>
@@ -39468,8 +39468,8 @@
                 <a:solidFill>
                   <a:srgbClr val="1F2A37"/>
                 </a:solidFill>
-                <a:latin typeface="Meiryo"/>
-                <a:ea typeface="Meiryo"/>
+                <a:latin typeface="Noto Sans JP"/>
+                <a:ea typeface="Noto Sans JP"/>
               </a:rPr>
               <a:t>リアルタイムCG ⇄ インタラクティブ連携の高度化</a:t>
             </a:r>
@@ -39514,8 +39514,8 @@
                 <a:solidFill>
                   <a:srgbClr val="005BAC"/>
                 </a:solidFill>
-                <a:latin typeface="Meiryo"/>
-                <a:ea typeface="Meiryo"/>
+                <a:latin typeface="Noto Sans JP"/>
+                <a:ea typeface="Noto Sans JP"/>
               </a:rPr>
               <a:t>● 進行中</a:t>
             </a:r>
@@ -39624,8 +39624,8 @@
                 <a:solidFill>
                   <a:srgbClr val="FFFFFF"/>
                 </a:solidFill>
-                <a:latin typeface="Meiryo"/>
-                <a:ea typeface="Meiryo"/>
+                <a:latin typeface="Noto Sans JP"/>
+                <a:ea typeface="Noto Sans JP"/>
               </a:rPr>
               <a:t>NEXT</a:t>
             </a:r>
@@ -39670,8 +39670,8 @@
                 <a:solidFill>
                   <a:srgbClr val="1F2A37"/>
                 </a:solidFill>
-                <a:latin typeface="Meiryo"/>
-                <a:ea typeface="Meiryo"/>
+                <a:latin typeface="Noto Sans JP"/>
+                <a:ea typeface="Noto Sans JP"/>
               </a:rPr>
               <a:t>BOX連携（フォルダ自動生成・PDF自動保存・電子署名）</a:t>
             </a:r>
@@ -39716,8 +39716,8 @@
                 <a:solidFill>
                   <a:srgbClr val="F59E0B"/>
                 </a:solidFill>
-                <a:latin typeface="Meiryo"/>
-                <a:ea typeface="Meiryo"/>
+                <a:latin typeface="Noto Sans JP"/>
+                <a:ea typeface="Noto Sans JP"/>
               </a:rPr>
               <a:t>→ 次の一手</a:t>
             </a:r>
@@ -39826,8 +39826,8 @@
                 <a:solidFill>
                   <a:srgbClr val="FFFFFF"/>
                 </a:solidFill>
-                <a:latin typeface="Meiryo"/>
-                <a:ea typeface="Meiryo"/>
+                <a:latin typeface="Noto Sans JP"/>
+                <a:ea typeface="Noto Sans JP"/>
               </a:rPr>
               <a:t>LATER</a:t>
             </a:r>
@@ -39872,8 +39872,8 @@
                 <a:solidFill>
                   <a:srgbClr val="1F2A37"/>
                 </a:solidFill>
-                <a:latin typeface="Meiryo"/>
-                <a:ea typeface="Meiryo"/>
+                <a:latin typeface="Noto Sans JP"/>
+                <a:ea typeface="Noto Sans JP"/>
               </a:rPr>
               <a:t>認証統一・制作支援アプリ・マルチテナント化</a:t>
             </a:r>
@@ -39918,8 +39918,8 @@
                 <a:solidFill>
                   <a:srgbClr val="7C5CD6"/>
                 </a:solidFill>
-                <a:latin typeface="Meiryo"/>
-                <a:ea typeface="Meiryo"/>
+                <a:latin typeface="Noto Sans JP"/>
+                <a:ea typeface="Noto Sans JP"/>
               </a:rPr>
               <a:t>… 構想</a:t>
             </a:r>
@@ -39964,8 +39964,8 @@
                 <a:solidFill>
                   <a:srgbClr val="8A939E"/>
                 </a:solidFill>
-                <a:latin typeface="Meiryo"/>
-                <a:ea typeface="Meiryo"/>
+                <a:latin typeface="Noto Sans JP"/>
+                <a:ea typeface="Noto Sans JP"/>
               </a:rPr>
               <a:t>GMO ONAiR</a:t>
             </a:r>
@@ -40206,8 +40206,8 @@
                 <a:solidFill>
                   <a:srgbClr val="FFFFFF"/>
                 </a:solidFill>
-                <a:latin typeface="Meiryo"/>
-                <a:ea typeface="Meiryo"/>
+                <a:latin typeface="Noto Sans JP"/>
+                <a:ea typeface="Noto Sans JP"/>
               </a:rPr>
               <a:t>制作の“あたりまえ”を、</a:t>
             </a:r>
@@ -40229,8 +40229,8 @@
                 <a:solidFill>
                   <a:srgbClr val="FDECC8"/>
                 </a:solidFill>
-                <a:latin typeface="Meiryo"/>
-                <a:ea typeface="Meiryo"/>
+                <a:latin typeface="Noto Sans JP"/>
+                <a:ea typeface="Noto Sans JP"/>
               </a:rPr>
               <a:t>私たちの手でアップデートする。</a:t>
             </a:r>
@@ -40311,8 +40311,8 @@
                 <a:solidFill>
                   <a:srgbClr val="FFFFFF"/>
                 </a:solidFill>
-                <a:latin typeface="Meiryo"/>
-                <a:ea typeface="Meiryo"/>
+                <a:latin typeface="Noto Sans JP"/>
+                <a:ea typeface="Noto Sans JP"/>
               </a:rPr>
               <a:t>GMO ONAiR は、現場との対話から生まれ、対話で育ち続ける“会社OS”です。</a:t>
             </a:r>
@@ -40334,8 +40334,8 @@
                 <a:solidFill>
                   <a:srgbClr val="E3EFFA"/>
                 </a:solidFill>
-                <a:latin typeface="Meiryo"/>
-                <a:ea typeface="Meiryo"/>
+                <a:latin typeface="Noto Sans JP"/>
+                <a:ea typeface="Noto Sans JP"/>
               </a:rPr>
               <a:t>外注に頼らず、私たちのペースで、必要な機能を必要なだけ。</a:t>
             </a:r>
@@ -40396,8 +40396,8 @@
                 <a:solidFill>
                   <a:srgbClr val="005BAC"/>
                 </a:solidFill>
-                <a:latin typeface="Meiryo"/>
-                <a:ea typeface="Meiryo"/>
+                <a:latin typeface="Noto Sans JP"/>
+                <a:ea typeface="Noto Sans JP"/>
               </a:rPr>
               <a:t>ご清聴ありがとうございました</a:t>
             </a:r>
@@ -40442,8 +40442,8 @@
                 <a:solidFill>
                   <a:srgbClr val="E3EFFA"/>
                 </a:solidFill>
-                <a:latin typeface="Meiryo"/>
-                <a:ea typeface="Meiryo"/>
+                <a:latin typeface="Noto Sans JP"/>
+                <a:ea typeface="Noto Sans JP"/>
               </a:rPr>
               <a:t>GMO GLOBAL STUDIO  |  GMO ONAiR  v2.9.26</a:t>
             </a:r>
@@ -40594,8 +40594,8 @@
                 <a:solidFill>
                   <a:srgbClr val="005BAC"/>
                 </a:solidFill>
-                <a:latin typeface="Meiryo"/>
-                <a:ea typeface="Meiryo"/>
+                <a:latin typeface="Noto Sans JP"/>
+                <a:ea typeface="Noto Sans JP"/>
               </a:rPr>
               <a:t>WHY</a:t>
             </a:r>
@@ -40640,8 +40640,8 @@
                 <a:solidFill>
                   <a:srgbClr val="1F2A37"/>
                 </a:solidFill>
-                <a:latin typeface="Meiryo"/>
-                <a:ea typeface="Meiryo"/>
+                <a:latin typeface="Noto Sans JP"/>
+                <a:ea typeface="Noto Sans JP"/>
               </a:rPr>
               <a:t>課題：ツールが点在して情報が分断していた</a:t>
             </a:r>
@@ -40768,8 +40768,8 @@
                 <a:solidFill>
                   <a:srgbClr val="D94B4B"/>
                 </a:solidFill>
-                <a:latin typeface="Meiryo"/>
-                <a:ea typeface="Meiryo"/>
+                <a:latin typeface="Noto Sans JP"/>
+                <a:ea typeface="Noto Sans JP"/>
               </a:rPr>
               <a:t>BEFORE</a:t>
             </a:r>
@@ -40878,8 +40878,8 @@
                 <a:solidFill>
                   <a:srgbClr val="1F2A37"/>
                 </a:solidFill>
-                <a:latin typeface="Meiryo"/>
-                <a:ea typeface="Meiryo"/>
+                <a:latin typeface="Noto Sans JP"/>
+                <a:ea typeface="Noto Sans JP"/>
               </a:rPr>
               <a:t>Excel 見積</a:t>
             </a:r>
@@ -40942,8 +40942,8 @@
                 <a:solidFill>
                   <a:srgbClr val="1F2A37"/>
                 </a:solidFill>
-                <a:latin typeface="Meiryo"/>
-                <a:ea typeface="Meiryo"/>
+                <a:latin typeface="Noto Sans JP"/>
+                <a:ea typeface="Noto Sans JP"/>
               </a:rPr>
               <a:t>紙の台本</a:t>
             </a:r>
@@ -41006,8 +41006,8 @@
                 <a:solidFill>
                   <a:srgbClr val="1F2A37"/>
                 </a:solidFill>
-                <a:latin typeface="Meiryo"/>
-                <a:ea typeface="Meiryo"/>
+                <a:latin typeface="Noto Sans JP"/>
+                <a:ea typeface="Noto Sans JP"/>
               </a:rPr>
               <a:t>機材リスト</a:t>
             </a:r>
@@ -41070,8 +41070,8 @@
                 <a:solidFill>
                   <a:srgbClr val="1F2A37"/>
                 </a:solidFill>
-                <a:latin typeface="Meiryo"/>
-                <a:ea typeface="Meiryo"/>
+                <a:latin typeface="Noto Sans JP"/>
+                <a:ea typeface="Noto Sans JP"/>
               </a:rPr>
               <a:t>別々の進行表</a:t>
             </a:r>
@@ -41134,8 +41134,8 @@
                 <a:solidFill>
                   <a:srgbClr val="1F2A37"/>
                 </a:solidFill>
-                <a:latin typeface="Meiryo"/>
-                <a:ea typeface="Meiryo"/>
+                <a:latin typeface="Noto Sans JP"/>
+                <a:ea typeface="Noto Sans JP"/>
               </a:rPr>
               <a:t>手作業のCG</a:t>
             </a:r>
@@ -41198,8 +41198,8 @@
                 <a:solidFill>
                   <a:srgbClr val="1F2A37"/>
                 </a:solidFill>
-                <a:latin typeface="Meiryo"/>
-                <a:ea typeface="Meiryo"/>
+                <a:latin typeface="Noto Sans JP"/>
+                <a:ea typeface="Noto Sans JP"/>
               </a:rPr>
               <a:t>メール連絡</a:t>
             </a:r>
@@ -41244,8 +41244,8 @@
                 <a:solidFill>
                   <a:srgbClr val="D94B4B"/>
                 </a:solidFill>
-                <a:latin typeface="Meiryo"/>
-                <a:ea typeface="Meiryo"/>
+                <a:latin typeface="Noto Sans JP"/>
+                <a:ea typeface="Noto Sans JP"/>
               </a:rPr>
               <a:t>点在・二重入力・属人化・転記ミス</a:t>
             </a:r>
@@ -41334,8 +41334,8 @@
                 <a:solidFill>
                   <a:srgbClr val="2EA06B"/>
                 </a:solidFill>
-                <a:latin typeface="Meiryo"/>
-                <a:ea typeface="Meiryo"/>
+                <a:latin typeface="Noto Sans JP"/>
+                <a:ea typeface="Noto Sans JP"/>
               </a:rPr>
               <a:t>AFTER</a:t>
             </a:r>
@@ -41440,8 +41440,8 @@
                 <a:solidFill>
                   <a:srgbClr val="FFFFFF"/>
                 </a:solidFill>
-                <a:latin typeface="Meiryo"/>
-                <a:ea typeface="Meiryo"/>
+                <a:latin typeface="Noto Sans JP"/>
+                <a:ea typeface="Noto Sans JP"/>
               </a:rPr>
               <a:t>GMO
 ONAiR</a:t>
@@ -41487,8 +41487,8 @@
                 <a:solidFill>
                   <a:srgbClr val="2EA06B"/>
                 </a:solidFill>
-                <a:latin typeface="Meiryo"/>
-                <a:ea typeface="Meiryo"/>
+                <a:latin typeface="Noto Sans JP"/>
+                <a:ea typeface="Noto Sans JP"/>
               </a:rPr>
               <a:t>ひとつの画面に統合</a:t>
             </a:r>
@@ -41510,8 +41510,8 @@
                 <a:solidFill>
                   <a:srgbClr val="1F2A37"/>
                 </a:solidFill>
-                <a:latin typeface="Meiryo"/>
-                <a:ea typeface="Meiryo"/>
+                <a:latin typeface="Noto Sans JP"/>
+                <a:ea typeface="Noto Sans JP"/>
               </a:rPr>
               <a:t>入力は1回。データは自動でつながる</a:t>
             </a:r>
@@ -41574,8 +41574,8 @@
                 <a:solidFill>
                   <a:srgbClr val="005BAC"/>
                 </a:solidFill>
-                <a:latin typeface="Meiryo"/>
-                <a:ea typeface="Meiryo"/>
+                <a:latin typeface="Noto Sans JP"/>
+                <a:ea typeface="Noto Sans JP"/>
               </a:rPr>
               <a:t>案件</a:t>
             </a:r>
@@ -41638,8 +41638,8 @@
                 <a:solidFill>
                   <a:srgbClr val="005BAC"/>
                 </a:solidFill>
-                <a:latin typeface="Meiryo"/>
-                <a:ea typeface="Meiryo"/>
+                <a:latin typeface="Noto Sans JP"/>
+                <a:ea typeface="Noto Sans JP"/>
               </a:rPr>
               <a:t>台本</a:t>
             </a:r>
@@ -41702,8 +41702,8 @@
                 <a:solidFill>
                   <a:srgbClr val="005BAC"/>
                 </a:solidFill>
-                <a:latin typeface="Meiryo"/>
-                <a:ea typeface="Meiryo"/>
+                <a:latin typeface="Noto Sans JP"/>
+                <a:ea typeface="Noto Sans JP"/>
               </a:rPr>
               <a:t>機材</a:t>
             </a:r>
@@ -41766,8 +41766,8 @@
                 <a:solidFill>
                   <a:srgbClr val="005BAC"/>
                 </a:solidFill>
-                <a:latin typeface="Meiryo"/>
-                <a:ea typeface="Meiryo"/>
+                <a:latin typeface="Noto Sans JP"/>
+                <a:ea typeface="Noto Sans JP"/>
               </a:rPr>
               <a:t>技術</a:t>
             </a:r>
@@ -41830,8 +41830,8 @@
                 <a:solidFill>
                   <a:srgbClr val="005BAC"/>
                 </a:solidFill>
-                <a:latin typeface="Meiryo"/>
-                <a:ea typeface="Meiryo"/>
+                <a:latin typeface="Noto Sans JP"/>
+                <a:ea typeface="Noto Sans JP"/>
               </a:rPr>
               <a:t>本番</a:t>
             </a:r>
@@ -41894,8 +41894,8 @@
                 <a:solidFill>
                   <a:srgbClr val="005BAC"/>
                 </a:solidFill>
-                <a:latin typeface="Meiryo"/>
-                <a:ea typeface="Meiryo"/>
+                <a:latin typeface="Noto Sans JP"/>
+                <a:ea typeface="Noto Sans JP"/>
               </a:rPr>
               <a:t>CG</a:t>
             </a:r>
@@ -41940,8 +41940,8 @@
                 <a:solidFill>
                   <a:srgbClr val="2EA06B"/>
                 </a:solidFill>
-                <a:latin typeface="Meiryo"/>
-                <a:ea typeface="Meiryo"/>
+                <a:latin typeface="Noto Sans JP"/>
+                <a:ea typeface="Noto Sans JP"/>
               </a:rPr>
               <a:t>入力1回 / 自動連携 / リアルタイム</a:t>
             </a:r>
@@ -41986,8 +41986,8 @@
                 <a:solidFill>
                   <a:srgbClr val="8A939E"/>
                 </a:solidFill>
-                <a:latin typeface="Meiryo"/>
-                <a:ea typeface="Meiryo"/>
+                <a:latin typeface="Noto Sans JP"/>
+                <a:ea typeface="Noto Sans JP"/>
               </a:rPr>
               <a:t>GMO ONAiR</a:t>
             </a:r>
@@ -42184,8 +42184,8 @@
                 <a:solidFill>
                   <a:srgbClr val="005BAC"/>
                 </a:solidFill>
-                <a:latin typeface="Meiryo"/>
-                <a:ea typeface="Meiryo"/>
+                <a:latin typeface="Noto Sans JP"/>
+                <a:ea typeface="Noto Sans JP"/>
               </a:rPr>
               <a:t>WHAT</a:t>
             </a:r>
@@ -42230,8 +42230,8 @@
                 <a:solidFill>
                   <a:srgbClr val="1F2A37"/>
                 </a:solidFill>
-                <a:latin typeface="Meiryo"/>
-                <a:ea typeface="Meiryo"/>
+                <a:latin typeface="Noto Sans JP"/>
+                <a:ea typeface="Noto Sans JP"/>
               </a:rPr>
               <a:t>全体像 — 6つの専用アプリ＋共通基盤</a:t>
             </a:r>
@@ -42720,8 +42720,8 @@
                 <a:solidFill>
                   <a:srgbClr val="1F2A37"/>
                 </a:solidFill>
-                <a:latin typeface="Meiryo"/>
-                <a:ea typeface="Meiryo"/>
+                <a:latin typeface="Noto Sans JP"/>
+                <a:ea typeface="Noto Sans JP"/>
               </a:rPr>
               <a:t>案件管理</a:t>
             </a:r>
@@ -42812,8 +42812,8 @@
                 <a:solidFill>
                   <a:srgbClr val="5B6672"/>
                 </a:solidFill>
-                <a:latin typeface="Meiryo"/>
-                <a:ea typeface="Meiryo"/>
+                <a:latin typeface="Noto Sans JP"/>
+                <a:ea typeface="Noto Sans JP"/>
               </a:rPr>
               <a:t>提案 → 受注 → 制作 → 請求まで、案件のお金と進捗をまるごと管理</a:t>
             </a:r>
@@ -43268,8 +43268,8 @@
                 <a:solidFill>
                   <a:srgbClr val="1F2A37"/>
                 </a:solidFill>
-                <a:latin typeface="Meiryo"/>
-                <a:ea typeface="Meiryo"/>
+                <a:latin typeface="Noto Sans JP"/>
+                <a:ea typeface="Noto Sans JP"/>
               </a:rPr>
               <a:t>Qシート</a:t>
             </a:r>
@@ -43360,8 +43360,8 @@
                 <a:solidFill>
                   <a:srgbClr val="5B6672"/>
                 </a:solidFill>
-                <a:latin typeface="Meiryo"/>
-                <a:ea typeface="Meiryo"/>
+                <a:latin typeface="Noto Sans JP"/>
+                <a:ea typeface="Noto Sans JP"/>
               </a:rPr>
               <a:t>進行台本（Qシート）の作成と本番のリアルタイム進行同期</a:t>
             </a:r>
@@ -43636,8 +43636,8 @@
                 <a:solidFill>
                   <a:srgbClr val="1F2A37"/>
                 </a:solidFill>
-                <a:latin typeface="Meiryo"/>
-                <a:ea typeface="Meiryo"/>
+                <a:latin typeface="Noto Sans JP"/>
+                <a:ea typeface="Noto Sans JP"/>
               </a:rPr>
               <a:t>機材管理</a:t>
             </a:r>
@@ -43728,8 +43728,8 @@
                 <a:solidFill>
                   <a:srgbClr val="5B6672"/>
                 </a:solidFill>
-                <a:latin typeface="Meiryo"/>
-                <a:ea typeface="Meiryo"/>
+                <a:latin typeface="Noto Sans JP"/>
+                <a:ea typeface="Noto Sans JP"/>
               </a:rPr>
               <a:t>カメラ・ケーブル・コネクタまで機材台帳と貸出を一元管理</a:t>
             </a:r>
@@ -44096,8 +44096,8 @@
                 <a:solidFill>
                   <a:srgbClr val="1F2A37"/>
                 </a:solidFill>
-                <a:latin typeface="Meiryo"/>
-                <a:ea typeface="Meiryo"/>
+                <a:latin typeface="Noto Sans JP"/>
+                <a:ea typeface="Noto Sans JP"/>
               </a:rPr>
               <a:t>技術資料</a:t>
             </a:r>
@@ -44188,8 +44188,8 @@
                 <a:solidFill>
                   <a:srgbClr val="5B6672"/>
                 </a:solidFill>
-                <a:latin typeface="Meiryo"/>
-                <a:ea typeface="Meiryo"/>
+                <a:latin typeface="Noto Sans JP"/>
+                <a:ea typeface="Noto Sans JP"/>
               </a:rPr>
               <a:t>カメラ・映像・音声・通信の技術仕様書をデジタル化</a:t>
             </a:r>
@@ -44584,8 +44584,8 @@
                 <a:solidFill>
                   <a:srgbClr val="1F2A37"/>
                 </a:solidFill>
-                <a:latin typeface="Meiryo"/>
-                <a:ea typeface="Meiryo"/>
+                <a:latin typeface="Noto Sans JP"/>
+                <a:ea typeface="Noto Sans JP"/>
               </a:rPr>
               <a:t>ライブ運用</a:t>
             </a:r>
@@ -44676,8 +44676,8 @@
                 <a:solidFill>
                   <a:srgbClr val="5B6672"/>
                 </a:solidFill>
-                <a:latin typeface="Meiryo"/>
-                <a:ea typeface="Meiryo"/>
+                <a:latin typeface="Noto Sans JP"/>
+                <a:ea typeface="Noto Sans JP"/>
               </a:rPr>
               <a:t>本番当日のオペレーション・進行・計時をサポート</a:t>
             </a:r>
@@ -45044,8 +45044,8 @@
                 <a:solidFill>
                   <a:srgbClr val="1F2A37"/>
                 </a:solidFill>
-                <a:latin typeface="Meiryo"/>
-                <a:ea typeface="Meiryo"/>
+                <a:latin typeface="Noto Sans JP"/>
+                <a:ea typeface="Noto Sans JP"/>
               </a:rPr>
               <a:t>リアルタイムCG</a:t>
             </a:r>
@@ -45136,8 +45136,8 @@
                 <a:solidFill>
                   <a:srgbClr val="5B6672"/>
                 </a:solidFill>
-                <a:latin typeface="Meiryo"/>
-                <a:ea typeface="Meiryo"/>
+                <a:latin typeface="Noto Sans JP"/>
+                <a:ea typeface="Noto Sans JP"/>
               </a:rPr>
               <a:t>放送用CG（テロップ・ランキング・投票）をライブ送出</a:t>
             </a:r>
@@ -45182,8 +45182,8 @@
                 <a:solidFill>
                   <a:srgbClr val="8A939E"/>
                 </a:solidFill>
-                <a:latin typeface="Meiryo"/>
-                <a:ea typeface="Meiryo"/>
+                <a:latin typeface="Noto Sans JP"/>
+                <a:ea typeface="Noto Sans JP"/>
               </a:rPr>
               <a:t>GMO ONAiR</a:t>
             </a:r>
@@ -45380,8 +45380,8 @@
                 <a:solidFill>
                   <a:srgbClr val="005BAC"/>
                 </a:solidFill>
-                <a:latin typeface="Meiryo"/>
-                <a:ea typeface="Meiryo"/>
+                <a:latin typeface="Noto Sans JP"/>
+                <a:ea typeface="Noto Sans JP"/>
               </a:rPr>
               <a:t>APP 1 / 6</a:t>
             </a:r>
@@ -45426,8 +45426,8 @@
                 <a:solidFill>
                   <a:srgbClr val="1F2A37"/>
                 </a:solidFill>
-                <a:latin typeface="Meiryo"/>
-                <a:ea typeface="Meiryo"/>
+                <a:latin typeface="Noto Sans JP"/>
+                <a:ea typeface="Noto Sans JP"/>
               </a:rPr>
               <a:t>案件管理（Project &amp; Finance）</a:t>
             </a:r>
@@ -45818,8 +45818,8 @@
                 <a:solidFill>
                   <a:srgbClr val="1F2A37"/>
                 </a:solidFill>
-                <a:latin typeface="Meiryo"/>
-                <a:ea typeface="Meiryo"/>
+                <a:latin typeface="Noto Sans JP"/>
+                <a:ea typeface="Noto Sans JP"/>
               </a:rPr>
               <a:t>提案 → 受注 → 制作 → 請求まで、案件のお金と進捗をまるごと管理</a:t>
             </a:r>
@@ -45864,8 +45864,8 @@
                 <a:solidFill>
                   <a:srgbClr val="005BAC"/>
                 </a:solidFill>
-                <a:latin typeface="Meiryo"/>
-                <a:ea typeface="Meiryo"/>
+                <a:latin typeface="Noto Sans JP"/>
+                <a:ea typeface="Noto Sans JP"/>
               </a:rPr>
               <a:t>できること</a:t>
             </a:r>
@@ -45954,8 +45954,8 @@
                 <a:solidFill>
                   <a:srgbClr val="FFFFFF"/>
                 </a:solidFill>
-                <a:latin typeface="Meiryo"/>
-                <a:ea typeface="Meiryo"/>
+                <a:latin typeface="Noto Sans JP"/>
+                <a:ea typeface="Noto Sans JP"/>
               </a:rPr>
               <a:t>✓</a:t>
             </a:r>
@@ -46000,8 +46000,8 @@
                 <a:solidFill>
                   <a:srgbClr val="1F2A37"/>
                 </a:solidFill>
-                <a:latin typeface="Meiryo"/>
-                <a:ea typeface="Meiryo"/>
+                <a:latin typeface="Noto Sans JP"/>
+                <a:ea typeface="Noto Sans JP"/>
               </a:rPr>
               <a:t>売上・仕入・損益をリアルタイム集計</a:t>
             </a:r>
@@ -46090,8 +46090,8 @@
                 <a:solidFill>
                   <a:srgbClr val="FFFFFF"/>
                 </a:solidFill>
-                <a:latin typeface="Meiryo"/>
-                <a:ea typeface="Meiryo"/>
+                <a:latin typeface="Noto Sans JP"/>
+                <a:ea typeface="Noto Sans JP"/>
               </a:rPr>
               <a:t>✓</a:t>
             </a:r>
@@ -46136,8 +46136,8 @@
                 <a:solidFill>
                   <a:srgbClr val="1F2A37"/>
                 </a:solidFill>
-                <a:latin typeface="Meiryo"/>
-                <a:ea typeface="Meiryo"/>
+                <a:latin typeface="Noto Sans JP"/>
+                <a:ea typeface="Noto Sans JP"/>
               </a:rPr>
               <a:t>ヨミ〜完了のステージ管理</a:t>
             </a:r>
@@ -46226,8 +46226,8 @@
                 <a:solidFill>
                   <a:srgbClr val="FFFFFF"/>
                 </a:solidFill>
-                <a:latin typeface="Meiryo"/>
-                <a:ea typeface="Meiryo"/>
+                <a:latin typeface="Noto Sans JP"/>
+                <a:ea typeface="Noto Sans JP"/>
               </a:rPr>
               <a:t>✓</a:t>
             </a:r>
@@ -46272,8 +46272,8 @@
                 <a:solidFill>
                   <a:srgbClr val="1F2A37"/>
                 </a:solidFill>
-                <a:latin typeface="Meiryo"/>
-                <a:ea typeface="Meiryo"/>
+                <a:latin typeface="Noto Sans JP"/>
+                <a:ea typeface="Noto Sans JP"/>
               </a:rPr>
               <a:t>GLS番号の自動発番・請求書PDF</a:t>
             </a:r>
@@ -46364,8 +46364,8 @@
                 <a:solidFill>
                   <a:srgbClr val="005BAC"/>
                 </a:solidFill>
-                <a:latin typeface="Meiryo"/>
-                <a:ea typeface="Meiryo"/>
+                <a:latin typeface="Noto Sans JP"/>
+                <a:ea typeface="Noto Sans JP"/>
               </a:rPr>
               <a:t>現場での効果</a:t>
             </a:r>
@@ -46387,8 +46387,8 @@
                 <a:solidFill>
                   <a:srgbClr val="1F2A37"/>
                 </a:solidFill>
-                <a:latin typeface="Meiryo"/>
-                <a:ea typeface="Meiryo"/>
+                <a:latin typeface="Noto Sans JP"/>
+                <a:ea typeface="Noto Sans JP"/>
               </a:rPr>
               <a:t>見積から請求まで数字が一気通貫。損益が“今”わかる。</a:t>
             </a:r>
@@ -47087,8 +47087,8 @@
                 <a:solidFill>
                   <a:srgbClr val="FFFFFF"/>
                 </a:solidFill>
-                <a:latin typeface="Meiryo"/>
-                <a:ea typeface="Meiryo"/>
+                <a:latin typeface="Noto Sans JP"/>
+                <a:ea typeface="Noto Sans JP"/>
               </a:rPr>
               <a:t>ダッシュボード</a:t>
             </a:r>
@@ -47177,8 +47177,8 @@
                 <a:solidFill>
                   <a:srgbClr val="5B6672"/>
                 </a:solidFill>
-                <a:latin typeface="Meiryo"/>
-                <a:ea typeface="Meiryo"/>
+                <a:latin typeface="Noto Sans JP"/>
+                <a:ea typeface="Noto Sans JP"/>
               </a:rPr>
               <a:t>案件一覧</a:t>
             </a:r>
@@ -47267,8 +47267,8 @@
                 <a:solidFill>
                   <a:srgbClr val="5B6672"/>
                 </a:solidFill>
-                <a:latin typeface="Meiryo"/>
-                <a:ea typeface="Meiryo"/>
+                <a:latin typeface="Noto Sans JP"/>
+                <a:ea typeface="Noto Sans JP"/>
               </a:rPr>
               <a:t>売上</a:t>
             </a:r>
@@ -47357,8 +47357,8 @@
                 <a:solidFill>
                   <a:srgbClr val="5B6672"/>
                 </a:solidFill>
-                <a:latin typeface="Meiryo"/>
-                <a:ea typeface="Meiryo"/>
+                <a:latin typeface="Noto Sans JP"/>
+                <a:ea typeface="Noto Sans JP"/>
               </a:rPr>
               <a:t>仕入</a:t>
             </a:r>
@@ -47447,8 +47447,8 @@
                 <a:solidFill>
                   <a:srgbClr val="5B6672"/>
                 </a:solidFill>
-                <a:latin typeface="Meiryo"/>
-                <a:ea typeface="Meiryo"/>
+                <a:latin typeface="Noto Sans JP"/>
+                <a:ea typeface="Noto Sans JP"/>
               </a:rPr>
               <a:t>損益</a:t>
             </a:r>
@@ -47537,8 +47537,8 @@
                 <a:solidFill>
                   <a:srgbClr val="5B6672"/>
                 </a:solidFill>
-                <a:latin typeface="Meiryo"/>
-                <a:ea typeface="Meiryo"/>
+                <a:latin typeface="Noto Sans JP"/>
+                <a:ea typeface="Noto Sans JP"/>
               </a:rPr>
               <a:t>請求書</a:t>
             </a:r>
@@ -47583,8 +47583,8 @@
                 <a:solidFill>
                   <a:srgbClr val="1F2A37"/>
                 </a:solidFill>
-                <a:latin typeface="Meiryo"/>
-                <a:ea typeface="Meiryo"/>
+                <a:latin typeface="Noto Sans JP"/>
+                <a:ea typeface="Noto Sans JP"/>
               </a:rPr>
               <a:t>案件ダッシュボード</a:t>
             </a:r>
@@ -47629,8 +47629,8 @@
                 <a:solidFill>
                   <a:srgbClr val="8A939E"/>
                 </a:solidFill>
-                <a:latin typeface="Meiryo"/>
-                <a:ea typeface="Meiryo"/>
+                <a:latin typeface="Noto Sans JP"/>
+                <a:ea typeface="Noto Sans JP"/>
               </a:rPr>
               <a:t>2026年5月 ・ 最終更新 5分前</a:t>
             </a:r>
@@ -47767,8 +47767,8 @@
                 <a:solidFill>
                   <a:srgbClr val="5B6672"/>
                 </a:solidFill>
-                <a:latin typeface="Meiryo"/>
-                <a:ea typeface="Meiryo"/>
+                <a:latin typeface="Noto Sans JP"/>
+                <a:ea typeface="Noto Sans JP"/>
               </a:rPr>
               <a:t>進行中案件</a:t>
             </a:r>
@@ -47823,8 +47823,8 @@
                 <a:solidFill>
                   <a:srgbClr val="1F2A37"/>
                 </a:solidFill>
-                <a:latin typeface="Meiryo"/>
-                <a:ea typeface="Meiryo"/>
+                <a:latin typeface="Noto Sans JP"/>
+                <a:ea typeface="Noto Sans JP"/>
               </a:rPr>
               <a:t>件</a:t>
             </a:r>
@@ -47869,8 +47869,8 @@
                 <a:solidFill>
                   <a:srgbClr val="2EA06B"/>
                 </a:solidFill>
-                <a:latin typeface="Meiryo"/>
-                <a:ea typeface="Meiryo"/>
+                <a:latin typeface="Noto Sans JP"/>
+                <a:ea typeface="Noto Sans JP"/>
               </a:rPr>
               <a:t>▲ 5</a:t>
             </a:r>
@@ -48007,8 +48007,8 @@
                 <a:solidFill>
                   <a:srgbClr val="5B6672"/>
                 </a:solidFill>
-                <a:latin typeface="Meiryo"/>
-                <a:ea typeface="Meiryo"/>
+                <a:latin typeface="Noto Sans JP"/>
+                <a:ea typeface="Noto Sans JP"/>
               </a:rPr>
               <a:t>今月売上</a:t>
             </a:r>
@@ -48063,8 +48063,8 @@
                 <a:solidFill>
                   <a:srgbClr val="1F2A37"/>
                 </a:solidFill>
-                <a:latin typeface="Meiryo"/>
-                <a:ea typeface="Meiryo"/>
+                <a:latin typeface="Noto Sans JP"/>
+                <a:ea typeface="Noto Sans JP"/>
               </a:rPr>
               <a:t>万</a:t>
             </a:r>
@@ -48109,8 +48109,8 @@
                 <a:solidFill>
                   <a:srgbClr val="2EA06B"/>
                 </a:solidFill>
-                <a:latin typeface="Meiryo"/>
-                <a:ea typeface="Meiryo"/>
+                <a:latin typeface="Noto Sans JP"/>
+                <a:ea typeface="Noto Sans JP"/>
               </a:rPr>
               <a:t>▲ 12%</a:t>
             </a:r>
@@ -48247,8 +48247,8 @@
                 <a:solidFill>
                   <a:srgbClr val="5B6672"/>
                 </a:solidFill>
-                <a:latin typeface="Meiryo"/>
-                <a:ea typeface="Meiryo"/>
+                <a:latin typeface="Noto Sans JP"/>
+                <a:ea typeface="Noto Sans JP"/>
               </a:rPr>
               <a:t>粗利率</a:t>
             </a:r>
@@ -48303,8 +48303,8 @@
                 <a:solidFill>
                   <a:srgbClr val="1F2A37"/>
                 </a:solidFill>
-                <a:latin typeface="Meiryo"/>
-                <a:ea typeface="Meiryo"/>
+                <a:latin typeface="Noto Sans JP"/>
+                <a:ea typeface="Noto Sans JP"/>
               </a:rPr>
               <a:t>%</a:t>
             </a:r>
@@ -48349,8 +48349,8 @@
                 <a:solidFill>
                   <a:srgbClr val="2EA06B"/>
                 </a:solidFill>
-                <a:latin typeface="Meiryo"/>
-                <a:ea typeface="Meiryo"/>
+                <a:latin typeface="Noto Sans JP"/>
+                <a:ea typeface="Noto Sans JP"/>
               </a:rPr>
               <a:t>▲ 2.1</a:t>
             </a:r>
@@ -48487,8 +48487,8 @@
                 <a:solidFill>
                   <a:srgbClr val="5B6672"/>
                 </a:solidFill>
-                <a:latin typeface="Meiryo"/>
-                <a:ea typeface="Meiryo"/>
+                <a:latin typeface="Noto Sans JP"/>
+                <a:ea typeface="Noto Sans JP"/>
               </a:rPr>
               <a:t>受注ヨミ</a:t>
             </a:r>
@@ -48543,8 +48543,8 @@
                 <a:solidFill>
                   <a:srgbClr val="1F2A37"/>
                 </a:solidFill>
-                <a:latin typeface="Meiryo"/>
-                <a:ea typeface="Meiryo"/>
+                <a:latin typeface="Noto Sans JP"/>
+                <a:ea typeface="Noto Sans JP"/>
               </a:rPr>
               <a:t>億</a:t>
             </a:r>
@@ -48589,8 +48589,8 @@
                 <a:solidFill>
                   <a:srgbClr val="2EA06B"/>
                 </a:solidFill>
-                <a:latin typeface="Meiryo"/>
-                <a:ea typeface="Meiryo"/>
+                <a:latin typeface="Noto Sans JP"/>
+                <a:ea typeface="Noto Sans JP"/>
               </a:rPr>
               <a:t>▲ 8件</a:t>
             </a:r>
@@ -48683,8 +48683,8 @@
                 <a:solidFill>
                   <a:srgbClr val="1F2A37"/>
                 </a:solidFill>
-                <a:latin typeface="Meiryo"/>
-                <a:ea typeface="Meiryo"/>
+                <a:latin typeface="Noto Sans JP"/>
+                <a:ea typeface="Noto Sans JP"/>
               </a:rPr>
               <a:t>月次売上推移</a:t>
             </a:r>
@@ -49041,8 +49041,8 @@
                 <a:solidFill>
                   <a:srgbClr val="1F2A37"/>
                 </a:solidFill>
-                <a:latin typeface="Meiryo"/>
-                <a:ea typeface="Meiryo"/>
+                <a:latin typeface="Noto Sans JP"/>
+                <a:ea typeface="Noto Sans JP"/>
               </a:rPr>
               <a:t>案件ステージ構成</a:t>
             </a:r>
@@ -49278,8 +49278,8 @@
                 <a:solidFill>
                   <a:srgbClr val="8A939E"/>
                 </a:solidFill>
-                <a:latin typeface="Meiryo"/>
-                <a:ea typeface="Meiryo"/>
+                <a:latin typeface="Noto Sans JP"/>
+                <a:ea typeface="Noto Sans JP"/>
               </a:rPr>
               <a:t>▲ 実際の画面イメージ（案件管理）</a:t>
             </a:r>
@@ -49324,8 +49324,8 @@
                 <a:solidFill>
                   <a:srgbClr val="8A939E"/>
                 </a:solidFill>
-                <a:latin typeface="Meiryo"/>
-                <a:ea typeface="Meiryo"/>
+                <a:latin typeface="Noto Sans JP"/>
+                <a:ea typeface="Noto Sans JP"/>
               </a:rPr>
               <a:t>GMO ONAiR</a:t>
             </a:r>
@@ -49522,8 +49522,8 @@
                 <a:solidFill>
                   <a:srgbClr val="169BA0"/>
                 </a:solidFill>
-                <a:latin typeface="Meiryo"/>
-                <a:ea typeface="Meiryo"/>
+                <a:latin typeface="Noto Sans JP"/>
+                <a:ea typeface="Noto Sans JP"/>
               </a:rPr>
               <a:t>APP 2 / 6</a:t>
             </a:r>
@@ -49568,8 +49568,8 @@
                 <a:solidFill>
                   <a:srgbClr val="1F2A37"/>
                 </a:solidFill>
-                <a:latin typeface="Meiryo"/>
-                <a:ea typeface="Meiryo"/>
+                <a:latin typeface="Noto Sans JP"/>
+                <a:ea typeface="Noto Sans JP"/>
               </a:rPr>
               <a:t>Qシート（Rundown / OnAir）</a:t>
             </a:r>
@@ -50008,8 +50008,8 @@
                 <a:solidFill>
                   <a:srgbClr val="1F2A37"/>
                 </a:solidFill>
-                <a:latin typeface="Meiryo"/>
-                <a:ea typeface="Meiryo"/>
+                <a:latin typeface="Noto Sans JP"/>
+                <a:ea typeface="Noto Sans JP"/>
               </a:rPr>
               <a:t>進行台本（Qシート）の作成と本番のリアルタイム進行同期</a:t>
             </a:r>
@@ -50054,8 +50054,8 @@
                 <a:solidFill>
                   <a:srgbClr val="169BA0"/>
                 </a:solidFill>
-                <a:latin typeface="Meiryo"/>
-                <a:ea typeface="Meiryo"/>
+                <a:latin typeface="Noto Sans JP"/>
+                <a:ea typeface="Noto Sans JP"/>
               </a:rPr>
               <a:t>できること</a:t>
             </a:r>
@@ -50144,8 +50144,8 @@
                 <a:solidFill>
                   <a:srgbClr val="FFFFFF"/>
                 </a:solidFill>
-                <a:latin typeface="Meiryo"/>
-                <a:ea typeface="Meiryo"/>
+                <a:latin typeface="Noto Sans JP"/>
+                <a:ea typeface="Noto Sans JP"/>
               </a:rPr>
               <a:t>✓</a:t>
             </a:r>
@@ -50190,8 +50190,8 @@
                 <a:solidFill>
                   <a:srgbClr val="1F2A37"/>
                 </a:solidFill>
-                <a:latin typeface="Meiryo"/>
-                <a:ea typeface="Meiryo"/>
+                <a:latin typeface="Noto Sans JP"/>
+                <a:ea typeface="Noto Sans JP"/>
               </a:rPr>
               <a:t>台本・ランダウンを共同編集</a:t>
             </a:r>
@@ -50280,8 +50280,8 @@
                 <a:solidFill>
                   <a:srgbClr val="FFFFFF"/>
                 </a:solidFill>
-                <a:latin typeface="Meiryo"/>
-                <a:ea typeface="Meiryo"/>
+                <a:latin typeface="Noto Sans JP"/>
+                <a:ea typeface="Noto Sans JP"/>
               </a:rPr>
               <a:t>✓</a:t>
             </a:r>
@@ -50326,8 +50326,8 @@
                 <a:solidFill>
                   <a:srgbClr val="1F2A37"/>
                 </a:solidFill>
-                <a:latin typeface="Meiryo"/>
-                <a:ea typeface="Meiryo"/>
+                <a:latin typeface="Noto Sans JP"/>
+                <a:ea typeface="Noto Sans JP"/>
               </a:rPr>
               <a:t>OnAir↔ランダウンを即時同期</a:t>
             </a:r>
@@ -50416,8 +50416,8 @@
                 <a:solidFill>
                   <a:srgbClr val="FFFFFF"/>
                 </a:solidFill>
-                <a:latin typeface="Meiryo"/>
-                <a:ea typeface="Meiryo"/>
+                <a:latin typeface="Noto Sans JP"/>
+                <a:ea typeface="Noto Sans JP"/>
               </a:rPr>
               <a:t>✓</a:t>
             </a:r>
@@ -50462,8 +50462,8 @@
                 <a:solidFill>
                   <a:srgbClr val="1F2A37"/>
                 </a:solidFill>
-                <a:latin typeface="Meiryo"/>
-                <a:ea typeface="Meiryo"/>
+                <a:latin typeface="Noto Sans JP"/>
+                <a:ea typeface="Noto Sans JP"/>
               </a:rPr>
               <a:t>プロンプター・音声香盤に対応</a:t>
             </a:r>
@@ -50554,8 +50554,8 @@
                 <a:solidFill>
                   <a:srgbClr val="169BA0"/>
                 </a:solidFill>
-                <a:latin typeface="Meiryo"/>
-                <a:ea typeface="Meiryo"/>
+                <a:latin typeface="Noto Sans JP"/>
+                <a:ea typeface="Noto Sans JP"/>
               </a:rPr>
               <a:t>現場での効果</a:t>
             </a:r>
@@ -50577,8 +50577,8 @@
                 <a:solidFill>
                   <a:srgbClr val="1F2A37"/>
                 </a:solidFill>
-                <a:latin typeface="Meiryo"/>
-                <a:ea typeface="Meiryo"/>
+                <a:latin typeface="Noto Sans JP"/>
+                <a:ea typeface="Noto Sans JP"/>
               </a:rPr>
               <a:t>本番中の進行変更も全員の画面に即反映。事故を防ぐ。</a:t>
             </a:r>
@@ -51231,8 +51231,8 @@
                 <a:solidFill>
                   <a:srgbClr val="5B6672"/>
                 </a:solidFill>
-                <a:latin typeface="Meiryo"/>
-                <a:ea typeface="Meiryo"/>
+                <a:latin typeface="Noto Sans JP"/>
+                <a:ea typeface="Noto Sans JP"/>
               </a:rPr>
               <a:t>エディタ</a:t>
             </a:r>
@@ -51367,8 +51367,8 @@
                 <a:solidFill>
                   <a:srgbClr val="FFFFFF"/>
                 </a:solidFill>
-                <a:latin typeface="Meiryo"/>
-                <a:ea typeface="Meiryo"/>
+                <a:latin typeface="Noto Sans JP"/>
+                <a:ea typeface="Noto Sans JP"/>
               </a:rPr>
               <a:t>ランダウン</a:t>
             </a:r>
@@ -51457,8 +51457,8 @@
                 <a:solidFill>
                   <a:srgbClr val="5B6672"/>
                 </a:solidFill>
-                <a:latin typeface="Meiryo"/>
-                <a:ea typeface="Meiryo"/>
+                <a:latin typeface="Noto Sans JP"/>
+                <a:ea typeface="Noto Sans JP"/>
               </a:rPr>
               <a:t>OnAir</a:t>
             </a:r>
@@ -51547,8 +51547,8 @@
                 <a:solidFill>
                   <a:srgbClr val="5B6672"/>
                 </a:solidFill>
-                <a:latin typeface="Meiryo"/>
-                <a:ea typeface="Meiryo"/>
+                <a:latin typeface="Noto Sans JP"/>
+                <a:ea typeface="Noto Sans JP"/>
               </a:rPr>
               <a:t>プロンプター</a:t>
             </a:r>
@@ -51593,8 +51593,8 @@
                 <a:solidFill>
                   <a:srgbClr val="1F2A37"/>
                 </a:solidFill>
-                <a:latin typeface="Meiryo"/>
-                <a:ea typeface="Meiryo"/>
+                <a:latin typeface="Noto Sans JP"/>
+                <a:ea typeface="Noto Sans JP"/>
               </a:rPr>
               <a:t>ランダウン ｜ GLS-A012 収録台本</a:t>
             </a:r>
@@ -51649,8 +51649,8 @@
                 <a:solidFill>
                   <a:srgbClr val="FFFFFF"/>
                 </a:solidFill>
-                <a:latin typeface="Meiryo"/>
-                <a:ea typeface="Meiryo"/>
+                <a:latin typeface="Noto Sans JP"/>
+                <a:ea typeface="Noto Sans JP"/>
               </a:rPr>
               <a:t>● ON AIR</a:t>
             </a:r>
@@ -51739,8 +51739,8 @@
                 <a:solidFill>
                   <a:srgbClr val="169BA0"/>
                 </a:solidFill>
-                <a:latin typeface="Meiryo"/>
-                <a:ea typeface="Meiryo"/>
+                <a:latin typeface="Noto Sans JP"/>
+                <a:ea typeface="Noto Sans JP"/>
               </a:rPr>
               <a:t>No</a:t>
             </a:r>
@@ -51785,8 +51785,8 @@
                 <a:solidFill>
                   <a:srgbClr val="169BA0"/>
                 </a:solidFill>
-                <a:latin typeface="Meiryo"/>
-                <a:ea typeface="Meiryo"/>
+                <a:latin typeface="Noto Sans JP"/>
+                <a:ea typeface="Noto Sans JP"/>
               </a:rPr>
               <a:t>時間</a:t>
             </a:r>
@@ -51831,8 +51831,8 @@
                 <a:solidFill>
                   <a:srgbClr val="169BA0"/>
                 </a:solidFill>
-                <a:latin typeface="Meiryo"/>
-                <a:ea typeface="Meiryo"/>
+                <a:latin typeface="Noto Sans JP"/>
+                <a:ea typeface="Noto Sans JP"/>
               </a:rPr>
               <a:t>内容</a:t>
             </a:r>
@@ -51877,8 +51877,8 @@
                 <a:solidFill>
                   <a:srgbClr val="169BA0"/>
                 </a:solidFill>
-                <a:latin typeface="Meiryo"/>
-                <a:ea typeface="Meiryo"/>
+                <a:latin typeface="Noto Sans JP"/>
+                <a:ea typeface="Noto Sans JP"/>
               </a:rPr>
               <a:t>出演</a:t>
             </a:r>
@@ -51923,8 +51923,8 @@
                 <a:solidFill>
                   <a:srgbClr val="169BA0"/>
                 </a:solidFill>
-                <a:latin typeface="Meiryo"/>
-                <a:ea typeface="Meiryo"/>
+                <a:latin typeface="Noto Sans JP"/>
+                <a:ea typeface="Noto Sans JP"/>
               </a:rPr>
               <a:t>音声</a:t>
             </a:r>
@@ -52107,8 +52107,8 @@
                 <a:solidFill>
                   <a:srgbClr val="1F2A37"/>
                 </a:solidFill>
-                <a:latin typeface="Meiryo"/>
-                <a:ea typeface="Meiryo"/>
+                <a:latin typeface="Noto Sans JP"/>
+                <a:ea typeface="Noto Sans JP"/>
               </a:rPr>
               <a:t>オープニング映像</a:t>
             </a:r>
@@ -52153,8 +52153,8 @@
                 <a:solidFill>
                   <a:srgbClr val="1F2A37"/>
                 </a:solidFill>
-                <a:latin typeface="Meiryo"/>
-                <a:ea typeface="Meiryo"/>
+                <a:latin typeface="Noto Sans JP"/>
+                <a:ea typeface="Noto Sans JP"/>
               </a:rPr>
               <a:t>—</a:t>
             </a:r>
@@ -52199,8 +52199,8 @@
                 <a:solidFill>
                   <a:srgbClr val="1F2A37"/>
                 </a:solidFill>
-                <a:latin typeface="Meiryo"/>
-                <a:ea typeface="Meiryo"/>
+                <a:latin typeface="Noto Sans JP"/>
+                <a:ea typeface="Noto Sans JP"/>
               </a:rPr>
               <a:t>BGM A</a:t>
             </a:r>
@@ -52427,8 +52427,8 @@
                 <a:solidFill>
                   <a:srgbClr val="1F2A37"/>
                 </a:solidFill>
-                <a:latin typeface="Meiryo"/>
-                <a:ea typeface="Meiryo"/>
+                <a:latin typeface="Noto Sans JP"/>
+                <a:ea typeface="Noto Sans JP"/>
               </a:rPr>
               <a:t>MC あいさつ・導入トーク</a:t>
             </a:r>
@@ -52473,8 +52473,8 @@
                 <a:solidFill>
                   <a:srgbClr val="1F2A37"/>
                 </a:solidFill>
-                <a:latin typeface="Meiryo"/>
-                <a:ea typeface="Meiryo"/>
+                <a:latin typeface="Noto Sans JP"/>
+                <a:ea typeface="Noto Sans JP"/>
               </a:rPr>
               <a:t>田中 / 佐藤</a:t>
             </a:r>
@@ -52519,8 +52519,8 @@
                 <a:solidFill>
                   <a:srgbClr val="1F2A37"/>
                 </a:solidFill>
-                <a:latin typeface="Meiryo"/>
-                <a:ea typeface="Meiryo"/>
+                <a:latin typeface="Noto Sans JP"/>
+                <a:ea typeface="Noto Sans JP"/>
               </a:rPr>
               <a:t>Mic 1,2</a:t>
             </a:r>
@@ -52703,8 +52703,8 @@
                 <a:solidFill>
                   <a:srgbClr val="1F2A37"/>
                 </a:solidFill>
-                <a:latin typeface="Meiryo"/>
-                <a:ea typeface="Meiryo"/>
+                <a:latin typeface="Noto Sans JP"/>
+                <a:ea typeface="Noto Sans JP"/>
               </a:rPr>
               <a:t>VTR① 事例紹介</a:t>
             </a:r>
@@ -52749,8 +52749,8 @@
                 <a:solidFill>
                   <a:srgbClr val="1F2A37"/>
                 </a:solidFill>
-                <a:latin typeface="Meiryo"/>
-                <a:ea typeface="Meiryo"/>
+                <a:latin typeface="Noto Sans JP"/>
+                <a:ea typeface="Noto Sans JP"/>
               </a:rPr>
               <a:t>—</a:t>
             </a:r>
@@ -52795,8 +52795,8 @@
                 <a:solidFill>
                   <a:srgbClr val="1F2A37"/>
                 </a:solidFill>
-                <a:latin typeface="Meiryo"/>
-                <a:ea typeface="Meiryo"/>
+                <a:latin typeface="Noto Sans JP"/>
+                <a:ea typeface="Noto Sans JP"/>
               </a:rPr>
               <a:t>VTR</a:t>
             </a:r>
@@ -52979,8 +52979,8 @@
                 <a:solidFill>
                   <a:srgbClr val="1F2A37"/>
                 </a:solidFill>
-                <a:latin typeface="Meiryo"/>
-                <a:ea typeface="Meiryo"/>
+                <a:latin typeface="Noto Sans JP"/>
+                <a:ea typeface="Noto Sans JP"/>
               </a:rPr>
               <a:t>ゲストトーク</a:t>
             </a:r>
@@ -53025,8 +53025,8 @@
                 <a:solidFill>
                   <a:srgbClr val="1F2A37"/>
                 </a:solidFill>
-                <a:latin typeface="Meiryo"/>
-                <a:ea typeface="Meiryo"/>
+                <a:latin typeface="Noto Sans JP"/>
+                <a:ea typeface="Noto Sans JP"/>
               </a:rPr>
               <a:t>鈴木</a:t>
             </a:r>
@@ -53071,8 +53071,8 @@
                 <a:solidFill>
                   <a:srgbClr val="1F2A37"/>
                 </a:solidFill>
-                <a:latin typeface="Meiryo"/>
-                <a:ea typeface="Meiryo"/>
+                <a:latin typeface="Noto Sans JP"/>
+                <a:ea typeface="Noto Sans JP"/>
               </a:rPr>
               <a:t>Mic 1,3</a:t>
             </a:r>
@@ -53255,8 +53255,8 @@
                 <a:solidFill>
                   <a:srgbClr val="1F2A37"/>
                 </a:solidFill>
-                <a:latin typeface="Meiryo"/>
-                <a:ea typeface="Meiryo"/>
+                <a:latin typeface="Noto Sans JP"/>
+                <a:ea typeface="Noto Sans JP"/>
               </a:rPr>
               <a:t>エンディング</a:t>
             </a:r>
@@ -53301,8 +53301,8 @@
                 <a:solidFill>
                   <a:srgbClr val="1F2A37"/>
                 </a:solidFill>
-                <a:latin typeface="Meiryo"/>
-                <a:ea typeface="Meiryo"/>
+                <a:latin typeface="Noto Sans JP"/>
+                <a:ea typeface="Noto Sans JP"/>
               </a:rPr>
               <a:t>全員</a:t>
             </a:r>
@@ -53347,8 +53347,8 @@
                 <a:solidFill>
                   <a:srgbClr val="1F2A37"/>
                 </a:solidFill>
-                <a:latin typeface="Meiryo"/>
-                <a:ea typeface="Meiryo"/>
+                <a:latin typeface="Noto Sans JP"/>
+                <a:ea typeface="Noto Sans JP"/>
               </a:rPr>
               <a:t>BGM B</a:t>
             </a:r>
@@ -53393,8 +53393,8 @@
                 <a:solidFill>
                   <a:srgbClr val="8A939E"/>
                 </a:solidFill>
-                <a:latin typeface="Meiryo"/>
-                <a:ea typeface="Meiryo"/>
+                <a:latin typeface="Noto Sans JP"/>
+                <a:ea typeface="Noto Sans JP"/>
               </a:rPr>
               <a:t>▲ 実際の画面イメージ（Qシート）</a:t>
             </a:r>
@@ -53439,8 +53439,8 @@
                 <a:solidFill>
                   <a:srgbClr val="8A939E"/>
                 </a:solidFill>
-                <a:latin typeface="Meiryo"/>
-                <a:ea typeface="Meiryo"/>
+                <a:latin typeface="Noto Sans JP"/>
+                <a:ea typeface="Noto Sans JP"/>
               </a:rPr>
               <a:t>GMO ONAiR</a:t>
             </a:r>
@@ -53637,8 +53637,8 @@
                 <a:solidFill>
                   <a:srgbClr val="F59E0B"/>
                 </a:solidFill>
-                <a:latin typeface="Meiryo"/>
-                <a:ea typeface="Meiryo"/>
+                <a:latin typeface="Noto Sans JP"/>
+                <a:ea typeface="Noto Sans JP"/>
               </a:rPr>
               <a:t>APP 3 / 6</a:t>
             </a:r>
@@ -53683,8 +53683,8 @@
                 <a:solidFill>
                   <a:srgbClr val="1F2A37"/>
                 </a:solidFill>
-                <a:latin typeface="Meiryo"/>
-                <a:ea typeface="Meiryo"/>
+                <a:latin typeface="Noto Sans JP"/>
+                <a:ea typeface="Noto Sans JP"/>
               </a:rPr>
               <a:t>機材管理（Equipment）</a:t>
             </a:r>
@@ -53943,8 +53943,8 @@
                 <a:solidFill>
                   <a:srgbClr val="1F2A37"/>
                 </a:solidFill>
-                <a:latin typeface="Meiryo"/>
-                <a:ea typeface="Meiryo"/>
+                <a:latin typeface="Noto Sans JP"/>
+                <a:ea typeface="Noto Sans JP"/>
               </a:rPr>
               <a:t>カメラ・ケーブル・コネクタまで機材台帳と貸出を一元管理</a:t>
             </a:r>
@@ -53989,8 +53989,8 @@
                 <a:solidFill>
                   <a:srgbClr val="F59E0B"/>
                 </a:solidFill>
-                <a:latin typeface="Meiryo"/>
-                <a:ea typeface="Meiryo"/>
+                <a:latin typeface="Noto Sans JP"/>
+                <a:ea typeface="Noto Sans JP"/>
               </a:rPr>
               <a:t>できること</a:t>
             </a:r>
@@ -54079,8 +54079,8 @@
                 <a:solidFill>
                   <a:srgbClr val="FFFFFF"/>
                 </a:solidFill>
-                <a:latin typeface="Meiryo"/>
-                <a:ea typeface="Meiryo"/>
+                <a:latin typeface="Noto Sans JP"/>
+                <a:ea typeface="Noto Sans JP"/>
               </a:rPr>
               <a:t>✓</a:t>
             </a:r>
@@ -54125,8 +54125,8 @@
                 <a:solidFill>
                   <a:srgbClr val="1F2A37"/>
                 </a:solidFill>
-                <a:latin typeface="Meiryo"/>
-                <a:ea typeface="Meiryo"/>
+                <a:latin typeface="Noto Sans JP"/>
+                <a:ea typeface="Noto Sans JP"/>
               </a:rPr>
               <a:t>機材台帳・在庫・メンテ履歴</a:t>
             </a:r>
@@ -54215,8 +54215,8 @@
                 <a:solidFill>
                   <a:srgbClr val="FFFFFF"/>
                 </a:solidFill>
-                <a:latin typeface="Meiryo"/>
-                <a:ea typeface="Meiryo"/>
+                <a:latin typeface="Noto Sans JP"/>
+                <a:ea typeface="Noto Sans JP"/>
               </a:rPr>
               <a:t>✓</a:t>
             </a:r>
@@ -54261,8 +54261,8 @@
                 <a:solidFill>
                   <a:srgbClr val="1F2A37"/>
                 </a:solidFill>
-                <a:latin typeface="Meiryo"/>
-                <a:ea typeface="Meiryo"/>
+                <a:latin typeface="Noto Sans JP"/>
+                <a:ea typeface="Noto Sans JP"/>
               </a:rPr>
               <a:t>QRスキャンで貸出/返却</a:t>
             </a:r>
@@ -54351,8 +54351,8 @@
                 <a:solidFill>
                   <a:srgbClr val="FFFFFF"/>
                 </a:solidFill>
-                <a:latin typeface="Meiryo"/>
-                <a:ea typeface="Meiryo"/>
+                <a:latin typeface="Noto Sans JP"/>
+                <a:ea typeface="Noto Sans JP"/>
               </a:rPr>
               <a:t>✓</a:t>
             </a:r>
@@ -54397,8 +54397,8 @@
                 <a:solidFill>
                   <a:srgbClr val="1F2A37"/>
                 </a:solidFill>
-                <a:latin typeface="Meiryo"/>
-                <a:ea typeface="Meiryo"/>
+                <a:latin typeface="Noto Sans JP"/>
+                <a:ea typeface="Noto Sans JP"/>
               </a:rPr>
               <a:t>Excel入出力・ラック図</a:t>
             </a:r>
@@ -54489,8 +54489,8 @@
                 <a:solidFill>
                   <a:srgbClr val="F59E0B"/>
                 </a:solidFill>
-                <a:latin typeface="Meiryo"/>
-                <a:ea typeface="Meiryo"/>
+                <a:latin typeface="Noto Sans JP"/>
+                <a:ea typeface="Noto Sans JP"/>
               </a:rPr>
               <a:t>現場での効果</a:t>
             </a:r>
@@ -54512,8 +54512,8 @@
                 <a:solidFill>
                   <a:srgbClr val="1F2A37"/>
                 </a:solidFill>
-                <a:latin typeface="Meiryo"/>
-                <a:ea typeface="Meiryo"/>
+                <a:latin typeface="Noto Sans JP"/>
+                <a:ea typeface="Noto Sans JP"/>
               </a:rPr>
               <a:t>“あの機材どこ？”が消える。貸出も返却もスマホで完結。</a:t>
             </a:r>
@@ -55166,8 +55166,8 @@
                 <a:solidFill>
                   <a:srgbClr val="5B6672"/>
                 </a:solidFill>
-                <a:latin typeface="Meiryo"/>
-                <a:ea typeface="Meiryo"/>
+                <a:latin typeface="Noto Sans JP"/>
+                <a:ea typeface="Noto Sans JP"/>
               </a:rPr>
               <a:t>ダッシュボード</a:t>
             </a:r>
@@ -55302,8 +55302,8 @@
                 <a:solidFill>
                   <a:srgbClr val="FFFFFF"/>
                 </a:solidFill>
-                <a:latin typeface="Meiryo"/>
-                <a:ea typeface="Meiryo"/>
+                <a:latin typeface="Noto Sans JP"/>
+                <a:ea typeface="Noto Sans JP"/>
               </a:rPr>
               <a:t>機材一覧</a:t>
             </a:r>
@@ -55392,8 +55392,8 @@
                 <a:solidFill>
                   <a:srgbClr val="5B6672"/>
                 </a:solidFill>
-                <a:latin typeface="Meiryo"/>
-                <a:ea typeface="Meiryo"/>
+                <a:latin typeface="Noto Sans JP"/>
+                <a:ea typeface="Noto Sans JP"/>
               </a:rPr>
               <a:t>ケーブル</a:t>
             </a:r>
@@ -55482,8 +55482,8 @@
                 <a:solidFill>
                   <a:srgbClr val="5B6672"/>
                 </a:solidFill>
-                <a:latin typeface="Meiryo"/>
-                <a:ea typeface="Meiryo"/>
+                <a:latin typeface="Noto Sans JP"/>
+                <a:ea typeface="Noto Sans JP"/>
               </a:rPr>
               <a:t>貸出</a:t>
             </a:r>
@@ -55572,8 +55572,8 @@
                 <a:solidFill>
                   <a:srgbClr val="5B6672"/>
                 </a:solidFill>
-                <a:latin typeface="Meiryo"/>
-                <a:ea typeface="Meiryo"/>
+                <a:latin typeface="Noto Sans JP"/>
+                <a:ea typeface="Noto Sans JP"/>
               </a:rPr>
               <a:t>ラック図</a:t>
             </a:r>
@@ -55618,8 +55618,8 @@
                 <a:solidFill>
                   <a:srgbClr val="1F2A37"/>
                 </a:solidFill>
-                <a:latin typeface="Meiryo"/>
-                <a:ea typeface="Meiryo"/>
+                <a:latin typeface="Noto Sans JP"/>
+                <a:ea typeface="Noto Sans JP"/>
               </a:rPr>
               <a:t>機材一覧</a:t>
             </a:r>
@@ -55712,8 +55712,8 @@
                 <a:solidFill>
                   <a:srgbClr val="8A939E"/>
                 </a:solidFill>
-                <a:latin typeface="Meiryo"/>
-                <a:ea typeface="Meiryo"/>
+                <a:latin typeface="Noto Sans JP"/>
+                <a:ea typeface="Noto Sans JP"/>
               </a:rPr>
               <a:t>🔍 機材名・型番で検索</a:t>
             </a:r>
@@ -55768,8 +55768,8 @@
                 <a:solidFill>
                   <a:srgbClr val="FFFFFF"/>
                 </a:solidFill>
-                <a:latin typeface="Meiryo"/>
-                <a:ea typeface="Meiryo"/>
+                <a:latin typeface="Noto Sans JP"/>
+                <a:ea typeface="Noto Sans JP"/>
               </a:rPr>
               <a:t>＋ 登録</a:t>
             </a:r>
@@ -55826,8 +55826,8 @@
                 <a:solidFill>
                   <a:srgbClr val="F59E0B"/>
                 </a:solidFill>
-                <a:latin typeface="Meiryo"/>
-                <a:ea typeface="Meiryo"/>
+                <a:latin typeface="Noto Sans JP"/>
+                <a:ea typeface="Noto Sans JP"/>
               </a:rPr>
               <a:t>Excel</a:t>
             </a:r>
@@ -55916,8 +55916,8 @@
                 <a:solidFill>
                   <a:srgbClr val="B06E00"/>
                 </a:solidFill>
-                <a:latin typeface="Meiryo"/>
-                <a:ea typeface="Meiryo"/>
+                <a:latin typeface="Noto Sans JP"/>
+                <a:ea typeface="Noto Sans JP"/>
               </a:rPr>
               <a:t>型番</a:t>
             </a:r>
@@ -55962,8 +55962,8 @@
                 <a:solidFill>
                   <a:srgbClr val="B06E00"/>
                 </a:solidFill>
-                <a:latin typeface="Meiryo"/>
-                <a:ea typeface="Meiryo"/>
+                <a:latin typeface="Noto Sans JP"/>
+                <a:ea typeface="Noto Sans JP"/>
               </a:rPr>
               <a:t>機材名</a:t>
             </a:r>
@@ -56008,8 +56008,8 @@
                 <a:solidFill>
                   <a:srgbClr val="B06E00"/>
                 </a:solidFill>
-                <a:latin typeface="Meiryo"/>
-                <a:ea typeface="Meiryo"/>
+                <a:latin typeface="Noto Sans JP"/>
+                <a:ea typeface="Noto Sans JP"/>
               </a:rPr>
               <a:t>数</a:t>
             </a:r>
@@ -56054,8 +56054,8 @@
                 <a:solidFill>
                   <a:srgbClr val="B06E00"/>
                 </a:solidFill>
-                <a:latin typeface="Meiryo"/>
-                <a:ea typeface="Meiryo"/>
+                <a:latin typeface="Noto Sans JP"/>
+                <a:ea typeface="Noto Sans JP"/>
               </a:rPr>
               <a:t>設置場所</a:t>
             </a:r>
@@ -56100,8 +56100,8 @@
                 <a:solidFill>
                   <a:srgbClr val="B06E00"/>
                 </a:solidFill>
-                <a:latin typeface="Meiryo"/>
-                <a:ea typeface="Meiryo"/>
+                <a:latin typeface="Noto Sans JP"/>
+                <a:ea typeface="Noto Sans JP"/>
               </a:rPr>
               <a:t>状態</a:t>
             </a:r>
@@ -56238,8 +56238,8 @@
                 <a:solidFill>
                   <a:srgbClr val="1F2A37"/>
                 </a:solidFill>
-                <a:latin typeface="Meiryo"/>
-                <a:ea typeface="Meiryo"/>
+                <a:latin typeface="Noto Sans JP"/>
+                <a:ea typeface="Noto Sans JP"/>
               </a:rPr>
               <a:t>業務用4Kカメラ</a:t>
             </a:r>
@@ -56330,8 +56330,8 @@
                 <a:solidFill>
                   <a:srgbClr val="1F2A37"/>
                 </a:solidFill>
-                <a:latin typeface="Meiryo"/>
-                <a:ea typeface="Meiryo"/>
+                <a:latin typeface="Noto Sans JP"/>
+                <a:ea typeface="Noto Sans JP"/>
               </a:rPr>
               <a:t>Aスタジオ</a:t>
             </a:r>
@@ -56386,8 +56386,8 @@
                 <a:solidFill>
                   <a:srgbClr val="FFFFFF"/>
                 </a:solidFill>
-                <a:latin typeface="Meiryo"/>
-                <a:ea typeface="Meiryo"/>
+                <a:latin typeface="Noto Sans JP"/>
+                <a:ea typeface="Noto Sans JP"/>
               </a:rPr>
               <a:t>稼働</a:t>
             </a:r>
@@ -56524,8 +56524,8 @@
                 <a:solidFill>
                   <a:srgbClr val="1F2A37"/>
                 </a:solidFill>
-                <a:latin typeface="Meiryo"/>
-                <a:ea typeface="Meiryo"/>
+                <a:latin typeface="Noto Sans JP"/>
+                <a:ea typeface="Noto Sans JP"/>
               </a:rPr>
               <a:t>光カメラケーブル 30m</a:t>
             </a:r>
@@ -56616,8 +56616,8 @@
                 <a:solidFill>
                   <a:srgbClr val="1F2A37"/>
                 </a:solidFill>
-                <a:latin typeface="Meiryo"/>
-                <a:ea typeface="Meiryo"/>
+                <a:latin typeface="Noto Sans JP"/>
+                <a:ea typeface="Noto Sans JP"/>
               </a:rPr>
               <a:t>倉庫B-2</a:t>
             </a:r>
@@ -56672,8 +56672,8 @@
                 <a:solidFill>
                   <a:srgbClr val="FFFFFF"/>
                 </a:solidFill>
-                <a:latin typeface="Meiryo"/>
-                <a:ea typeface="Meiryo"/>
+                <a:latin typeface="Noto Sans JP"/>
+                <a:ea typeface="Noto Sans JP"/>
               </a:rPr>
               <a:t>在庫</a:t>
             </a:r>
@@ -56810,8 +56810,8 @@
                 <a:solidFill>
                   <a:srgbClr val="1F2A37"/>
                 </a:solidFill>
-                <a:latin typeface="Meiryo"/>
-                <a:ea typeface="Meiryo"/>
+                <a:latin typeface="Noto Sans JP"/>
+                <a:ea typeface="Noto Sans JP"/>
               </a:rPr>
               <a:t>デジタル卓 32ch</a:t>
             </a:r>
@@ -56902,8 +56902,8 @@
                 <a:solidFill>
                   <a:srgbClr val="1F2A37"/>
                 </a:solidFill>
-                <a:latin typeface="Meiryo"/>
-                <a:ea typeface="Meiryo"/>
+                <a:latin typeface="Noto Sans JP"/>
+                <a:ea typeface="Noto Sans JP"/>
               </a:rPr>
               <a:t>副調整室</a:t>
             </a:r>
@@ -56958,8 +56958,8 @@
                 <a:solidFill>
                   <a:srgbClr val="FFFFFF"/>
                 </a:solidFill>
-                <a:latin typeface="Meiryo"/>
-                <a:ea typeface="Meiryo"/>
+                <a:latin typeface="Noto Sans JP"/>
+                <a:ea typeface="Noto Sans JP"/>
               </a:rPr>
               <a:t>稼働</a:t>
             </a:r>
@@ -57096,8 +57096,8 @@
                 <a:solidFill>
                   <a:srgbClr val="1F2A37"/>
                 </a:solidFill>
-                <a:latin typeface="Meiryo"/>
-                <a:ea typeface="Meiryo"/>
+                <a:latin typeface="Noto Sans JP"/>
+                <a:ea typeface="Noto Sans JP"/>
               </a:rPr>
               <a:t>シネマカメラ</a:t>
             </a:r>
@@ -57188,8 +57188,8 @@
                 <a:solidFill>
                   <a:srgbClr val="1F2A37"/>
                 </a:solidFill>
-                <a:latin typeface="Meiryo"/>
-                <a:ea typeface="Meiryo"/>
+                <a:latin typeface="Noto Sans JP"/>
+                <a:ea typeface="Noto Sans JP"/>
               </a:rPr>
               <a:t>貸出中</a:t>
             </a:r>
@@ -57244,8 +57244,8 @@
                 <a:solidFill>
                   <a:srgbClr val="FFFFFF"/>
                 </a:solidFill>
-                <a:latin typeface="Meiryo"/>
-                <a:ea typeface="Meiryo"/>
+                <a:latin typeface="Noto Sans JP"/>
+                <a:ea typeface="Noto Sans JP"/>
               </a:rPr>
               <a:t>貸出</a:t>
             </a:r>
@@ -57382,8 +57382,8 @@
                 <a:solidFill>
                   <a:srgbClr val="1F2A37"/>
                 </a:solidFill>
-                <a:latin typeface="Meiryo"/>
-                <a:ea typeface="Meiryo"/>
+                <a:latin typeface="Noto Sans JP"/>
+                <a:ea typeface="Noto Sans JP"/>
               </a:rPr>
               <a:t>システムカメラ</a:t>
             </a:r>
@@ -57474,8 +57474,8 @@
                 <a:solidFill>
                   <a:srgbClr val="1F2A37"/>
                 </a:solidFill>
-                <a:latin typeface="Meiryo"/>
-                <a:ea typeface="Meiryo"/>
+                <a:latin typeface="Noto Sans JP"/>
+                <a:ea typeface="Noto Sans JP"/>
               </a:rPr>
               <a:t>Aスタジオ</a:t>
             </a:r>
@@ -57530,8 +57530,8 @@
                 <a:solidFill>
                   <a:srgbClr val="FFFFFF"/>
                 </a:solidFill>
-                <a:latin typeface="Meiryo"/>
-                <a:ea typeface="Meiryo"/>
+                <a:latin typeface="Noto Sans JP"/>
+                <a:ea typeface="Noto Sans JP"/>
               </a:rPr>
               <a:t>稼働</a:t>
             </a:r>
@@ -57576,8 +57576,8 @@
                 <a:solidFill>
                   <a:srgbClr val="8A939E"/>
                 </a:solidFill>
-                <a:latin typeface="Meiryo"/>
-                <a:ea typeface="Meiryo"/>
+                <a:latin typeface="Noto Sans JP"/>
+                <a:ea typeface="Noto Sans JP"/>
               </a:rPr>
               <a:t>▲ 実際の画面イメージ（機材管理）</a:t>
             </a:r>
@@ -57622,8 +57622,8 @@
                 <a:solidFill>
                   <a:srgbClr val="8A939E"/>
                 </a:solidFill>
-                <a:latin typeface="Meiryo"/>
-                <a:ea typeface="Meiryo"/>
+                <a:latin typeface="Noto Sans JP"/>
+                <a:ea typeface="Noto Sans JP"/>
               </a:rPr>
               <a:t>GMO ONAiR</a:t>
             </a:r>
@@ -57820,8 +57820,8 @@
                 <a:solidFill>
                   <a:srgbClr val="7C5CD6"/>
                 </a:solidFill>
-                <a:latin typeface="Meiryo"/>
-                <a:ea typeface="Meiryo"/>
+                <a:latin typeface="Noto Sans JP"/>
+                <a:ea typeface="Noto Sans JP"/>
               </a:rPr>
               <a:t>APP 4 / 6</a:t>
             </a:r>
@@ -57866,8 +57866,8 @@
                 <a:solidFill>
                   <a:srgbClr val="1F2A37"/>
                 </a:solidFill>
-                <a:latin typeface="Meiryo"/>
-                <a:ea typeface="Meiryo"/>
+                <a:latin typeface="Noto Sans JP"/>
+                <a:ea typeface="Noto Sans JP"/>
               </a:rPr>
               <a:t>技術資料（Tech Sheet）</a:t>
             </a:r>
@@ -58218,8 +58218,8 @@
                 <a:solidFill>
                   <a:srgbClr val="1F2A37"/>
                 </a:solidFill>
-                <a:latin typeface="Meiryo"/>
-                <a:ea typeface="Meiryo"/>
+                <a:latin typeface="Noto Sans JP"/>
+                <a:ea typeface="Noto Sans JP"/>
               </a:rPr>
               <a:t>カメラ・映像・音声・通信の技術仕様書をデジタル化</a:t>
             </a:r>
@@ -58264,8 +58264,8 @@
                 <a:solidFill>
                   <a:srgbClr val="7C5CD6"/>
                 </a:solidFill>
-                <a:latin typeface="Meiryo"/>
-                <a:ea typeface="Meiryo"/>
+                <a:latin typeface="Noto Sans JP"/>
+                <a:ea typeface="Noto Sans JP"/>
               </a:rPr>
               <a:t>できること</a:t>
             </a:r>
@@ -58354,8 +58354,8 @@
                 <a:solidFill>
                   <a:srgbClr val="FFFFFF"/>
                 </a:solidFill>
-                <a:latin typeface="Meiryo"/>
-                <a:ea typeface="Meiryo"/>
+                <a:latin typeface="Noto Sans JP"/>
+                <a:ea typeface="Noto Sans JP"/>
               </a:rPr>
               <a:t>✓</a:t>
             </a:r>
@@ -58400,8 +58400,8 @@
                 <a:solidFill>
                   <a:srgbClr val="1F2A37"/>
                 </a:solidFill>
-                <a:latin typeface="Meiryo"/>
-                <a:ea typeface="Meiryo"/>
+                <a:latin typeface="Noto Sans JP"/>
+                <a:ea typeface="Noto Sans JP"/>
               </a:rPr>
               <a:t>案件ごとの技術シート作成</a:t>
             </a:r>
@@ -58490,8 +58490,8 @@
                 <a:solidFill>
                   <a:srgbClr val="FFFFFF"/>
                 </a:solidFill>
-                <a:latin typeface="Meiryo"/>
-                <a:ea typeface="Meiryo"/>
+                <a:latin typeface="Noto Sans JP"/>
+                <a:ea typeface="Noto Sans JP"/>
               </a:rPr>
               <a:t>✓</a:t>
             </a:r>
@@ -58536,8 +58536,8 @@
                 <a:solidFill>
                   <a:srgbClr val="1F2A37"/>
                 </a:solidFill>
-                <a:latin typeface="Meiryo"/>
-                <a:ea typeface="Meiryo"/>
+                <a:latin typeface="Noto Sans JP"/>
+                <a:ea typeface="Noto Sans JP"/>
               </a:rPr>
               <a:t>A4印刷レイアウト対応</a:t>
             </a:r>
@@ -58626,8 +58626,8 @@
                 <a:solidFill>
                   <a:srgbClr val="FFFFFF"/>
                 </a:solidFill>
-                <a:latin typeface="Meiryo"/>
-                <a:ea typeface="Meiryo"/>
+                <a:latin typeface="Noto Sans JP"/>
+                <a:ea typeface="Noto Sans JP"/>
               </a:rPr>
               <a:t>✓</a:t>
             </a:r>
@@ -58672,8 +58672,8 @@
                 <a:solidFill>
                   <a:srgbClr val="1F2A37"/>
                 </a:solidFill>
-                <a:latin typeface="Meiryo"/>
-                <a:ea typeface="Meiryo"/>
+                <a:latin typeface="Noto Sans JP"/>
+                <a:ea typeface="Noto Sans JP"/>
               </a:rPr>
               <a:t>機材データと連携</a:t>
             </a:r>
@@ -58764,8 +58764,8 @@
                 <a:solidFill>
                   <a:srgbClr val="7C5CD6"/>
                 </a:solidFill>
-                <a:latin typeface="Meiryo"/>
-                <a:ea typeface="Meiryo"/>
+                <a:latin typeface="Noto Sans JP"/>
+                <a:ea typeface="Noto Sans JP"/>
               </a:rPr>
               <a:t>現場での効果</a:t>
             </a:r>
@@ -58787,8 +58787,8 @@
                 <a:solidFill>
                   <a:srgbClr val="1F2A37"/>
                 </a:solidFill>
-                <a:latin typeface="Meiryo"/>
-                <a:ea typeface="Meiryo"/>
+                <a:latin typeface="Noto Sans JP"/>
+                <a:ea typeface="Noto Sans JP"/>
               </a:rPr>
               <a:t>技術仕様の作成・共有・印刷が紙からデジタルへ。</a:t>
             </a:r>
@@ -59441,8 +59441,8 @@
                 <a:solidFill>
                   <a:srgbClr val="5B6672"/>
                 </a:solidFill>
-                <a:latin typeface="Meiryo"/>
-                <a:ea typeface="Meiryo"/>
+                <a:latin typeface="Noto Sans JP"/>
+                <a:ea typeface="Noto Sans JP"/>
               </a:rPr>
               <a:t>資料一覧</a:t>
             </a:r>
@@ -59577,8 +59577,8 @@
                 <a:solidFill>
                   <a:srgbClr val="FFFFFF"/>
                 </a:solidFill>
-                <a:latin typeface="Meiryo"/>
-                <a:ea typeface="Meiryo"/>
+                <a:latin typeface="Noto Sans JP"/>
+                <a:ea typeface="Noto Sans JP"/>
               </a:rPr>
               <a:t>編集</a:t>
             </a:r>
@@ -59667,8 +59667,8 @@
                 <a:solidFill>
                   <a:srgbClr val="5B6672"/>
                 </a:solidFill>
-                <a:latin typeface="Meiryo"/>
-                <a:ea typeface="Meiryo"/>
+                <a:latin typeface="Noto Sans JP"/>
+                <a:ea typeface="Noto Sans JP"/>
               </a:rPr>
               <a:t>印刷プレビュー</a:t>
             </a:r>
@@ -59713,8 +59713,8 @@
                 <a:solidFill>
                   <a:srgbClr val="1F2A37"/>
                 </a:solidFill>
-                <a:latin typeface="Meiryo"/>
-                <a:ea typeface="Meiryo"/>
+                <a:latin typeface="Noto Sans JP"/>
+                <a:ea typeface="Noto Sans JP"/>
               </a:rPr>
               <a:t>技術仕様書 ｜ GLS-A012</a:t>
             </a:r>
@@ -59771,8 +59771,8 @@
                 <a:solidFill>
                   <a:srgbClr val="7C5CD6"/>
                 </a:solidFill>
-                <a:latin typeface="Meiryo"/>
-                <a:ea typeface="Meiryo"/>
+                <a:latin typeface="Noto Sans JP"/>
+                <a:ea typeface="Noto Sans JP"/>
               </a:rPr>
               <a:t>ヘッダー</a:t>
             </a:r>
@@ -59827,8 +59827,8 @@
                 <a:solidFill>
                   <a:srgbClr val="FFFFFF"/>
                 </a:solidFill>
-                <a:latin typeface="Meiryo"/>
-                <a:ea typeface="Meiryo"/>
+                <a:latin typeface="Noto Sans JP"/>
+                <a:ea typeface="Noto Sans JP"/>
               </a:rPr>
               <a:t>カメラ</a:t>
             </a:r>
@@ -59885,8 +59885,8 @@
                 <a:solidFill>
                   <a:srgbClr val="7C5CD6"/>
                 </a:solidFill>
-                <a:latin typeface="Meiryo"/>
-                <a:ea typeface="Meiryo"/>
+                <a:latin typeface="Noto Sans JP"/>
+                <a:ea typeface="Noto Sans JP"/>
               </a:rPr>
               <a:t>映像</a:t>
             </a:r>
@@ -59943,8 +59943,8 @@
                 <a:solidFill>
                   <a:srgbClr val="7C5CD6"/>
                 </a:solidFill>
-                <a:latin typeface="Meiryo"/>
-                <a:ea typeface="Meiryo"/>
+                <a:latin typeface="Noto Sans JP"/>
+                <a:ea typeface="Noto Sans JP"/>
               </a:rPr>
               <a:t>音声</a:t>
             </a:r>
@@ -60001,8 +60001,8 @@
                 <a:solidFill>
                   <a:srgbClr val="7C5CD6"/>
                 </a:solidFill>
-                <a:latin typeface="Meiryo"/>
-                <a:ea typeface="Meiryo"/>
+                <a:latin typeface="Noto Sans JP"/>
+                <a:ea typeface="Noto Sans JP"/>
               </a:rPr>
               <a:t>通信</a:t>
             </a:r>
@@ -60047,8 +60047,8 @@
                 <a:solidFill>
                   <a:srgbClr val="7C5CD6"/>
                 </a:solidFill>
-                <a:latin typeface="Meiryo"/>
-                <a:ea typeface="Meiryo"/>
+                <a:latin typeface="Noto Sans JP"/>
+                <a:ea typeface="Noto Sans JP"/>
               </a:rPr>
               <a:t>カメラ台数</a:t>
             </a:r>
@@ -60141,8 +60141,8 @@
                 <a:solidFill>
                   <a:srgbClr val="1F2A37"/>
                 </a:solidFill>
-                <a:latin typeface="Meiryo"/>
-                <a:ea typeface="Meiryo"/>
+                <a:latin typeface="Noto Sans JP"/>
+                <a:ea typeface="Noto Sans JP"/>
               </a:rPr>
               <a:t>8 台</a:t>
             </a:r>
@@ -60187,8 +60187,8 @@
                 <a:solidFill>
                   <a:srgbClr val="7C5CD6"/>
                 </a:solidFill>
-                <a:latin typeface="Meiryo"/>
-                <a:ea typeface="Meiryo"/>
+                <a:latin typeface="Noto Sans JP"/>
+                <a:ea typeface="Noto Sans JP"/>
               </a:rPr>
               <a:t>カメラ機種</a:t>
             </a:r>
@@ -60281,8 +60281,8 @@
                 <a:solidFill>
                   <a:srgbClr val="1F2A37"/>
                 </a:solidFill>
-                <a:latin typeface="Meiryo"/>
-                <a:ea typeface="Meiryo"/>
+                <a:latin typeface="Noto Sans JP"/>
+                <a:ea typeface="Noto Sans JP"/>
               </a:rPr>
               <a:t>HDC-3500 / PXW-FX9</a:t>
             </a:r>
@@ -60327,8 +60327,8 @@
                 <a:solidFill>
                   <a:srgbClr val="7C5CD6"/>
                 </a:solidFill>
-                <a:latin typeface="Meiryo"/>
-                <a:ea typeface="Meiryo"/>
+                <a:latin typeface="Noto Sans JP"/>
+                <a:ea typeface="Noto Sans JP"/>
               </a:rPr>
               <a:t>レンズ構成</a:t>
             </a:r>
@@ -60421,8 +60421,8 @@
                 <a:solidFill>
                   <a:srgbClr val="1F2A37"/>
                 </a:solidFill>
-                <a:latin typeface="Meiryo"/>
-                <a:ea typeface="Meiryo"/>
+                <a:latin typeface="Noto Sans JP"/>
+                <a:ea typeface="Noto Sans JP"/>
               </a:rPr>
               <a:t>ズーム ×4, 単焦点 ×2</a:t>
             </a:r>
@@ -60467,8 +60467,8 @@
                 <a:solidFill>
                   <a:srgbClr val="7C5CD6"/>
                 </a:solidFill>
-                <a:latin typeface="Meiryo"/>
-                <a:ea typeface="Meiryo"/>
+                <a:latin typeface="Noto Sans JP"/>
+                <a:ea typeface="Noto Sans JP"/>
               </a:rPr>
               <a:t>出力フォーマット</a:t>
             </a:r>
@@ -60561,8 +60561,8 @@
                 <a:solidFill>
                   <a:srgbClr val="1F2A37"/>
                 </a:solidFill>
-                <a:latin typeface="Meiryo"/>
-                <a:ea typeface="Meiryo"/>
+                <a:latin typeface="Noto Sans JP"/>
+                <a:ea typeface="Noto Sans JP"/>
               </a:rPr>
               <a:t>1080/59.94p</a:t>
             </a:r>
@@ -60607,8 +60607,8 @@
                 <a:solidFill>
                   <a:srgbClr val="7C5CD6"/>
                 </a:solidFill>
-                <a:latin typeface="Meiryo"/>
-                <a:ea typeface="Meiryo"/>
+                <a:latin typeface="Noto Sans JP"/>
+                <a:ea typeface="Noto Sans JP"/>
               </a:rPr>
               <a:t>ケーブル長</a:t>
             </a:r>
@@ -60701,8 +60701,8 @@
                 <a:solidFill>
                   <a:srgbClr val="1F2A37"/>
                 </a:solidFill>
-                <a:latin typeface="Meiryo"/>
-                <a:ea typeface="Meiryo"/>
+                <a:latin typeface="Noto Sans JP"/>
+                <a:ea typeface="Noto Sans JP"/>
               </a:rPr>
               <a:t>30m / 50m 光</a:t>
             </a:r>
@@ -60747,8 +60747,8 @@
                 <a:solidFill>
                   <a:srgbClr val="7C5CD6"/>
                 </a:solidFill>
-                <a:latin typeface="Meiryo"/>
-                <a:ea typeface="Meiryo"/>
+                <a:latin typeface="Noto Sans JP"/>
+                <a:ea typeface="Noto Sans JP"/>
               </a:rPr>
               <a:t>特記事項</a:t>
             </a:r>
@@ -60841,8 +60841,8 @@
                 <a:solidFill>
                   <a:srgbClr val="1F2A37"/>
                 </a:solidFill>
-                <a:latin typeface="Meiryo"/>
-                <a:ea typeface="Meiryo"/>
+                <a:latin typeface="Noto Sans JP"/>
+                <a:ea typeface="Noto Sans JP"/>
               </a:rPr>
               <a:t>中継車との連携あり</a:t>
             </a:r>
@@ -60887,8 +60887,8 @@
                 <a:solidFill>
                   <a:srgbClr val="8A939E"/>
                 </a:solidFill>
-                <a:latin typeface="Meiryo"/>
-                <a:ea typeface="Meiryo"/>
+                <a:latin typeface="Noto Sans JP"/>
+                <a:ea typeface="Noto Sans JP"/>
               </a:rPr>
               <a:t>▲ 実際の画面イメージ（技術資料）</a:t>
             </a:r>
@@ -60933,8 +60933,8 @@
                 <a:solidFill>
                   <a:srgbClr val="8A939E"/>
                 </a:solidFill>
-                <a:latin typeface="Meiryo"/>
-                <a:ea typeface="Meiryo"/>
+                <a:latin typeface="Noto Sans JP"/>
+                <a:ea typeface="Noto Sans JP"/>
               </a:rPr>
               <a:t>GMO ONAiR</a:t>
             </a:r>
@@ -61131,8 +61131,8 @@
                 <a:solidFill>
                   <a:srgbClr val="2EA06B"/>
                 </a:solidFill>
-                <a:latin typeface="Meiryo"/>
-                <a:ea typeface="Meiryo"/>
+                <a:latin typeface="Noto Sans JP"/>
+                <a:ea typeface="Noto Sans JP"/>
               </a:rPr>
               <a:t>APP 5 / 6</a:t>
             </a:r>
@@ -61177,8 +61177,8 @@
                 <a:solidFill>
                   <a:srgbClr val="1F2A37"/>
                 </a:solidFill>
-                <a:latin typeface="Meiryo"/>
-                <a:ea typeface="Meiryo"/>
+                <a:latin typeface="Noto Sans JP"/>
+                <a:ea typeface="Noto Sans JP"/>
               </a:rPr>
               <a:t>ライブ運用（Live Ops）</a:t>
             </a:r>
@@ -61557,8 +61557,8 @@
                 <a:solidFill>
                   <a:srgbClr val="1F2A37"/>
                 </a:solidFill>
-                <a:latin typeface="Meiryo"/>
-                <a:ea typeface="Meiryo"/>
+                <a:latin typeface="Noto Sans JP"/>
+                <a:ea typeface="Noto Sans JP"/>
               </a:rPr>
               <a:t>本番当日のオペレーション・進行・計時をサポート</a:t>
             </a:r>
@@ -61603,8 +61603,8 @@
                 <a:solidFill>
                   <a:srgbClr val="2EA06B"/>
                 </a:solidFill>
-                <a:latin typeface="Meiryo"/>
-                <a:ea typeface="Meiryo"/>
+                <a:latin typeface="Noto Sans JP"/>
+                <a:ea typeface="Noto Sans JP"/>
               </a:rPr>
               <a:t>できること</a:t>
             </a:r>
@@ -61693,8 +61693,8 @@
                 <a:solidFill>
                   <a:srgbClr val="FFFFFF"/>
                 </a:solidFill>
-                <a:latin typeface="Meiryo"/>
-                <a:ea typeface="Meiryo"/>
+                <a:latin typeface="Noto Sans JP"/>
+                <a:ea typeface="Noto Sans JP"/>
               </a:rPr>
               <a:t>✓</a:t>
             </a:r>
@@ -61739,8 +61739,8 @@
                 <a:solidFill>
                   <a:srgbClr val="1F2A37"/>
                 </a:solidFill>
-                <a:latin typeface="Meiryo"/>
-                <a:ea typeface="Meiryo"/>
+                <a:latin typeface="Noto Sans JP"/>
+                <a:ea typeface="Noto Sans JP"/>
               </a:rPr>
               <a:t>番組進行・タイマー表示</a:t>
             </a:r>
@@ -61829,8 +61829,8 @@
                 <a:solidFill>
                   <a:srgbClr val="FFFFFF"/>
                 </a:solidFill>
-                <a:latin typeface="Meiryo"/>
-                <a:ea typeface="Meiryo"/>
+                <a:latin typeface="Noto Sans JP"/>
+                <a:ea typeface="Noto Sans JP"/>
               </a:rPr>
               <a:t>✓</a:t>
             </a:r>
@@ -61875,8 +61875,8 @@
                 <a:solidFill>
                   <a:srgbClr val="1F2A37"/>
                 </a:solidFill>
-                <a:latin typeface="Meiryo"/>
-                <a:ea typeface="Meiryo"/>
+                <a:latin typeface="Noto Sans JP"/>
+                <a:ea typeface="Noto Sans JP"/>
               </a:rPr>
               <a:t>視聴者数のリアルタイム計測</a:t>
             </a:r>
@@ -61965,8 +61965,8 @@
                 <a:solidFill>
                   <a:srgbClr val="FFFFFF"/>
                 </a:solidFill>
-                <a:latin typeface="Meiryo"/>
-                <a:ea typeface="Meiryo"/>
+                <a:latin typeface="Noto Sans JP"/>
+                <a:ea typeface="Noto Sans JP"/>
               </a:rPr>
               <a:t>✓</a:t>
             </a:r>
@@ -62011,8 +62011,8 @@
                 <a:solidFill>
                   <a:srgbClr val="1F2A37"/>
                 </a:solidFill>
-                <a:latin typeface="Meiryo"/>
-                <a:ea typeface="Meiryo"/>
+                <a:latin typeface="Noto Sans JP"/>
+                <a:ea typeface="Noto Sans JP"/>
               </a:rPr>
               <a:t>Zoom/Teams 参加者連携</a:t>
             </a:r>
@@ -62103,8 +62103,8 @@
                 <a:solidFill>
                   <a:srgbClr val="2EA06B"/>
                 </a:solidFill>
-                <a:latin typeface="Meiryo"/>
-                <a:ea typeface="Meiryo"/>
+                <a:latin typeface="Noto Sans JP"/>
+                <a:ea typeface="Noto Sans JP"/>
               </a:rPr>
               <a:t>現場での効果</a:t>
             </a:r>
@@ -62126,8 +62126,8 @@
                 <a:solidFill>
                   <a:srgbClr val="1F2A37"/>
                 </a:solidFill>
-                <a:latin typeface="Meiryo"/>
-                <a:ea typeface="Meiryo"/>
+                <a:latin typeface="Noto Sans JP"/>
+                <a:ea typeface="Noto Sans JP"/>
               </a:rPr>
               <a:t>進行・計時・視聴者数を1画面で。当日オペが軽くなる。</a:t>
             </a:r>
@@ -62610,8 +62610,8 @@
                 <a:solidFill>
                   <a:srgbClr val="CED7E2"/>
                 </a:solidFill>
-                <a:latin typeface="Meiryo"/>
-                <a:ea typeface="Meiryo"/>
+                <a:latin typeface="Noto Sans JP"/>
+                <a:ea typeface="Noto Sans JP"/>
               </a:rPr>
               <a:t>本番進行 ｜ 年間表彰式 2026</a:t>
             </a:r>
@@ -62666,8 +62666,8 @@
                 <a:solidFill>
                   <a:srgbClr val="FFFFFF"/>
                 </a:solidFill>
-                <a:latin typeface="Meiryo"/>
-                <a:ea typeface="Meiryo"/>
+                <a:latin typeface="Noto Sans JP"/>
+                <a:ea typeface="Noto Sans JP"/>
               </a:rPr>
               <a:t>● LIVE</a:t>
             </a:r>
@@ -62758,8 +62758,8 @@
                 <a:solidFill>
                   <a:srgbClr val="9FADBD"/>
                 </a:solidFill>
-                <a:latin typeface="Meiryo"/>
-                <a:ea typeface="Meiryo"/>
+                <a:latin typeface="Noto Sans JP"/>
+                <a:ea typeface="Noto Sans JP"/>
               </a:rPr>
               <a:t>経過時間 ・ 次の転換まで 03:12</a:t>
             </a:r>
@@ -62852,8 +62852,8 @@
                 <a:solidFill>
                   <a:srgbClr val="9FADBD"/>
                 </a:solidFill>
-                <a:latin typeface="Meiryo"/>
-                <a:ea typeface="Meiryo"/>
+                <a:latin typeface="Noto Sans JP"/>
+                <a:ea typeface="Noto Sans JP"/>
               </a:rPr>
               <a:t>視聴者数</a:t>
             </a:r>
@@ -62992,8 +62992,8 @@
                 <a:solidFill>
                   <a:srgbClr val="9FADBD"/>
                 </a:solidFill>
-                <a:latin typeface="Meiryo"/>
-                <a:ea typeface="Meiryo"/>
+                <a:latin typeface="Noto Sans JP"/>
+                <a:ea typeface="Noto Sans JP"/>
               </a:rPr>
               <a:t>Zoom</a:t>
             </a:r>
@@ -63132,8 +63132,8 @@
                 <a:solidFill>
                   <a:srgbClr val="9FADBD"/>
                 </a:solidFill>
-                <a:latin typeface="Meiryo"/>
-                <a:ea typeface="Meiryo"/>
+                <a:latin typeface="Noto Sans JP"/>
+                <a:ea typeface="Noto Sans JP"/>
               </a:rPr>
               <a:t>YouTube</a:t>
             </a:r>
@@ -63272,8 +63272,8 @@
                 <a:solidFill>
                   <a:srgbClr val="9FADBD"/>
                 </a:solidFill>
-                <a:latin typeface="Meiryo"/>
-                <a:ea typeface="Meiryo"/>
+                <a:latin typeface="Noto Sans JP"/>
+                <a:ea typeface="Noto Sans JP"/>
               </a:rPr>
               <a:t>Teams</a:t>
             </a:r>
@@ -63364,8 +63364,8 @@
                 <a:solidFill>
                   <a:srgbClr val="8A939E"/>
                 </a:solidFill>
-                <a:latin typeface="Meiryo"/>
-                <a:ea typeface="Meiryo"/>
+                <a:latin typeface="Noto Sans JP"/>
+                <a:ea typeface="Noto Sans JP"/>
               </a:rPr>
               <a:t>▲ 実際の画面イメージ（ライブ運用）</a:t>
             </a:r>
@@ -63410,8 +63410,8 @@
                 <a:solidFill>
                   <a:srgbClr val="8A939E"/>
                 </a:solidFill>
-                <a:latin typeface="Meiryo"/>
-                <a:ea typeface="Meiryo"/>
+                <a:latin typeface="Noto Sans JP"/>
+                <a:ea typeface="Noto Sans JP"/>
               </a:rPr>
               <a:t>GMO ONAiR</a:t>
             </a:r>
